--- a/docs/pptx/whole/jx-linsubhr-sens-throm2.pptx
+++ b/docs/pptx/whole/jx-linsubhr-sens-throm2.pptx
@@ -5339,7 +5339,7 @@
           <p:spPr>
             <a:xfrm>
               <a:off x="817517" y="1896563"/>
-              <a:ext cx="6169365" cy="82021"/>
+              <a:ext cx="6833128" cy="82021"/>
             </a:xfrm>
             <a:prstGeom prst="rect">
               <a:avLst/>
@@ -5371,7 +5371,7 @@
                   <a:latin typeface="Helvetica"/>
                   <a:cs typeface="Helvetica"/>
                 </a:rPr>
-                <a:t>subHR per 0.1 ratio decline: 1.18 (1.06-1.31), p = 0.003  |  per IQR decline (Δ = 0.27): 1.56 (1.16-2.10)  |  IQR: [0.71, 0.98]</a:t>
+                <a:t>subHR per 0.1 ratio decline: 1.18 (1.06-1.31), p_Bonf = 0.020 (n = 6)  |  per IQR decline (Δ = 0.27): 1.56 (1.16-2.10)  |  IQR: [0.71, 0.98]</a:t>
               </a:r>
             </a:p>
           </p:txBody>

--- a/docs/pptx/whole/jx-linsubhr-sens-throm2.pptx
+++ b/docs/pptx/whole/jx-linsubhr-sens-throm2.pptx
@@ -5062,8 +5062,8 @@
           </p:nvSpPr>
           <p:spPr>
             <a:xfrm>
-              <a:off x="1980137" y="5785772"/>
-              <a:ext cx="155356" cy="80101"/>
+              <a:off x="1977028" y="5785772"/>
+              <a:ext cx="161574" cy="80101"/>
             </a:xfrm>
             <a:prstGeom prst="rect">
               <a:avLst/>
@@ -5095,7 +5095,7 @@
                   <a:latin typeface="Helvetica"/>
                   <a:cs typeface="Helvetica"/>
                 </a:rPr>
-                <a:t>0.6</a:t>
+                <a:t>-40</a:t>
               </a:r>
             </a:p>
           </p:txBody>
@@ -5108,8 +5108,8 @@
           </p:nvSpPr>
           <p:spPr>
             <a:xfrm>
-              <a:off x="3731922" y="5785772"/>
-              <a:ext cx="155356" cy="80101"/>
+              <a:off x="3728813" y="5785772"/>
+              <a:ext cx="161574" cy="80101"/>
             </a:xfrm>
             <a:prstGeom prst="rect">
               <a:avLst/>
@@ -5141,7 +5141,7 @@
                   <a:latin typeface="Helvetica"/>
                   <a:cs typeface="Helvetica"/>
                 </a:rPr>
-                <a:t>0.8</a:t>
+                <a:t>-20</a:t>
               </a:r>
             </a:p>
           </p:txBody>
@@ -5154,8 +5154,8 @@
           </p:nvSpPr>
           <p:spPr>
             <a:xfrm>
-              <a:off x="5483707" y="5785772"/>
-              <a:ext cx="155356" cy="80101"/>
+              <a:off x="5530296" y="5785772"/>
+              <a:ext cx="62179" cy="80101"/>
             </a:xfrm>
             <a:prstGeom prst="rect">
               <a:avLst/>
@@ -5187,7 +5187,7 @@
                   <a:latin typeface="Helvetica"/>
                   <a:cs typeface="Helvetica"/>
                 </a:rPr>
-                <a:t>1.0</a:t>
+                <a:t>0</a:t>
               </a:r>
             </a:p>
           </p:txBody>
@@ -5200,8 +5200,8 @@
           </p:nvSpPr>
           <p:spPr>
             <a:xfrm>
-              <a:off x="7235493" y="5785772"/>
-              <a:ext cx="155356" cy="80101"/>
+              <a:off x="7250992" y="5785772"/>
+              <a:ext cx="124358" cy="80101"/>
             </a:xfrm>
             <a:prstGeom prst="rect">
               <a:avLst/>
@@ -5233,7 +5233,7 @@
                   <a:latin typeface="Helvetica"/>
                   <a:cs typeface="Helvetica"/>
                 </a:rPr>
-                <a:t>1.2</a:t>
+                <a:t>20</a:t>
               </a:r>
             </a:p>
           </p:txBody>
@@ -5246,8 +5246,8 @@
           </p:nvSpPr>
           <p:spPr>
             <a:xfrm>
-              <a:off x="2691419" y="5925448"/>
-              <a:ext cx="4051889" cy="100218"/>
+              <a:off x="1561815" y="5925448"/>
+              <a:ext cx="6311097" cy="100218"/>
             </a:xfrm>
             <a:prstGeom prst="rect">
               <a:avLst/>
@@ -5279,7 +5279,7 @@
                   <a:latin typeface="Helvetica"/>
                   <a:cs typeface="Helvetica"/>
                 </a:rPr>
-                <a:t>Sensitivity eGFR Ratio (CKD-EPI 2012 CysC / CKD-EPI 2021 Cr)</a:t>
+                <a:t>Sensitivity eGFR Difference (%): 100 × (CKD-EPI 2012 CysC − CKD-EPI 2021 Cr) / CKD-EPI 2021 Cr</a:t>
               </a:r>
             </a:p>
           </p:txBody>
@@ -5339,7 +5339,7 @@
           <p:spPr>
             <a:xfrm>
               <a:off x="817517" y="1896563"/>
-              <a:ext cx="6833128" cy="82021"/>
+              <a:ext cx="6959864" cy="82021"/>
             </a:xfrm>
             <a:prstGeom prst="rect">
               <a:avLst/>
@@ -5371,7 +5371,7 @@
                   <a:latin typeface="Helvetica"/>
                   <a:cs typeface="Helvetica"/>
                 </a:rPr>
-                <a:t>subHR per 0.1 ratio decline: 1.18 (1.06-1.31), p_Bonf = 0.020 (n = 6)  |  per IQR decline (Δ = 0.27): 1.56 (1.16-2.10)  |  IQR: [0.71, 0.98]</a:t>
+                <a:t>subHR per 10 % decline: 1.18 (1.06-1.31), p_Bonf = 0.020 (n = 6)  |  per IQR decline (Δ = 27.5 %): 1.56 (1.16-2.10)  |  IQR: [-29.1, -1.6] %</a:t>
               </a:r>
             </a:p>
           </p:txBody>

--- a/docs/pptx/whole/jx-linsubhr-sens-throm2.pptx
+++ b/docs/pptx/whole/jx-linsubhr-sens-throm2.pptx
@@ -2265,34 +2265,26 @@
         </p:sp>
         <p:sp>
           <p:nvSpPr>
-            <p:cNvPr id="4" name="pl4"/>
+            <p:cNvPr id="4" name="rc4"/>
             <p:cNvSpPr/>
             <p:nvPr/>
           </p:nvSpPr>
           <p:spPr>
             <a:xfrm>
-              <a:off x="817517" y="5142518"/>
-              <a:ext cx="7799693" cy="0"/>
+              <a:off x="457200" y="1600200"/>
+              <a:ext cx="8229600" cy="4525962"/>
             </a:xfrm>
-            <a:custGeom>
+            <a:prstGeom prst="rect">
               <a:avLst/>
-              <a:pathLst>
-                <a:path w="7799693" h="0">
-                  <a:moveTo>
-                    <a:pt x="0" y="0"/>
-                  </a:moveTo>
-                  <a:lnTo>
-                    <a:pt x="7799693" y="0"/>
-                  </a:lnTo>
-                  <a:lnTo>
-                    <a:pt x="7799693" y="0"/>
-                  </a:lnTo>
-                </a:path>
-              </a:pathLst>
-            </a:custGeom>
-            <a:ln w="6775" cap="flat">
+            </a:prstGeom>
+            <a:solidFill>
+              <a:srgbClr val="FFFFFF">
+                <a:alpha val="100000"/>
+              </a:srgbClr>
+            </a:solidFill>
+            <a:ln w="13550" cap="rnd">
               <a:solidFill>
-                <a:srgbClr val="EBEBEB">
+                <a:srgbClr val="FFFFFF">
                   <a:alpha val="100000"/>
                 </a:srgbClr>
               </a:solidFill>
@@ -2314,21 +2306,21 @@
           </p:nvSpPr>
           <p:spPr>
             <a:xfrm>
-              <a:off x="817517" y="4313054"/>
-              <a:ext cx="7799693" cy="0"/>
+              <a:off x="887106" y="3250627"/>
+              <a:ext cx="7660515" cy="0"/>
             </a:xfrm>
             <a:custGeom>
               <a:avLst/>
               <a:pathLst>
-                <a:path w="7799693" h="0">
+                <a:path w="7660515" h="0">
                   <a:moveTo>
                     <a:pt x="0" y="0"/>
                   </a:moveTo>
                   <a:lnTo>
-                    <a:pt x="7799693" y="0"/>
-                  </a:lnTo>
-                  <a:lnTo>
-                    <a:pt x="7799693" y="0"/>
+                    <a:pt x="7660515" y="0"/>
+                  </a:lnTo>
+                  <a:lnTo>
+                    <a:pt x="7660515" y="0"/>
                   </a:lnTo>
                 </a:path>
               </a:pathLst>
@@ -2357,21 +2349,21 @@
           </p:nvSpPr>
           <p:spPr>
             <a:xfrm>
-              <a:off x="817517" y="3483591"/>
-              <a:ext cx="7799693" cy="0"/>
+              <a:off x="887106" y="2951293"/>
+              <a:ext cx="7660515" cy="0"/>
             </a:xfrm>
             <a:custGeom>
               <a:avLst/>
               <a:pathLst>
-                <a:path w="7799693" h="0">
+                <a:path w="7660515" h="0">
                   <a:moveTo>
                     <a:pt x="0" y="0"/>
                   </a:moveTo>
                   <a:lnTo>
-                    <a:pt x="7799693" y="0"/>
-                  </a:lnTo>
-                  <a:lnTo>
-                    <a:pt x="7799693" y="0"/>
+                    <a:pt x="7660515" y="0"/>
+                  </a:lnTo>
+                  <a:lnTo>
+                    <a:pt x="7660515" y="0"/>
                   </a:lnTo>
                 </a:path>
               </a:pathLst>
@@ -2400,21 +2392,21 @@
           </p:nvSpPr>
           <p:spPr>
             <a:xfrm>
-              <a:off x="817517" y="2654127"/>
-              <a:ext cx="7799693" cy="0"/>
+              <a:off x="887106" y="2651959"/>
+              <a:ext cx="7660515" cy="0"/>
             </a:xfrm>
             <a:custGeom>
               <a:avLst/>
               <a:pathLst>
-                <a:path w="7799693" h="0">
+                <a:path w="7660515" h="0">
                   <a:moveTo>
                     <a:pt x="0" y="0"/>
                   </a:moveTo>
                   <a:lnTo>
-                    <a:pt x="7799693" y="0"/>
-                  </a:lnTo>
-                  <a:lnTo>
-                    <a:pt x="7799693" y="0"/>
+                    <a:pt x="7660515" y="0"/>
+                  </a:lnTo>
+                  <a:lnTo>
+                    <a:pt x="7660515" y="0"/>
                   </a:lnTo>
                 </a:path>
               </a:pathLst>
@@ -2443,21 +2435,21 @@
           </p:nvSpPr>
           <p:spPr>
             <a:xfrm>
-              <a:off x="1181923" y="2073503"/>
-              <a:ext cx="0" cy="3649639"/>
+              <a:off x="887106" y="2352625"/>
+              <a:ext cx="7660515" cy="0"/>
             </a:xfrm>
             <a:custGeom>
               <a:avLst/>
               <a:pathLst>
-                <a:path w="0" h="3649639">
+                <a:path w="7660515" h="0">
                   <a:moveTo>
-                    <a:pt x="0" y="3649639"/>
+                    <a:pt x="0" y="0"/>
                   </a:moveTo>
                   <a:lnTo>
-                    <a:pt x="0" y="0"/>
-                  </a:lnTo>
-                  <a:lnTo>
-                    <a:pt x="0" y="0"/>
+                    <a:pt x="7660515" y="0"/>
+                  </a:lnTo>
+                  <a:lnTo>
+                    <a:pt x="7660515" y="0"/>
                   </a:lnTo>
                 </a:path>
               </a:pathLst>
@@ -2486,15 +2478,15 @@
           </p:nvSpPr>
           <p:spPr>
             <a:xfrm>
-              <a:off x="2933708" y="2073503"/>
-              <a:ext cx="0" cy="3649639"/>
+              <a:off x="1245010" y="2143092"/>
+              <a:ext cx="0" cy="1317069"/>
             </a:xfrm>
             <a:custGeom>
               <a:avLst/>
               <a:pathLst>
-                <a:path w="0" h="3649639">
+                <a:path w="0" h="1317069">
                   <a:moveTo>
-                    <a:pt x="0" y="3649639"/>
+                    <a:pt x="0" y="1317069"/>
                   </a:moveTo>
                   <a:lnTo>
                     <a:pt x="0" y="0"/>
@@ -2529,15 +2521,15 @@
           </p:nvSpPr>
           <p:spPr>
             <a:xfrm>
-              <a:off x="4685493" y="2073503"/>
-              <a:ext cx="0" cy="3649639"/>
+              <a:off x="2965536" y="2143092"/>
+              <a:ext cx="0" cy="1317069"/>
             </a:xfrm>
             <a:custGeom>
               <a:avLst/>
               <a:pathLst>
-                <a:path w="0" h="3649639">
+                <a:path w="0" h="1317069">
                   <a:moveTo>
-                    <a:pt x="0" y="3649639"/>
+                    <a:pt x="0" y="1317069"/>
                   </a:moveTo>
                   <a:lnTo>
                     <a:pt x="0" y="0"/>
@@ -2572,15 +2564,15 @@
           </p:nvSpPr>
           <p:spPr>
             <a:xfrm>
-              <a:off x="6437278" y="2073503"/>
-              <a:ext cx="0" cy="3649639"/>
+              <a:off x="4686062" y="2143092"/>
+              <a:ext cx="0" cy="1317069"/>
             </a:xfrm>
             <a:custGeom>
               <a:avLst/>
               <a:pathLst>
-                <a:path w="0" h="3649639">
+                <a:path w="0" h="1317069">
                   <a:moveTo>
-                    <a:pt x="0" y="3649639"/>
+                    <a:pt x="0" y="1317069"/>
                   </a:moveTo>
                   <a:lnTo>
                     <a:pt x="0" y="0"/>
@@ -2615,15 +2607,15 @@
           </p:nvSpPr>
           <p:spPr>
             <a:xfrm>
-              <a:off x="8189063" y="2073503"/>
-              <a:ext cx="0" cy="3649639"/>
+              <a:off x="6406588" y="2143092"/>
+              <a:ext cx="0" cy="1317069"/>
             </a:xfrm>
             <a:custGeom>
               <a:avLst/>
               <a:pathLst>
-                <a:path w="0" h="3649639">
+                <a:path w="0" h="1317069">
                   <a:moveTo>
-                    <a:pt x="0" y="3649639"/>
+                    <a:pt x="0" y="1317069"/>
                   </a:moveTo>
                   <a:lnTo>
                     <a:pt x="0" y="0"/>
@@ -2658,26 +2650,26 @@
           </p:nvSpPr>
           <p:spPr>
             <a:xfrm>
-              <a:off x="817517" y="5557249"/>
-              <a:ext cx="7799693" cy="0"/>
+              <a:off x="8127114" y="2143092"/>
+              <a:ext cx="0" cy="1317069"/>
             </a:xfrm>
             <a:custGeom>
               <a:avLst/>
               <a:pathLst>
-                <a:path w="7799693" h="0">
+                <a:path w="0" h="1317069">
                   <a:moveTo>
+                    <a:pt x="0" y="1317069"/>
+                  </a:moveTo>
+                  <a:lnTo>
                     <a:pt x="0" y="0"/>
-                  </a:moveTo>
-                  <a:lnTo>
-                    <a:pt x="7799693" y="0"/>
-                  </a:lnTo>
-                  <a:lnTo>
-                    <a:pt x="7799693" y="0"/>
+                  </a:lnTo>
+                  <a:lnTo>
+                    <a:pt x="0" y="0"/>
                   </a:lnTo>
                 </a:path>
               </a:pathLst>
             </a:custGeom>
-            <a:ln w="13550" cap="flat">
+            <a:ln w="6775" cap="flat">
               <a:solidFill>
                 <a:srgbClr val="EBEBEB">
                   <a:alpha val="100000"/>
@@ -2701,21 +2693,21 @@
           </p:nvSpPr>
           <p:spPr>
             <a:xfrm>
-              <a:off x="817517" y="4727786"/>
-              <a:ext cx="7799693" cy="0"/>
+              <a:off x="887106" y="3400294"/>
+              <a:ext cx="7660515" cy="0"/>
             </a:xfrm>
             <a:custGeom>
               <a:avLst/>
               <a:pathLst>
-                <a:path w="7799693" h="0">
+                <a:path w="7660515" h="0">
                   <a:moveTo>
                     <a:pt x="0" y="0"/>
                   </a:moveTo>
                   <a:lnTo>
-                    <a:pt x="7799693" y="0"/>
-                  </a:lnTo>
-                  <a:lnTo>
-                    <a:pt x="7799693" y="0"/>
+                    <a:pt x="7660515" y="0"/>
+                  </a:lnTo>
+                  <a:lnTo>
+                    <a:pt x="7660515" y="0"/>
                   </a:lnTo>
                 </a:path>
               </a:pathLst>
@@ -2744,21 +2736,21 @@
           </p:nvSpPr>
           <p:spPr>
             <a:xfrm>
-              <a:off x="817517" y="3898322"/>
-              <a:ext cx="7799693" cy="0"/>
+              <a:off x="887106" y="3100960"/>
+              <a:ext cx="7660515" cy="0"/>
             </a:xfrm>
             <a:custGeom>
               <a:avLst/>
               <a:pathLst>
-                <a:path w="7799693" h="0">
+                <a:path w="7660515" h="0">
                   <a:moveTo>
                     <a:pt x="0" y="0"/>
                   </a:moveTo>
                   <a:lnTo>
-                    <a:pt x="7799693" y="0"/>
-                  </a:lnTo>
-                  <a:lnTo>
-                    <a:pt x="7799693" y="0"/>
+                    <a:pt x="7660515" y="0"/>
+                  </a:lnTo>
+                  <a:lnTo>
+                    <a:pt x="7660515" y="0"/>
                   </a:lnTo>
                 </a:path>
               </a:pathLst>
@@ -2787,21 +2779,21 @@
           </p:nvSpPr>
           <p:spPr>
             <a:xfrm>
-              <a:off x="817517" y="3068859"/>
-              <a:ext cx="7799693" cy="0"/>
+              <a:off x="887106" y="2801626"/>
+              <a:ext cx="7660515" cy="0"/>
             </a:xfrm>
             <a:custGeom>
               <a:avLst/>
               <a:pathLst>
-                <a:path w="7799693" h="0">
+                <a:path w="7660515" h="0">
                   <a:moveTo>
                     <a:pt x="0" y="0"/>
                   </a:moveTo>
                   <a:lnTo>
-                    <a:pt x="7799693" y="0"/>
-                  </a:lnTo>
-                  <a:lnTo>
-                    <a:pt x="7799693" y="0"/>
+                    <a:pt x="7660515" y="0"/>
+                  </a:lnTo>
+                  <a:lnTo>
+                    <a:pt x="7660515" y="0"/>
                   </a:lnTo>
                 </a:path>
               </a:pathLst>
@@ -2830,21 +2822,21 @@
           </p:nvSpPr>
           <p:spPr>
             <a:xfrm>
-              <a:off x="817517" y="2239395"/>
-              <a:ext cx="7799693" cy="0"/>
+              <a:off x="887106" y="2502292"/>
+              <a:ext cx="7660515" cy="0"/>
             </a:xfrm>
             <a:custGeom>
               <a:avLst/>
               <a:pathLst>
-                <a:path w="7799693" h="0">
+                <a:path w="7660515" h="0">
                   <a:moveTo>
                     <a:pt x="0" y="0"/>
                   </a:moveTo>
                   <a:lnTo>
-                    <a:pt x="7799693" y="0"/>
-                  </a:lnTo>
-                  <a:lnTo>
-                    <a:pt x="7799693" y="0"/>
+                    <a:pt x="7660515" y="0"/>
+                  </a:lnTo>
+                  <a:lnTo>
+                    <a:pt x="7660515" y="0"/>
                   </a:lnTo>
                 </a:path>
               </a:pathLst>
@@ -2873,21 +2865,21 @@
           </p:nvSpPr>
           <p:spPr>
             <a:xfrm>
-              <a:off x="2057816" y="2073503"/>
-              <a:ext cx="0" cy="3649639"/>
+              <a:off x="887106" y="2202958"/>
+              <a:ext cx="7660515" cy="0"/>
             </a:xfrm>
             <a:custGeom>
               <a:avLst/>
               <a:pathLst>
-                <a:path w="0" h="3649639">
+                <a:path w="7660515" h="0">
                   <a:moveTo>
-                    <a:pt x="0" y="3649639"/>
+                    <a:pt x="0" y="0"/>
                   </a:moveTo>
                   <a:lnTo>
-                    <a:pt x="0" y="0"/>
-                  </a:lnTo>
-                  <a:lnTo>
-                    <a:pt x="0" y="0"/>
+                    <a:pt x="7660515" y="0"/>
+                  </a:lnTo>
+                  <a:lnTo>
+                    <a:pt x="7660515" y="0"/>
                   </a:lnTo>
                 </a:path>
               </a:pathLst>
@@ -2916,15 +2908,15 @@
           </p:nvSpPr>
           <p:spPr>
             <a:xfrm>
-              <a:off x="3809601" y="2073503"/>
-              <a:ext cx="0" cy="3649639"/>
+              <a:off x="2105273" y="2143092"/>
+              <a:ext cx="0" cy="1317069"/>
             </a:xfrm>
             <a:custGeom>
               <a:avLst/>
               <a:pathLst>
-                <a:path w="0" h="3649639">
+                <a:path w="0" h="1317069">
                   <a:moveTo>
-                    <a:pt x="0" y="3649639"/>
+                    <a:pt x="0" y="1317069"/>
                   </a:moveTo>
                   <a:lnTo>
                     <a:pt x="0" y="0"/>
@@ -2959,15 +2951,15 @@
           </p:nvSpPr>
           <p:spPr>
             <a:xfrm>
-              <a:off x="5561386" y="2073503"/>
-              <a:ext cx="0" cy="3649639"/>
+              <a:off x="3825799" y="2143092"/>
+              <a:ext cx="0" cy="1317069"/>
             </a:xfrm>
             <a:custGeom>
               <a:avLst/>
               <a:pathLst>
-                <a:path w="0" h="3649639">
+                <a:path w="0" h="1317069">
                   <a:moveTo>
-                    <a:pt x="0" y="3649639"/>
+                    <a:pt x="0" y="1317069"/>
                   </a:moveTo>
                   <a:lnTo>
                     <a:pt x="0" y="0"/>
@@ -3002,15 +2994,15 @@
           </p:nvSpPr>
           <p:spPr>
             <a:xfrm>
-              <a:off x="7313171" y="2073503"/>
-              <a:ext cx="0" cy="3649639"/>
+              <a:off x="5546325" y="2143092"/>
+              <a:ext cx="0" cy="1317069"/>
             </a:xfrm>
             <a:custGeom>
               <a:avLst/>
               <a:pathLst>
-                <a:path w="0" h="3649639">
+                <a:path w="0" h="1317069">
                   <a:moveTo>
-                    <a:pt x="0" y="3649639"/>
+                    <a:pt x="0" y="1317069"/>
                   </a:moveTo>
                   <a:lnTo>
                     <a:pt x="0" y="0"/>
@@ -3039,618 +3031,661 @@
         </p:sp>
         <p:sp>
           <p:nvSpPr>
-            <p:cNvPr id="22" name="pg22"/>
+            <p:cNvPr id="22" name="pl22"/>
             <p:cNvSpPr/>
             <p:nvPr/>
           </p:nvSpPr>
           <p:spPr>
             <a:xfrm>
-              <a:off x="1172049" y="3442164"/>
-              <a:ext cx="7090630" cy="1877827"/>
+              <a:off x="7266851" y="2143092"/>
+              <a:ext cx="0" cy="1317069"/>
             </a:xfrm>
             <a:custGeom>
               <a:avLst/>
               <a:pathLst>
-                <a:path w="7090630" h="1877827">
+                <a:path w="0" h="1317069">
+                  <a:moveTo>
+                    <a:pt x="0" y="1317069"/>
+                  </a:moveTo>
+                  <a:lnTo>
+                    <a:pt x="0" y="0"/>
+                  </a:lnTo>
+                  <a:lnTo>
+                    <a:pt x="0" y="0"/>
+                  </a:lnTo>
+                </a:path>
+              </a:pathLst>
+            </a:custGeom>
+            <a:ln w="13550" cap="flat">
+              <a:solidFill>
+                <a:srgbClr val="EBEBEB">
+                  <a:alpha val="100000"/>
+                </a:srgbClr>
+              </a:solidFill>
+              <a:prstDash val="solid"/>
+              <a:round/>
+            </a:ln>
+          </p:spPr>
+          <p:txBody>
+            <a:bodyPr/>
+            <a:lstStyle/>
+            <a:p/>
+          </p:txBody>
+        </p:sp>
+        <p:sp>
+          <p:nvSpPr>
+            <p:cNvPr id="23" name="pg23"/>
+            <p:cNvSpPr/>
+            <p:nvPr/>
+          </p:nvSpPr>
+          <p:spPr>
+            <a:xfrm>
+              <a:off x="1235312" y="2637009"/>
+              <a:ext cx="6964104" cy="677663"/>
+            </a:xfrm>
+            <a:custGeom>
+              <a:avLst/>
+              <a:pathLst>
+                <a:path w="6964104" h="677663">
                   <a:moveTo>
                     <a:pt x="0" y="0"/>
                   </a:moveTo>
                   <a:lnTo>
-                    <a:pt x="71622" y="46226"/>
-                  </a:lnTo>
-                  <a:lnTo>
-                    <a:pt x="143245" y="91442"/>
-                  </a:lnTo>
-                  <a:lnTo>
-                    <a:pt x="214867" y="135670"/>
-                  </a:lnTo>
-                  <a:lnTo>
-                    <a:pt x="286490" y="178932"/>
-                  </a:lnTo>
-                  <a:lnTo>
-                    <a:pt x="358112" y="221248"/>
-                  </a:lnTo>
-                  <a:lnTo>
-                    <a:pt x="429735" y="262639"/>
-                  </a:lnTo>
-                  <a:lnTo>
-                    <a:pt x="501357" y="303125"/>
-                  </a:lnTo>
-                  <a:lnTo>
-                    <a:pt x="572980" y="342727"/>
-                  </a:lnTo>
-                  <a:lnTo>
-                    <a:pt x="644602" y="381463"/>
-                  </a:lnTo>
-                  <a:lnTo>
-                    <a:pt x="716225" y="419352"/>
-                  </a:lnTo>
-                  <a:lnTo>
-                    <a:pt x="787847" y="456414"/>
-                  </a:lnTo>
-                  <a:lnTo>
-                    <a:pt x="859470" y="492665"/>
-                  </a:lnTo>
-                  <a:lnTo>
-                    <a:pt x="931092" y="528124"/>
-                  </a:lnTo>
-                  <a:lnTo>
-                    <a:pt x="1002715" y="562808"/>
-                  </a:lnTo>
-                  <a:lnTo>
-                    <a:pt x="1074337" y="596734"/>
-                  </a:lnTo>
-                  <a:lnTo>
-                    <a:pt x="1145960" y="629919"/>
-                  </a:lnTo>
-                  <a:lnTo>
-                    <a:pt x="1217582" y="662378"/>
-                  </a:lnTo>
-                  <a:lnTo>
-                    <a:pt x="1289205" y="694128"/>
-                  </a:lnTo>
-                  <a:lnTo>
-                    <a:pt x="1360827" y="725184"/>
-                  </a:lnTo>
-                  <a:lnTo>
-                    <a:pt x="1432450" y="755561"/>
-                  </a:lnTo>
-                  <a:lnTo>
-                    <a:pt x="1504073" y="785274"/>
-                  </a:lnTo>
-                  <a:lnTo>
-                    <a:pt x="1575695" y="814338"/>
-                  </a:lnTo>
-                  <a:lnTo>
-                    <a:pt x="1647318" y="842767"/>
-                  </a:lnTo>
-                  <a:lnTo>
-                    <a:pt x="1718940" y="870574"/>
-                  </a:lnTo>
-                  <a:lnTo>
-                    <a:pt x="1790563" y="897774"/>
-                  </a:lnTo>
-                  <a:lnTo>
-                    <a:pt x="1862185" y="924379"/>
-                  </a:lnTo>
-                  <a:lnTo>
-                    <a:pt x="1933808" y="950402"/>
-                  </a:lnTo>
-                  <a:lnTo>
-                    <a:pt x="2005430" y="975857"/>
-                  </a:lnTo>
-                  <a:lnTo>
-                    <a:pt x="2077053" y="1000756"/>
-                  </a:lnTo>
-                  <a:lnTo>
-                    <a:pt x="2148675" y="1025110"/>
-                  </a:lnTo>
-                  <a:lnTo>
-                    <a:pt x="2220298" y="1048932"/>
-                  </a:lnTo>
-                  <a:lnTo>
-                    <a:pt x="2291920" y="1072234"/>
-                  </a:lnTo>
-                  <a:lnTo>
-                    <a:pt x="2363543" y="1095026"/>
-                  </a:lnTo>
-                  <a:lnTo>
-                    <a:pt x="2435165" y="1117320"/>
-                  </a:lnTo>
-                  <a:lnTo>
-                    <a:pt x="2506788" y="1139127"/>
-                  </a:lnTo>
-                  <a:lnTo>
-                    <a:pt x="2578410" y="1160457"/>
-                  </a:lnTo>
-                  <a:lnTo>
-                    <a:pt x="2650033" y="1181321"/>
-                  </a:lnTo>
-                  <a:lnTo>
-                    <a:pt x="2721655" y="1201729"/>
-                  </a:lnTo>
-                  <a:lnTo>
-                    <a:pt x="2793278" y="1221691"/>
-                  </a:lnTo>
-                  <a:lnTo>
-                    <a:pt x="2864901" y="1241217"/>
-                  </a:lnTo>
-                  <a:lnTo>
-                    <a:pt x="2936523" y="1260316"/>
-                  </a:lnTo>
-                  <a:lnTo>
-                    <a:pt x="3008146" y="1278997"/>
-                  </a:lnTo>
-                  <a:lnTo>
-                    <a:pt x="3079768" y="1287948"/>
-                  </a:lnTo>
-                  <a:lnTo>
-                    <a:pt x="3151391" y="1291571"/>
-                  </a:lnTo>
-                  <a:lnTo>
-                    <a:pt x="3223013" y="1295178"/>
-                  </a:lnTo>
-                  <a:lnTo>
-                    <a:pt x="3294636" y="1298769"/>
-                  </a:lnTo>
-                  <a:lnTo>
-                    <a:pt x="3366258" y="1302344"/>
-                  </a:lnTo>
-                  <a:lnTo>
-                    <a:pt x="3437881" y="1305904"/>
-                  </a:lnTo>
-                  <a:lnTo>
-                    <a:pt x="3509503" y="1309448"/>
-                  </a:lnTo>
-                  <a:lnTo>
-                    <a:pt x="3581126" y="1312977"/>
-                  </a:lnTo>
-                  <a:lnTo>
-                    <a:pt x="3652748" y="1316490"/>
-                  </a:lnTo>
-                  <a:lnTo>
-                    <a:pt x="3724371" y="1319988"/>
-                  </a:lnTo>
-                  <a:lnTo>
-                    <a:pt x="3795993" y="1323470"/>
-                  </a:lnTo>
-                  <a:lnTo>
-                    <a:pt x="3867616" y="1326937"/>
-                  </a:lnTo>
-                  <a:lnTo>
-                    <a:pt x="3939238" y="1330389"/>
-                  </a:lnTo>
-                  <a:lnTo>
-                    <a:pt x="4010861" y="1333826"/>
-                  </a:lnTo>
-                  <a:lnTo>
-                    <a:pt x="4082483" y="1337248"/>
-                  </a:lnTo>
-                  <a:lnTo>
-                    <a:pt x="4154106" y="1340655"/>
-                  </a:lnTo>
-                  <a:lnTo>
-                    <a:pt x="4225729" y="1344047"/>
-                  </a:lnTo>
-                  <a:lnTo>
-                    <a:pt x="4297351" y="1347424"/>
-                  </a:lnTo>
-                  <a:lnTo>
-                    <a:pt x="4368974" y="1350786"/>
-                  </a:lnTo>
-                  <a:lnTo>
-                    <a:pt x="4440596" y="1354134"/>
-                  </a:lnTo>
-                  <a:lnTo>
-                    <a:pt x="4512219" y="1357466"/>
-                  </a:lnTo>
-                  <a:lnTo>
-                    <a:pt x="4583841" y="1360785"/>
-                  </a:lnTo>
-                  <a:lnTo>
-                    <a:pt x="4655464" y="1364088"/>
-                  </a:lnTo>
-                  <a:lnTo>
-                    <a:pt x="4727086" y="1367378"/>
-                  </a:lnTo>
-                  <a:lnTo>
-                    <a:pt x="4798709" y="1370653"/>
-                  </a:lnTo>
-                  <a:lnTo>
-                    <a:pt x="4870331" y="1373913"/>
-                  </a:lnTo>
-                  <a:lnTo>
-                    <a:pt x="4941954" y="1377159"/>
-                  </a:lnTo>
-                  <a:lnTo>
-                    <a:pt x="5013576" y="1380391"/>
-                  </a:lnTo>
-                  <a:lnTo>
-                    <a:pt x="5085199" y="1383609"/>
-                  </a:lnTo>
-                  <a:lnTo>
-                    <a:pt x="5156821" y="1386813"/>
-                  </a:lnTo>
-                  <a:lnTo>
-                    <a:pt x="5228444" y="1390003"/>
-                  </a:lnTo>
-                  <a:lnTo>
-                    <a:pt x="5300066" y="1393179"/>
-                  </a:lnTo>
-                  <a:lnTo>
-                    <a:pt x="5371689" y="1396340"/>
-                  </a:lnTo>
-                  <a:lnTo>
-                    <a:pt x="5443311" y="1399488"/>
-                  </a:lnTo>
-                  <a:lnTo>
-                    <a:pt x="5514934" y="1402623"/>
-                  </a:lnTo>
-                  <a:lnTo>
-                    <a:pt x="5586557" y="1405743"/>
-                  </a:lnTo>
-                  <a:lnTo>
-                    <a:pt x="5658179" y="1408850"/>
-                  </a:lnTo>
-                  <a:lnTo>
-                    <a:pt x="5729802" y="1411943"/>
-                  </a:lnTo>
-                  <a:lnTo>
-                    <a:pt x="5801424" y="1415023"/>
-                  </a:lnTo>
-                  <a:lnTo>
-                    <a:pt x="5873047" y="1418089"/>
-                  </a:lnTo>
-                  <a:lnTo>
-                    <a:pt x="5944669" y="1421142"/>
-                  </a:lnTo>
-                  <a:lnTo>
-                    <a:pt x="6016292" y="1424181"/>
-                  </a:lnTo>
-                  <a:lnTo>
-                    <a:pt x="6087914" y="1427207"/>
-                  </a:lnTo>
-                  <a:lnTo>
-                    <a:pt x="6159537" y="1430220"/>
-                  </a:lnTo>
-                  <a:lnTo>
-                    <a:pt x="6231159" y="1433220"/>
-                  </a:lnTo>
-                  <a:lnTo>
-                    <a:pt x="6302782" y="1436206"/>
-                  </a:lnTo>
-                  <a:lnTo>
-                    <a:pt x="6374404" y="1439180"/>
-                  </a:lnTo>
-                  <a:lnTo>
-                    <a:pt x="6446027" y="1442140"/>
-                  </a:lnTo>
-                  <a:lnTo>
-                    <a:pt x="6517649" y="1445087"/>
-                  </a:lnTo>
-                  <a:lnTo>
-                    <a:pt x="6589272" y="1448022"/>
-                  </a:lnTo>
-                  <a:lnTo>
-                    <a:pt x="6660894" y="1450944"/>
-                  </a:lnTo>
-                  <a:lnTo>
-                    <a:pt x="6732517" y="1453852"/>
-                  </a:lnTo>
-                  <a:lnTo>
-                    <a:pt x="6804139" y="1456749"/>
-                  </a:lnTo>
-                  <a:lnTo>
-                    <a:pt x="6875762" y="1459632"/>
-                  </a:lnTo>
-                  <a:lnTo>
-                    <a:pt x="6947385" y="1462503"/>
-                  </a:lnTo>
-                  <a:lnTo>
-                    <a:pt x="7019007" y="1465361"/>
-                  </a:lnTo>
-                  <a:lnTo>
-                    <a:pt x="7090630" y="1468207"/>
-                  </a:lnTo>
-                  <a:lnTo>
-                    <a:pt x="7090630" y="1877827"/>
-                  </a:lnTo>
-                  <a:lnTo>
-                    <a:pt x="7019007" y="1872526"/>
-                  </a:lnTo>
-                  <a:lnTo>
-                    <a:pt x="6947385" y="1867106"/>
-                  </a:lnTo>
-                  <a:lnTo>
-                    <a:pt x="6875762" y="1861566"/>
-                  </a:lnTo>
-                  <a:lnTo>
-                    <a:pt x="6804139" y="1855901"/>
-                  </a:lnTo>
-                  <a:lnTo>
-                    <a:pt x="6732517" y="1850110"/>
-                  </a:lnTo>
-                  <a:lnTo>
-                    <a:pt x="6660894" y="1844189"/>
-                  </a:lnTo>
-                  <a:lnTo>
-                    <a:pt x="6589272" y="1838136"/>
-                  </a:lnTo>
-                  <a:lnTo>
-                    <a:pt x="6517649" y="1831948"/>
-                  </a:lnTo>
-                  <a:lnTo>
-                    <a:pt x="6446027" y="1825622"/>
-                  </a:lnTo>
-                  <a:lnTo>
-                    <a:pt x="6374404" y="1819154"/>
-                  </a:lnTo>
-                  <a:lnTo>
-                    <a:pt x="6302782" y="1812542"/>
-                  </a:lnTo>
-                  <a:lnTo>
-                    <a:pt x="6231159" y="1805782"/>
-                  </a:lnTo>
-                  <a:lnTo>
-                    <a:pt x="6159537" y="1798871"/>
-                  </a:lnTo>
-                  <a:lnTo>
-                    <a:pt x="6087914" y="1791805"/>
-                  </a:lnTo>
-                  <a:lnTo>
-                    <a:pt x="6016292" y="1784582"/>
-                  </a:lnTo>
-                  <a:lnTo>
-                    <a:pt x="5944669" y="1777197"/>
-                  </a:lnTo>
-                  <a:lnTo>
-                    <a:pt x="5873047" y="1769647"/>
-                  </a:lnTo>
-                  <a:lnTo>
-                    <a:pt x="5801424" y="1761929"/>
-                  </a:lnTo>
-                  <a:lnTo>
-                    <a:pt x="5729802" y="1754038"/>
-                  </a:lnTo>
-                  <a:lnTo>
-                    <a:pt x="5658179" y="1745971"/>
-                  </a:lnTo>
-                  <a:lnTo>
-                    <a:pt x="5586557" y="1737723"/>
-                  </a:lnTo>
-                  <a:lnTo>
-                    <a:pt x="5514934" y="1729291"/>
-                  </a:lnTo>
-                  <a:lnTo>
-                    <a:pt x="5443311" y="1720671"/>
-                  </a:lnTo>
-                  <a:lnTo>
-                    <a:pt x="5371689" y="1711858"/>
-                  </a:lnTo>
-                  <a:lnTo>
-                    <a:pt x="5300066" y="1702849"/>
-                  </a:lnTo>
-                  <a:lnTo>
-                    <a:pt x="5228444" y="1693638"/>
-                  </a:lnTo>
-                  <a:lnTo>
-                    <a:pt x="5156821" y="1684221"/>
-                  </a:lnTo>
-                  <a:lnTo>
-                    <a:pt x="5085199" y="1674594"/>
-                  </a:lnTo>
-                  <a:lnTo>
-                    <a:pt x="5013576" y="1664751"/>
-                  </a:lnTo>
-                  <a:lnTo>
-                    <a:pt x="4941954" y="1654689"/>
-                  </a:lnTo>
-                  <a:lnTo>
-                    <a:pt x="4870331" y="1644402"/>
-                  </a:lnTo>
-                  <a:lnTo>
-                    <a:pt x="4798709" y="1633885"/>
-                  </a:lnTo>
-                  <a:lnTo>
-                    <a:pt x="4727086" y="1623133"/>
-                  </a:lnTo>
-                  <a:lnTo>
-                    <a:pt x="4655464" y="1612141"/>
-                  </a:lnTo>
-                  <a:lnTo>
-                    <a:pt x="4583841" y="1600903"/>
-                  </a:lnTo>
-                  <a:lnTo>
-                    <a:pt x="4512219" y="1589414"/>
-                  </a:lnTo>
-                  <a:lnTo>
-                    <a:pt x="4440596" y="1577669"/>
-                  </a:lnTo>
-                  <a:lnTo>
-                    <a:pt x="4368974" y="1565661"/>
-                  </a:lnTo>
-                  <a:lnTo>
-                    <a:pt x="4297351" y="1553384"/>
-                  </a:lnTo>
-                  <a:lnTo>
-                    <a:pt x="4225729" y="1540834"/>
-                  </a:lnTo>
-                  <a:lnTo>
-                    <a:pt x="4154106" y="1528003"/>
-                  </a:lnTo>
-                  <a:lnTo>
-                    <a:pt x="4082483" y="1514885"/>
-                  </a:lnTo>
-                  <a:lnTo>
-                    <a:pt x="4010861" y="1501474"/>
-                  </a:lnTo>
-                  <a:lnTo>
-                    <a:pt x="3939238" y="1487764"/>
-                  </a:lnTo>
-                  <a:lnTo>
-                    <a:pt x="3867616" y="1473747"/>
-                  </a:lnTo>
-                  <a:lnTo>
-                    <a:pt x="3795993" y="1459417"/>
-                  </a:lnTo>
-                  <a:lnTo>
-                    <a:pt x="3724371" y="1444766"/>
-                  </a:lnTo>
-                  <a:lnTo>
-                    <a:pt x="3652748" y="1429789"/>
-                  </a:lnTo>
-                  <a:lnTo>
-                    <a:pt x="3581126" y="1414476"/>
-                  </a:lnTo>
-                  <a:lnTo>
-                    <a:pt x="3509503" y="1398822"/>
-                  </a:lnTo>
-                  <a:lnTo>
-                    <a:pt x="3437881" y="1382818"/>
-                  </a:lnTo>
-                  <a:lnTo>
-                    <a:pt x="3366258" y="1366456"/>
-                  </a:lnTo>
-                  <a:lnTo>
-                    <a:pt x="3294636" y="1349729"/>
-                  </a:lnTo>
-                  <a:lnTo>
-                    <a:pt x="3223013" y="1332628"/>
-                  </a:lnTo>
-                  <a:lnTo>
-                    <a:pt x="3151391" y="1315144"/>
-                  </a:lnTo>
-                  <a:lnTo>
-                    <a:pt x="3079768" y="1297271"/>
-                  </a:lnTo>
-                  <a:lnTo>
-                    <a:pt x="3008146" y="1284310"/>
-                  </a:lnTo>
-                  <a:lnTo>
-                    <a:pt x="2936523" y="1280655"/>
-                  </a:lnTo>
-                  <a:lnTo>
-                    <a:pt x="2864901" y="1276984"/>
-                  </a:lnTo>
-                  <a:lnTo>
-                    <a:pt x="2793278" y="1273297"/>
-                  </a:lnTo>
-                  <a:lnTo>
-                    <a:pt x="2721655" y="1269594"/>
-                  </a:lnTo>
-                  <a:lnTo>
-                    <a:pt x="2650033" y="1265875"/>
-                  </a:lnTo>
-                  <a:lnTo>
-                    <a:pt x="2578410" y="1262139"/>
-                  </a:lnTo>
-                  <a:lnTo>
-                    <a:pt x="2506788" y="1258387"/>
-                  </a:lnTo>
-                  <a:lnTo>
-                    <a:pt x="2435165" y="1254618"/>
-                  </a:lnTo>
-                  <a:lnTo>
-                    <a:pt x="2363543" y="1250833"/>
-                  </a:lnTo>
-                  <a:lnTo>
-                    <a:pt x="2291920" y="1247031"/>
-                  </a:lnTo>
-                  <a:lnTo>
-                    <a:pt x="2220298" y="1243212"/>
-                  </a:lnTo>
-                  <a:lnTo>
-                    <a:pt x="2148675" y="1239376"/>
-                  </a:lnTo>
-                  <a:lnTo>
-                    <a:pt x="2077053" y="1235524"/>
-                  </a:lnTo>
-                  <a:lnTo>
-                    <a:pt x="2005430" y="1231655"/>
-                  </a:lnTo>
-                  <a:lnTo>
-                    <a:pt x="1933808" y="1227768"/>
-                  </a:lnTo>
-                  <a:lnTo>
-                    <a:pt x="1862185" y="1223865"/>
-                  </a:lnTo>
-                  <a:lnTo>
-                    <a:pt x="1790563" y="1219944"/>
-                  </a:lnTo>
-                  <a:lnTo>
-                    <a:pt x="1718940" y="1216006"/>
-                  </a:lnTo>
-                  <a:lnTo>
-                    <a:pt x="1647318" y="1212051"/>
-                  </a:lnTo>
-                  <a:lnTo>
-                    <a:pt x="1575695" y="1208079"/>
-                  </a:lnTo>
-                  <a:lnTo>
-                    <a:pt x="1504073" y="1204089"/>
-                  </a:lnTo>
-                  <a:lnTo>
-                    <a:pt x="1432450" y="1200081"/>
-                  </a:lnTo>
-                  <a:lnTo>
-                    <a:pt x="1360827" y="1196056"/>
-                  </a:lnTo>
-                  <a:lnTo>
-                    <a:pt x="1289205" y="1192013"/>
-                  </a:lnTo>
-                  <a:lnTo>
-                    <a:pt x="1217582" y="1187952"/>
-                  </a:lnTo>
-                  <a:lnTo>
-                    <a:pt x="1145960" y="1183874"/>
-                  </a:lnTo>
-                  <a:lnTo>
-                    <a:pt x="1074337" y="1179777"/>
-                  </a:lnTo>
-                  <a:lnTo>
-                    <a:pt x="1002715" y="1175662"/>
-                  </a:lnTo>
-                  <a:lnTo>
-                    <a:pt x="931092" y="1171530"/>
-                  </a:lnTo>
-                  <a:lnTo>
-                    <a:pt x="859470" y="1167379"/>
-                  </a:lnTo>
-                  <a:lnTo>
-                    <a:pt x="787847" y="1163210"/>
-                  </a:lnTo>
-                  <a:lnTo>
-                    <a:pt x="716225" y="1159022"/>
-                  </a:lnTo>
-                  <a:lnTo>
-                    <a:pt x="644602" y="1154817"/>
-                  </a:lnTo>
-                  <a:lnTo>
-                    <a:pt x="572980" y="1150592"/>
-                  </a:lnTo>
-                  <a:lnTo>
-                    <a:pt x="501357" y="1146349"/>
-                  </a:lnTo>
-                  <a:lnTo>
-                    <a:pt x="429735" y="1142088"/>
-                  </a:lnTo>
-                  <a:lnTo>
-                    <a:pt x="358112" y="1137807"/>
-                  </a:lnTo>
-                  <a:lnTo>
-                    <a:pt x="286490" y="1133508"/>
-                  </a:lnTo>
-                  <a:lnTo>
-                    <a:pt x="214867" y="1129190"/>
-                  </a:lnTo>
-                  <a:lnTo>
-                    <a:pt x="143245" y="1124853"/>
-                  </a:lnTo>
-                  <a:lnTo>
-                    <a:pt x="71622" y="1120497"/>
-                  </a:lnTo>
-                  <a:lnTo>
-                    <a:pt x="0" y="1116121"/>
+                    <a:pt x="70344" y="16682"/>
+                  </a:lnTo>
+                  <a:lnTo>
+                    <a:pt x="140688" y="32999"/>
+                  </a:lnTo>
+                  <a:lnTo>
+                    <a:pt x="211033" y="48960"/>
+                  </a:lnTo>
+                  <a:lnTo>
+                    <a:pt x="281377" y="64572"/>
+                  </a:lnTo>
+                  <a:lnTo>
+                    <a:pt x="351722" y="79843"/>
+                  </a:lnTo>
+                  <a:lnTo>
+                    <a:pt x="422066" y="94780"/>
+                  </a:lnTo>
+                  <a:lnTo>
+                    <a:pt x="492411" y="109390"/>
+                  </a:lnTo>
+                  <a:lnTo>
+                    <a:pt x="562755" y="123682"/>
+                  </a:lnTo>
+                  <a:lnTo>
+                    <a:pt x="633100" y="137661"/>
+                  </a:lnTo>
+                  <a:lnTo>
+                    <a:pt x="703444" y="151334"/>
+                  </a:lnTo>
+                  <a:lnTo>
+                    <a:pt x="773789" y="164709"/>
+                  </a:lnTo>
+                  <a:lnTo>
+                    <a:pt x="844133" y="177791"/>
+                  </a:lnTo>
+                  <a:lnTo>
+                    <a:pt x="914478" y="190587"/>
+                  </a:lnTo>
+                  <a:lnTo>
+                    <a:pt x="984822" y="203104"/>
+                  </a:lnTo>
+                  <a:lnTo>
+                    <a:pt x="1055167" y="215347"/>
+                  </a:lnTo>
+                  <a:lnTo>
+                    <a:pt x="1125511" y="227322"/>
+                  </a:lnTo>
+                  <a:lnTo>
+                    <a:pt x="1195856" y="239036"/>
+                  </a:lnTo>
+                  <a:lnTo>
+                    <a:pt x="1266200" y="250494"/>
+                  </a:lnTo>
+                  <a:lnTo>
+                    <a:pt x="1336545" y="261701"/>
+                  </a:lnTo>
+                  <a:lnTo>
+                    <a:pt x="1406889" y="272664"/>
+                  </a:lnTo>
+                  <a:lnTo>
+                    <a:pt x="1477234" y="283387"/>
+                  </a:lnTo>
+                  <a:lnTo>
+                    <a:pt x="1547578" y="293875"/>
+                  </a:lnTo>
+                  <a:lnTo>
+                    <a:pt x="1617923" y="304134"/>
+                  </a:lnTo>
+                  <a:lnTo>
+                    <a:pt x="1688267" y="314169"/>
+                  </a:lnTo>
+                  <a:lnTo>
+                    <a:pt x="1758612" y="323985"/>
+                  </a:lnTo>
+                  <a:lnTo>
+                    <a:pt x="1828956" y="333586"/>
+                  </a:lnTo>
+                  <a:lnTo>
+                    <a:pt x="1899301" y="342978"/>
+                  </a:lnTo>
+                  <a:lnTo>
+                    <a:pt x="1969645" y="352164"/>
+                  </a:lnTo>
+                  <a:lnTo>
+                    <a:pt x="2039990" y="361149"/>
+                  </a:lnTo>
+                  <a:lnTo>
+                    <a:pt x="2110334" y="369938"/>
+                  </a:lnTo>
+                  <a:lnTo>
+                    <a:pt x="2180679" y="378535"/>
+                  </a:lnTo>
+                  <a:lnTo>
+                    <a:pt x="2251023" y="386944"/>
+                  </a:lnTo>
+                  <a:lnTo>
+                    <a:pt x="2321368" y="395169"/>
+                  </a:lnTo>
+                  <a:lnTo>
+                    <a:pt x="2391712" y="403214"/>
+                  </a:lnTo>
+                  <a:lnTo>
+                    <a:pt x="2462057" y="411084"/>
+                  </a:lnTo>
+                  <a:lnTo>
+                    <a:pt x="2532401" y="418781"/>
+                  </a:lnTo>
+                  <a:lnTo>
+                    <a:pt x="2602746" y="426311"/>
+                  </a:lnTo>
+                  <a:lnTo>
+                    <a:pt x="2673090" y="433675"/>
+                  </a:lnTo>
+                  <a:lnTo>
+                    <a:pt x="2743435" y="440879"/>
+                  </a:lnTo>
+                  <a:lnTo>
+                    <a:pt x="2813779" y="447926"/>
+                  </a:lnTo>
+                  <a:lnTo>
+                    <a:pt x="2884124" y="454818"/>
+                  </a:lnTo>
+                  <a:lnTo>
+                    <a:pt x="2954468" y="461560"/>
+                  </a:lnTo>
+                  <a:lnTo>
+                    <a:pt x="3024813" y="464790"/>
+                  </a:lnTo>
+                  <a:lnTo>
+                    <a:pt x="3095157" y="466097"/>
+                  </a:lnTo>
+                  <a:lnTo>
+                    <a:pt x="3165502" y="467399"/>
+                  </a:lnTo>
+                  <a:lnTo>
+                    <a:pt x="3235846" y="468695"/>
+                  </a:lnTo>
+                  <a:lnTo>
+                    <a:pt x="3306191" y="469985"/>
+                  </a:lnTo>
+                  <a:lnTo>
+                    <a:pt x="3376535" y="471270"/>
+                  </a:lnTo>
+                  <a:lnTo>
+                    <a:pt x="3446880" y="472549"/>
+                  </a:lnTo>
+                  <a:lnTo>
+                    <a:pt x="3517224" y="473822"/>
+                  </a:lnTo>
+                  <a:lnTo>
+                    <a:pt x="3587569" y="475090"/>
+                  </a:lnTo>
+                  <a:lnTo>
+                    <a:pt x="3657913" y="476352"/>
+                  </a:lnTo>
+                  <a:lnTo>
+                    <a:pt x="3728257" y="477609"/>
+                  </a:lnTo>
+                  <a:lnTo>
+                    <a:pt x="3798602" y="478860"/>
+                  </a:lnTo>
+                  <a:lnTo>
+                    <a:pt x="3868946" y="480106"/>
+                  </a:lnTo>
+                  <a:lnTo>
+                    <a:pt x="3939291" y="481346"/>
+                  </a:lnTo>
+                  <a:lnTo>
+                    <a:pt x="4009635" y="482581"/>
+                  </a:lnTo>
+                  <a:lnTo>
+                    <a:pt x="4079980" y="483810"/>
+                  </a:lnTo>
+                  <a:lnTo>
+                    <a:pt x="4150324" y="485035"/>
+                  </a:lnTo>
+                  <a:lnTo>
+                    <a:pt x="4220669" y="486253"/>
+                  </a:lnTo>
+                  <a:lnTo>
+                    <a:pt x="4291013" y="487467"/>
+                  </a:lnTo>
+                  <a:lnTo>
+                    <a:pt x="4361358" y="488675"/>
+                  </a:lnTo>
+                  <a:lnTo>
+                    <a:pt x="4431702" y="489877"/>
+                  </a:lnTo>
+                  <a:lnTo>
+                    <a:pt x="4502047" y="491075"/>
+                  </a:lnTo>
+                  <a:lnTo>
+                    <a:pt x="4572391" y="492267"/>
+                  </a:lnTo>
+                  <a:lnTo>
+                    <a:pt x="4642736" y="493454"/>
+                  </a:lnTo>
+                  <a:lnTo>
+                    <a:pt x="4713080" y="494636"/>
+                  </a:lnTo>
+                  <a:lnTo>
+                    <a:pt x="4783425" y="495813"/>
+                  </a:lnTo>
+                  <a:lnTo>
+                    <a:pt x="4853769" y="496984"/>
+                  </a:lnTo>
+                  <a:lnTo>
+                    <a:pt x="4924114" y="498150"/>
+                  </a:lnTo>
+                  <a:lnTo>
+                    <a:pt x="4994458" y="499312"/>
+                  </a:lnTo>
+                  <a:lnTo>
+                    <a:pt x="5064803" y="500468"/>
+                  </a:lnTo>
+                  <a:lnTo>
+                    <a:pt x="5135147" y="501619"/>
+                  </a:lnTo>
+                  <a:lnTo>
+                    <a:pt x="5205492" y="502765"/>
+                  </a:lnTo>
+                  <a:lnTo>
+                    <a:pt x="5275836" y="503906"/>
+                  </a:lnTo>
+                  <a:lnTo>
+                    <a:pt x="5346181" y="505042"/>
+                  </a:lnTo>
+                  <a:lnTo>
+                    <a:pt x="5416525" y="506173"/>
+                  </a:lnTo>
+                  <a:lnTo>
+                    <a:pt x="5486870" y="507299"/>
+                  </a:lnTo>
+                  <a:lnTo>
+                    <a:pt x="5557214" y="508421"/>
+                  </a:lnTo>
+                  <a:lnTo>
+                    <a:pt x="5627559" y="509537"/>
+                  </a:lnTo>
+                  <a:lnTo>
+                    <a:pt x="5697903" y="510648"/>
+                  </a:lnTo>
+                  <a:lnTo>
+                    <a:pt x="5768248" y="511755"/>
+                  </a:lnTo>
+                  <a:lnTo>
+                    <a:pt x="5838592" y="512856"/>
+                  </a:lnTo>
+                  <a:lnTo>
+                    <a:pt x="5908937" y="513953"/>
+                  </a:lnTo>
+                  <a:lnTo>
+                    <a:pt x="5979281" y="515045"/>
+                  </a:lnTo>
+                  <a:lnTo>
+                    <a:pt x="6049626" y="516132"/>
+                  </a:lnTo>
+                  <a:lnTo>
+                    <a:pt x="6119970" y="517215"/>
+                  </a:lnTo>
+                  <a:lnTo>
+                    <a:pt x="6190315" y="518293"/>
+                  </a:lnTo>
+                  <a:lnTo>
+                    <a:pt x="6260659" y="519366"/>
+                  </a:lnTo>
+                  <a:lnTo>
+                    <a:pt x="6331004" y="520434"/>
+                  </a:lnTo>
+                  <a:lnTo>
+                    <a:pt x="6401348" y="521498"/>
+                  </a:lnTo>
+                  <a:lnTo>
+                    <a:pt x="6471693" y="522557"/>
+                  </a:lnTo>
+                  <a:lnTo>
+                    <a:pt x="6542037" y="523611"/>
+                  </a:lnTo>
+                  <a:lnTo>
+                    <a:pt x="6612382" y="524661"/>
+                  </a:lnTo>
+                  <a:lnTo>
+                    <a:pt x="6682726" y="525706"/>
+                  </a:lnTo>
+                  <a:lnTo>
+                    <a:pt x="6753071" y="526747"/>
+                  </a:lnTo>
+                  <a:lnTo>
+                    <a:pt x="6823415" y="527783"/>
+                  </a:lnTo>
+                  <a:lnTo>
+                    <a:pt x="6893760" y="528814"/>
+                  </a:lnTo>
+                  <a:lnTo>
+                    <a:pt x="6964104" y="529841"/>
+                  </a:lnTo>
+                  <a:lnTo>
+                    <a:pt x="6964104" y="677663"/>
+                  </a:lnTo>
+                  <a:lnTo>
+                    <a:pt x="6893760" y="675750"/>
+                  </a:lnTo>
+                  <a:lnTo>
+                    <a:pt x="6823415" y="673794"/>
+                  </a:lnTo>
+                  <a:lnTo>
+                    <a:pt x="6753071" y="671795"/>
+                  </a:lnTo>
+                  <a:lnTo>
+                    <a:pt x="6682726" y="669751"/>
+                  </a:lnTo>
+                  <a:lnTo>
+                    <a:pt x="6612382" y="667661"/>
+                  </a:lnTo>
+                  <a:lnTo>
+                    <a:pt x="6542037" y="665524"/>
+                  </a:lnTo>
+                  <a:lnTo>
+                    <a:pt x="6471693" y="663340"/>
+                  </a:lnTo>
+                  <a:lnTo>
+                    <a:pt x="6401348" y="661107"/>
+                  </a:lnTo>
+                  <a:lnTo>
+                    <a:pt x="6331004" y="658824"/>
+                  </a:lnTo>
+                  <a:lnTo>
+                    <a:pt x="6260659" y="656490"/>
+                  </a:lnTo>
+                  <a:lnTo>
+                    <a:pt x="6190315" y="654103"/>
+                  </a:lnTo>
+                  <a:lnTo>
+                    <a:pt x="6119970" y="651664"/>
+                  </a:lnTo>
+                  <a:lnTo>
+                    <a:pt x="6049626" y="649170"/>
+                  </a:lnTo>
+                  <a:lnTo>
+                    <a:pt x="5979281" y="646620"/>
+                  </a:lnTo>
+                  <a:lnTo>
+                    <a:pt x="5908937" y="644013"/>
+                  </a:lnTo>
+                  <a:lnTo>
+                    <a:pt x="5838592" y="641348"/>
+                  </a:lnTo>
+                  <a:lnTo>
+                    <a:pt x="5768248" y="638624"/>
+                  </a:lnTo>
+                  <a:lnTo>
+                    <a:pt x="5697903" y="635838"/>
+                  </a:lnTo>
+                  <a:lnTo>
+                    <a:pt x="5627559" y="632991"/>
+                  </a:lnTo>
+                  <a:lnTo>
+                    <a:pt x="5557214" y="630079"/>
+                  </a:lnTo>
+                  <a:lnTo>
+                    <a:pt x="5486870" y="627103"/>
+                  </a:lnTo>
+                  <a:lnTo>
+                    <a:pt x="5416525" y="624060"/>
+                  </a:lnTo>
+                  <a:lnTo>
+                    <a:pt x="5346181" y="620949"/>
+                  </a:lnTo>
+                  <a:lnTo>
+                    <a:pt x="5275836" y="617769"/>
+                  </a:lnTo>
+                  <a:lnTo>
+                    <a:pt x="5205492" y="614518"/>
+                  </a:lnTo>
+                  <a:lnTo>
+                    <a:pt x="5135147" y="611194"/>
+                  </a:lnTo>
+                  <a:lnTo>
+                    <a:pt x="5064803" y="607795"/>
+                  </a:lnTo>
+                  <a:lnTo>
+                    <a:pt x="4994458" y="604321"/>
+                  </a:lnTo>
+                  <a:lnTo>
+                    <a:pt x="4924114" y="600769"/>
+                  </a:lnTo>
+                  <a:lnTo>
+                    <a:pt x="4853769" y="597138"/>
+                  </a:lnTo>
+                  <a:lnTo>
+                    <a:pt x="4783425" y="593426"/>
+                  </a:lnTo>
+                  <a:lnTo>
+                    <a:pt x="4713080" y="589630"/>
+                  </a:lnTo>
+                  <a:lnTo>
+                    <a:pt x="4642736" y="585750"/>
+                  </a:lnTo>
+                  <a:lnTo>
+                    <a:pt x="4572391" y="581783"/>
+                  </a:lnTo>
+                  <a:lnTo>
+                    <a:pt x="4502047" y="577728"/>
+                  </a:lnTo>
+                  <a:lnTo>
+                    <a:pt x="4431702" y="573582"/>
+                  </a:lnTo>
+                  <a:lnTo>
+                    <a:pt x="4361358" y="569343"/>
+                  </a:lnTo>
+                  <a:lnTo>
+                    <a:pt x="4291013" y="565010"/>
+                  </a:lnTo>
+                  <a:lnTo>
+                    <a:pt x="4220669" y="560580"/>
+                  </a:lnTo>
+                  <a:lnTo>
+                    <a:pt x="4150324" y="556050"/>
+                  </a:lnTo>
+                  <a:lnTo>
+                    <a:pt x="4079980" y="551420"/>
+                  </a:lnTo>
+                  <a:lnTo>
+                    <a:pt x="4009635" y="546686"/>
+                  </a:lnTo>
+                  <a:lnTo>
+                    <a:pt x="3939291" y="541846"/>
+                  </a:lnTo>
+                  <a:lnTo>
+                    <a:pt x="3868946" y="536899"/>
+                  </a:lnTo>
+                  <a:lnTo>
+                    <a:pt x="3798602" y="531840"/>
+                  </a:lnTo>
+                  <a:lnTo>
+                    <a:pt x="3728257" y="526669"/>
+                  </a:lnTo>
+                  <a:lnTo>
+                    <a:pt x="3657913" y="521382"/>
+                  </a:lnTo>
+                  <a:lnTo>
+                    <a:pt x="3587569" y="515977"/>
+                  </a:lnTo>
+                  <a:lnTo>
+                    <a:pt x="3517224" y="510451"/>
+                  </a:lnTo>
+                  <a:lnTo>
+                    <a:pt x="3446880" y="504802"/>
+                  </a:lnTo>
+                  <a:lnTo>
+                    <a:pt x="3376535" y="499026"/>
+                  </a:lnTo>
+                  <a:lnTo>
+                    <a:pt x="3306191" y="493122"/>
+                  </a:lnTo>
+                  <a:lnTo>
+                    <a:pt x="3235846" y="487085"/>
+                  </a:lnTo>
+                  <a:lnTo>
+                    <a:pt x="3165502" y="480914"/>
+                  </a:lnTo>
+                  <a:lnTo>
+                    <a:pt x="3095157" y="474604"/>
+                  </a:lnTo>
+                  <a:lnTo>
+                    <a:pt x="3024813" y="468154"/>
+                  </a:lnTo>
+                  <a:lnTo>
+                    <a:pt x="2954468" y="463477"/>
+                  </a:lnTo>
+                  <a:lnTo>
+                    <a:pt x="2884124" y="462158"/>
+                  </a:lnTo>
+                  <a:lnTo>
+                    <a:pt x="2813779" y="460833"/>
+                  </a:lnTo>
+                  <a:lnTo>
+                    <a:pt x="2743435" y="459503"/>
+                  </a:lnTo>
+                  <a:lnTo>
+                    <a:pt x="2673090" y="458166"/>
+                  </a:lnTo>
+                  <a:lnTo>
+                    <a:pt x="2602746" y="456824"/>
+                  </a:lnTo>
+                  <a:lnTo>
+                    <a:pt x="2532401" y="455476"/>
+                  </a:lnTo>
+                  <a:lnTo>
+                    <a:pt x="2462057" y="454122"/>
+                  </a:lnTo>
+                  <a:lnTo>
+                    <a:pt x="2391712" y="452762"/>
+                  </a:lnTo>
+                  <a:lnTo>
+                    <a:pt x="2321368" y="451396"/>
+                  </a:lnTo>
+                  <a:lnTo>
+                    <a:pt x="2251023" y="450024"/>
+                  </a:lnTo>
+                  <a:lnTo>
+                    <a:pt x="2180679" y="448646"/>
+                  </a:lnTo>
+                  <a:lnTo>
+                    <a:pt x="2110334" y="447261"/>
+                  </a:lnTo>
+                  <a:lnTo>
+                    <a:pt x="2039990" y="445871"/>
+                  </a:lnTo>
+                  <a:lnTo>
+                    <a:pt x="1969645" y="444475"/>
+                  </a:lnTo>
+                  <a:lnTo>
+                    <a:pt x="1899301" y="443072"/>
+                  </a:lnTo>
+                  <a:lnTo>
+                    <a:pt x="1828956" y="441664"/>
+                  </a:lnTo>
+                  <a:lnTo>
+                    <a:pt x="1758612" y="440249"/>
+                  </a:lnTo>
+                  <a:lnTo>
+                    <a:pt x="1688267" y="438828"/>
+                  </a:lnTo>
+                  <a:lnTo>
+                    <a:pt x="1617923" y="437400"/>
+                  </a:lnTo>
+                  <a:lnTo>
+                    <a:pt x="1547578" y="435967"/>
+                  </a:lnTo>
+                  <a:lnTo>
+                    <a:pt x="1477234" y="434527"/>
+                  </a:lnTo>
+                  <a:lnTo>
+                    <a:pt x="1406889" y="433081"/>
+                  </a:lnTo>
+                  <a:lnTo>
+                    <a:pt x="1336545" y="431628"/>
+                  </a:lnTo>
+                  <a:lnTo>
+                    <a:pt x="1266200" y="430169"/>
+                  </a:lnTo>
+                  <a:lnTo>
+                    <a:pt x="1195856" y="428704"/>
+                  </a:lnTo>
+                  <a:lnTo>
+                    <a:pt x="1125511" y="427232"/>
+                  </a:lnTo>
+                  <a:lnTo>
+                    <a:pt x="1055167" y="425753"/>
+                  </a:lnTo>
+                  <a:lnTo>
+                    <a:pt x="984822" y="424269"/>
+                  </a:lnTo>
+                  <a:lnTo>
+                    <a:pt x="914478" y="422777"/>
+                  </a:lnTo>
+                  <a:lnTo>
+                    <a:pt x="844133" y="421279"/>
+                  </a:lnTo>
+                  <a:lnTo>
+                    <a:pt x="773789" y="419775"/>
+                  </a:lnTo>
+                  <a:lnTo>
+                    <a:pt x="703444" y="418264"/>
+                  </a:lnTo>
+                  <a:lnTo>
+                    <a:pt x="633100" y="416746"/>
+                  </a:lnTo>
+                  <a:lnTo>
+                    <a:pt x="562755" y="415221"/>
+                  </a:lnTo>
+                  <a:lnTo>
+                    <a:pt x="492411" y="413690"/>
+                  </a:lnTo>
+                  <a:lnTo>
+                    <a:pt x="422066" y="412152"/>
+                  </a:lnTo>
+                  <a:lnTo>
+                    <a:pt x="351722" y="410608"/>
+                  </a:lnTo>
+                  <a:lnTo>
+                    <a:pt x="281377" y="409056"/>
+                  </a:lnTo>
+                  <a:lnTo>
+                    <a:pt x="211033" y="407498"/>
+                  </a:lnTo>
+                  <a:lnTo>
+                    <a:pt x="140688" y="405933"/>
+                  </a:lnTo>
+                  <a:lnTo>
+                    <a:pt x="70344" y="404361"/>
+                  </a:lnTo>
+                  <a:lnTo>
+                    <a:pt x="0" y="402782"/>
                   </a:lnTo>
                   <a:close/>
                 </a:path>
@@ -3670,643 +3705,318 @@
         </p:sp>
         <p:sp>
           <p:nvSpPr>
-            <p:cNvPr id="23" name="pl23"/>
-            <p:cNvSpPr/>
-            <p:nvPr/>
-          </p:nvSpPr>
-          <p:spPr>
-            <a:xfrm>
-              <a:off x="1172049" y="3442164"/>
-              <a:ext cx="7090630" cy="1468207"/>
-            </a:xfrm>
-            <a:custGeom>
-              <a:avLst/>
-              <a:pathLst>
-                <a:path w="7090630" h="1468207">
-                  <a:moveTo>
-                    <a:pt x="0" y="0"/>
-                  </a:moveTo>
-                  <a:lnTo>
-                    <a:pt x="71622" y="46226"/>
-                  </a:lnTo>
-                  <a:lnTo>
-                    <a:pt x="143245" y="91442"/>
-                  </a:lnTo>
-                  <a:lnTo>
-                    <a:pt x="214867" y="135670"/>
-                  </a:lnTo>
-                  <a:lnTo>
-                    <a:pt x="286490" y="178932"/>
-                  </a:lnTo>
-                  <a:lnTo>
-                    <a:pt x="358112" y="221248"/>
-                  </a:lnTo>
-                  <a:lnTo>
-                    <a:pt x="429735" y="262639"/>
-                  </a:lnTo>
-                  <a:lnTo>
-                    <a:pt x="501357" y="303125"/>
-                  </a:lnTo>
-                  <a:lnTo>
-                    <a:pt x="572980" y="342727"/>
-                  </a:lnTo>
-                  <a:lnTo>
-                    <a:pt x="644602" y="381463"/>
-                  </a:lnTo>
-                  <a:lnTo>
-                    <a:pt x="716225" y="419352"/>
-                  </a:lnTo>
-                  <a:lnTo>
-                    <a:pt x="787847" y="456414"/>
-                  </a:lnTo>
-                  <a:lnTo>
-                    <a:pt x="859470" y="492665"/>
-                  </a:lnTo>
-                  <a:lnTo>
-                    <a:pt x="931092" y="528124"/>
-                  </a:lnTo>
-                  <a:lnTo>
-                    <a:pt x="1002715" y="562808"/>
-                  </a:lnTo>
-                  <a:lnTo>
-                    <a:pt x="1074337" y="596734"/>
-                  </a:lnTo>
-                  <a:lnTo>
-                    <a:pt x="1145960" y="629919"/>
-                  </a:lnTo>
-                  <a:lnTo>
-                    <a:pt x="1217582" y="662378"/>
-                  </a:lnTo>
-                  <a:lnTo>
-                    <a:pt x="1289205" y="694128"/>
-                  </a:lnTo>
-                  <a:lnTo>
-                    <a:pt x="1360827" y="725184"/>
-                  </a:lnTo>
-                  <a:lnTo>
-                    <a:pt x="1432450" y="755561"/>
-                  </a:lnTo>
-                  <a:lnTo>
-                    <a:pt x="1504073" y="785274"/>
-                  </a:lnTo>
-                  <a:lnTo>
-                    <a:pt x="1575695" y="814338"/>
-                  </a:lnTo>
-                  <a:lnTo>
-                    <a:pt x="1647318" y="842767"/>
-                  </a:lnTo>
-                  <a:lnTo>
-                    <a:pt x="1718940" y="870574"/>
-                  </a:lnTo>
-                  <a:lnTo>
-                    <a:pt x="1790563" y="897774"/>
-                  </a:lnTo>
-                  <a:lnTo>
-                    <a:pt x="1862185" y="924379"/>
-                  </a:lnTo>
-                  <a:lnTo>
-                    <a:pt x="1933808" y="950402"/>
-                  </a:lnTo>
-                  <a:lnTo>
-                    <a:pt x="2005430" y="975857"/>
-                  </a:lnTo>
-                  <a:lnTo>
-                    <a:pt x="2077053" y="1000756"/>
-                  </a:lnTo>
-                  <a:lnTo>
-                    <a:pt x="2148675" y="1025110"/>
-                  </a:lnTo>
-                  <a:lnTo>
-                    <a:pt x="2220298" y="1048932"/>
-                  </a:lnTo>
-                  <a:lnTo>
-                    <a:pt x="2291920" y="1072234"/>
-                  </a:lnTo>
-                  <a:lnTo>
-                    <a:pt x="2363543" y="1095026"/>
-                  </a:lnTo>
-                  <a:lnTo>
-                    <a:pt x="2435165" y="1117320"/>
-                  </a:lnTo>
-                  <a:lnTo>
-                    <a:pt x="2506788" y="1139127"/>
-                  </a:lnTo>
-                  <a:lnTo>
-                    <a:pt x="2578410" y="1160457"/>
-                  </a:lnTo>
-                  <a:lnTo>
-                    <a:pt x="2650033" y="1181321"/>
-                  </a:lnTo>
-                  <a:lnTo>
-                    <a:pt x="2721655" y="1201729"/>
-                  </a:lnTo>
-                  <a:lnTo>
-                    <a:pt x="2793278" y="1221691"/>
-                  </a:lnTo>
-                  <a:lnTo>
-                    <a:pt x="2864901" y="1241217"/>
-                  </a:lnTo>
-                  <a:lnTo>
-                    <a:pt x="2936523" y="1260316"/>
-                  </a:lnTo>
-                  <a:lnTo>
-                    <a:pt x="3008146" y="1278997"/>
-                  </a:lnTo>
-                  <a:lnTo>
-                    <a:pt x="3079768" y="1287948"/>
-                  </a:lnTo>
-                  <a:lnTo>
-                    <a:pt x="3151391" y="1291571"/>
-                  </a:lnTo>
-                  <a:lnTo>
-                    <a:pt x="3223013" y="1295178"/>
-                  </a:lnTo>
-                  <a:lnTo>
-                    <a:pt x="3294636" y="1298769"/>
-                  </a:lnTo>
-                  <a:lnTo>
-                    <a:pt x="3366258" y="1302344"/>
-                  </a:lnTo>
-                  <a:lnTo>
-                    <a:pt x="3437881" y="1305904"/>
-                  </a:lnTo>
-                  <a:lnTo>
-                    <a:pt x="3509503" y="1309448"/>
-                  </a:lnTo>
-                  <a:lnTo>
-                    <a:pt x="3581126" y="1312977"/>
-                  </a:lnTo>
-                  <a:lnTo>
-                    <a:pt x="3652748" y="1316490"/>
-                  </a:lnTo>
-                  <a:lnTo>
-                    <a:pt x="3724371" y="1319988"/>
-                  </a:lnTo>
-                  <a:lnTo>
-                    <a:pt x="3795993" y="1323470"/>
-                  </a:lnTo>
-                  <a:lnTo>
-                    <a:pt x="3867616" y="1326937"/>
-                  </a:lnTo>
-                  <a:lnTo>
-                    <a:pt x="3939238" y="1330389"/>
-                  </a:lnTo>
-                  <a:lnTo>
-                    <a:pt x="4010861" y="1333826"/>
-                  </a:lnTo>
-                  <a:lnTo>
-                    <a:pt x="4082483" y="1337248"/>
-                  </a:lnTo>
-                  <a:lnTo>
-                    <a:pt x="4154106" y="1340655"/>
-                  </a:lnTo>
-                  <a:lnTo>
-                    <a:pt x="4225729" y="1344047"/>
-                  </a:lnTo>
-                  <a:lnTo>
-                    <a:pt x="4297351" y="1347424"/>
-                  </a:lnTo>
-                  <a:lnTo>
-                    <a:pt x="4368974" y="1350786"/>
-                  </a:lnTo>
-                  <a:lnTo>
-                    <a:pt x="4440596" y="1354134"/>
-                  </a:lnTo>
-                  <a:lnTo>
-                    <a:pt x="4512219" y="1357466"/>
-                  </a:lnTo>
-                  <a:lnTo>
-                    <a:pt x="4583841" y="1360785"/>
-                  </a:lnTo>
-                  <a:lnTo>
-                    <a:pt x="4655464" y="1364088"/>
-                  </a:lnTo>
-                  <a:lnTo>
-                    <a:pt x="4727086" y="1367378"/>
-                  </a:lnTo>
-                  <a:lnTo>
-                    <a:pt x="4798709" y="1370653"/>
-                  </a:lnTo>
-                  <a:lnTo>
-                    <a:pt x="4870331" y="1373913"/>
-                  </a:lnTo>
-                  <a:lnTo>
-                    <a:pt x="4941954" y="1377159"/>
-                  </a:lnTo>
-                  <a:lnTo>
-                    <a:pt x="5013576" y="1380391"/>
-                  </a:lnTo>
-                  <a:lnTo>
-                    <a:pt x="5085199" y="1383609"/>
-                  </a:lnTo>
-                  <a:lnTo>
-                    <a:pt x="5156821" y="1386813"/>
-                  </a:lnTo>
-                  <a:lnTo>
-                    <a:pt x="5228444" y="1390003"/>
-                  </a:lnTo>
-                  <a:lnTo>
-                    <a:pt x="5300066" y="1393179"/>
-                  </a:lnTo>
-                  <a:lnTo>
-                    <a:pt x="5371689" y="1396340"/>
-                  </a:lnTo>
-                  <a:lnTo>
-                    <a:pt x="5443311" y="1399488"/>
-                  </a:lnTo>
-                  <a:lnTo>
-                    <a:pt x="5514934" y="1402623"/>
-                  </a:lnTo>
-                  <a:lnTo>
-                    <a:pt x="5586557" y="1405743"/>
-                  </a:lnTo>
-                  <a:lnTo>
-                    <a:pt x="5658179" y="1408850"/>
-                  </a:lnTo>
-                  <a:lnTo>
-                    <a:pt x="5729802" y="1411943"/>
-                  </a:lnTo>
-                  <a:lnTo>
-                    <a:pt x="5801424" y="1415023"/>
-                  </a:lnTo>
-                  <a:lnTo>
-                    <a:pt x="5873047" y="1418089"/>
-                  </a:lnTo>
-                  <a:lnTo>
-                    <a:pt x="5944669" y="1421142"/>
-                  </a:lnTo>
-                  <a:lnTo>
-                    <a:pt x="6016292" y="1424181"/>
-                  </a:lnTo>
-                  <a:lnTo>
-                    <a:pt x="6087914" y="1427207"/>
-                  </a:lnTo>
-                  <a:lnTo>
-                    <a:pt x="6159537" y="1430220"/>
-                  </a:lnTo>
-                  <a:lnTo>
-                    <a:pt x="6231159" y="1433220"/>
-                  </a:lnTo>
-                  <a:lnTo>
-                    <a:pt x="6302782" y="1436206"/>
-                  </a:lnTo>
-                  <a:lnTo>
-                    <a:pt x="6374404" y="1439180"/>
-                  </a:lnTo>
-                  <a:lnTo>
-                    <a:pt x="6446027" y="1442140"/>
-                  </a:lnTo>
-                  <a:lnTo>
-                    <a:pt x="6517649" y="1445087"/>
-                  </a:lnTo>
-                  <a:lnTo>
-                    <a:pt x="6589272" y="1448022"/>
-                  </a:lnTo>
-                  <a:lnTo>
-                    <a:pt x="6660894" y="1450944"/>
-                  </a:lnTo>
-                  <a:lnTo>
-                    <a:pt x="6732517" y="1453852"/>
-                  </a:lnTo>
-                  <a:lnTo>
-                    <a:pt x="6804139" y="1456749"/>
-                  </a:lnTo>
-                  <a:lnTo>
-                    <a:pt x="6875762" y="1459632"/>
-                  </a:lnTo>
-                  <a:lnTo>
-                    <a:pt x="6947385" y="1462503"/>
-                  </a:lnTo>
-                  <a:lnTo>
-                    <a:pt x="7019007" y="1465361"/>
-                  </a:lnTo>
-                  <a:lnTo>
-                    <a:pt x="7090630" y="1468207"/>
-                  </a:lnTo>
-                </a:path>
-              </a:pathLst>
-            </a:custGeom>
-          </p:spPr>
-          <p:txBody>
-            <a:bodyPr/>
-            <a:lstStyle/>
-            <a:p/>
-          </p:txBody>
-        </p:sp>
-        <p:sp>
-          <p:nvSpPr>
             <p:cNvPr id="24" name="pl24"/>
             <p:cNvSpPr/>
             <p:nvPr/>
           </p:nvSpPr>
           <p:spPr>
             <a:xfrm>
-              <a:off x="1172049" y="4558286"/>
-              <a:ext cx="7090630" cy="761705"/>
+              <a:off x="1235312" y="2637009"/>
+              <a:ext cx="6964104" cy="529841"/>
             </a:xfrm>
             <a:custGeom>
               <a:avLst/>
               <a:pathLst>
-                <a:path w="7090630" h="761705">
+                <a:path w="6964104" h="529841">
                   <a:moveTo>
-                    <a:pt x="7090630" y="761705"/>
+                    <a:pt x="0" y="0"/>
                   </a:moveTo>
                   <a:lnTo>
-                    <a:pt x="7019007" y="756404"/>
-                  </a:lnTo>
-                  <a:lnTo>
-                    <a:pt x="6947385" y="750984"/>
-                  </a:lnTo>
-                  <a:lnTo>
-                    <a:pt x="6875762" y="745444"/>
-                  </a:lnTo>
-                  <a:lnTo>
-                    <a:pt x="6804139" y="739779"/>
-                  </a:lnTo>
-                  <a:lnTo>
-                    <a:pt x="6732517" y="733988"/>
-                  </a:lnTo>
-                  <a:lnTo>
-                    <a:pt x="6660894" y="728067"/>
-                  </a:lnTo>
-                  <a:lnTo>
-                    <a:pt x="6589272" y="722014"/>
-                  </a:lnTo>
-                  <a:lnTo>
-                    <a:pt x="6517649" y="715826"/>
-                  </a:lnTo>
-                  <a:lnTo>
-                    <a:pt x="6446027" y="709500"/>
-                  </a:lnTo>
-                  <a:lnTo>
-                    <a:pt x="6374404" y="703032"/>
-                  </a:lnTo>
-                  <a:lnTo>
-                    <a:pt x="6302782" y="696420"/>
-                  </a:lnTo>
-                  <a:lnTo>
-                    <a:pt x="6231159" y="689660"/>
-                  </a:lnTo>
-                  <a:lnTo>
-                    <a:pt x="6159537" y="682749"/>
-                  </a:lnTo>
-                  <a:lnTo>
-                    <a:pt x="6087914" y="675683"/>
-                  </a:lnTo>
-                  <a:lnTo>
-                    <a:pt x="6016292" y="668460"/>
-                  </a:lnTo>
-                  <a:lnTo>
-                    <a:pt x="5944669" y="661075"/>
-                  </a:lnTo>
-                  <a:lnTo>
-                    <a:pt x="5873047" y="653525"/>
-                  </a:lnTo>
-                  <a:lnTo>
-                    <a:pt x="5801424" y="645807"/>
-                  </a:lnTo>
-                  <a:lnTo>
-                    <a:pt x="5729802" y="637916"/>
-                  </a:lnTo>
-                  <a:lnTo>
-                    <a:pt x="5658179" y="629849"/>
-                  </a:lnTo>
-                  <a:lnTo>
-                    <a:pt x="5586557" y="621601"/>
-                  </a:lnTo>
-                  <a:lnTo>
-                    <a:pt x="5514934" y="613169"/>
-                  </a:lnTo>
-                  <a:lnTo>
-                    <a:pt x="5443311" y="604549"/>
-                  </a:lnTo>
-                  <a:lnTo>
-                    <a:pt x="5371689" y="595736"/>
-                  </a:lnTo>
-                  <a:lnTo>
-                    <a:pt x="5300066" y="586727"/>
-                  </a:lnTo>
-                  <a:lnTo>
-                    <a:pt x="5228444" y="577516"/>
-                  </a:lnTo>
-                  <a:lnTo>
-                    <a:pt x="5156821" y="568099"/>
-                  </a:lnTo>
-                  <a:lnTo>
-                    <a:pt x="5085199" y="558472"/>
-                  </a:lnTo>
-                  <a:lnTo>
-                    <a:pt x="5013576" y="548629"/>
-                  </a:lnTo>
-                  <a:lnTo>
-                    <a:pt x="4941954" y="538567"/>
-                  </a:lnTo>
-                  <a:lnTo>
-                    <a:pt x="4870331" y="528280"/>
-                  </a:lnTo>
-                  <a:lnTo>
-                    <a:pt x="4798709" y="517763"/>
-                  </a:lnTo>
-                  <a:lnTo>
-                    <a:pt x="4727086" y="507011"/>
-                  </a:lnTo>
-                  <a:lnTo>
-                    <a:pt x="4655464" y="496019"/>
-                  </a:lnTo>
-                  <a:lnTo>
-                    <a:pt x="4583841" y="484781"/>
-                  </a:lnTo>
-                  <a:lnTo>
-                    <a:pt x="4512219" y="473292"/>
-                  </a:lnTo>
-                  <a:lnTo>
-                    <a:pt x="4440596" y="461547"/>
-                  </a:lnTo>
-                  <a:lnTo>
-                    <a:pt x="4368974" y="449539"/>
-                  </a:lnTo>
-                  <a:lnTo>
-                    <a:pt x="4297351" y="437262"/>
-                  </a:lnTo>
-                  <a:lnTo>
-                    <a:pt x="4225729" y="424712"/>
-                  </a:lnTo>
-                  <a:lnTo>
-                    <a:pt x="4154106" y="411881"/>
-                  </a:lnTo>
-                  <a:lnTo>
-                    <a:pt x="4082483" y="398763"/>
-                  </a:lnTo>
-                  <a:lnTo>
-                    <a:pt x="4010861" y="385352"/>
-                  </a:lnTo>
-                  <a:lnTo>
-                    <a:pt x="3939238" y="371642"/>
-                  </a:lnTo>
-                  <a:lnTo>
-                    <a:pt x="3867616" y="357625"/>
-                  </a:lnTo>
-                  <a:lnTo>
-                    <a:pt x="3795993" y="343295"/>
-                  </a:lnTo>
-                  <a:lnTo>
-                    <a:pt x="3724371" y="328644"/>
-                  </a:lnTo>
-                  <a:lnTo>
-                    <a:pt x="3652748" y="313667"/>
-                  </a:lnTo>
-                  <a:lnTo>
-                    <a:pt x="3581126" y="298355"/>
-                  </a:lnTo>
-                  <a:lnTo>
-                    <a:pt x="3509503" y="282700"/>
-                  </a:lnTo>
-                  <a:lnTo>
-                    <a:pt x="3437881" y="266696"/>
-                  </a:lnTo>
-                  <a:lnTo>
-                    <a:pt x="3366258" y="250334"/>
-                  </a:lnTo>
-                  <a:lnTo>
-                    <a:pt x="3294636" y="233607"/>
-                  </a:lnTo>
-                  <a:lnTo>
-                    <a:pt x="3223013" y="216506"/>
-                  </a:lnTo>
-                  <a:lnTo>
-                    <a:pt x="3151391" y="199023"/>
-                  </a:lnTo>
-                  <a:lnTo>
-                    <a:pt x="3079768" y="181149"/>
-                  </a:lnTo>
-                  <a:lnTo>
-                    <a:pt x="3008146" y="168188"/>
-                  </a:lnTo>
-                  <a:lnTo>
-                    <a:pt x="2936523" y="164533"/>
-                  </a:lnTo>
-                  <a:lnTo>
-                    <a:pt x="2864901" y="160862"/>
-                  </a:lnTo>
-                  <a:lnTo>
-                    <a:pt x="2793278" y="157175"/>
-                  </a:lnTo>
-                  <a:lnTo>
-                    <a:pt x="2721655" y="153472"/>
-                  </a:lnTo>
-                  <a:lnTo>
-                    <a:pt x="2650033" y="149753"/>
-                  </a:lnTo>
-                  <a:lnTo>
-                    <a:pt x="2578410" y="146017"/>
-                  </a:lnTo>
-                  <a:lnTo>
-                    <a:pt x="2506788" y="142265"/>
-                  </a:lnTo>
-                  <a:lnTo>
-                    <a:pt x="2435165" y="138496"/>
-                  </a:lnTo>
-                  <a:lnTo>
-                    <a:pt x="2363543" y="134711"/>
-                  </a:lnTo>
-                  <a:lnTo>
-                    <a:pt x="2291920" y="130909"/>
-                  </a:lnTo>
-                  <a:lnTo>
-                    <a:pt x="2220298" y="127090"/>
-                  </a:lnTo>
-                  <a:lnTo>
-                    <a:pt x="2148675" y="123254"/>
-                  </a:lnTo>
-                  <a:lnTo>
-                    <a:pt x="2077053" y="119402"/>
-                  </a:lnTo>
-                  <a:lnTo>
-                    <a:pt x="2005430" y="115533"/>
-                  </a:lnTo>
-                  <a:lnTo>
-                    <a:pt x="1933808" y="111646"/>
-                  </a:lnTo>
-                  <a:lnTo>
-                    <a:pt x="1862185" y="107743"/>
-                  </a:lnTo>
-                  <a:lnTo>
-                    <a:pt x="1790563" y="103822"/>
-                  </a:lnTo>
-                  <a:lnTo>
-                    <a:pt x="1718940" y="99885"/>
-                  </a:lnTo>
-                  <a:lnTo>
-                    <a:pt x="1647318" y="95929"/>
-                  </a:lnTo>
-                  <a:lnTo>
-                    <a:pt x="1575695" y="91957"/>
-                  </a:lnTo>
-                  <a:lnTo>
-                    <a:pt x="1504073" y="87967"/>
-                  </a:lnTo>
-                  <a:lnTo>
-                    <a:pt x="1432450" y="83959"/>
-                  </a:lnTo>
-                  <a:lnTo>
-                    <a:pt x="1360827" y="79934"/>
-                  </a:lnTo>
-                  <a:lnTo>
-                    <a:pt x="1289205" y="75891"/>
-                  </a:lnTo>
-                  <a:lnTo>
-                    <a:pt x="1217582" y="71830"/>
-                  </a:lnTo>
-                  <a:lnTo>
-                    <a:pt x="1145960" y="67752"/>
-                  </a:lnTo>
-                  <a:lnTo>
-                    <a:pt x="1074337" y="63655"/>
-                  </a:lnTo>
-                  <a:lnTo>
-                    <a:pt x="1002715" y="59541"/>
-                  </a:lnTo>
-                  <a:lnTo>
-                    <a:pt x="931092" y="55408"/>
-                  </a:lnTo>
-                  <a:lnTo>
-                    <a:pt x="859470" y="51257"/>
-                  </a:lnTo>
-                  <a:lnTo>
-                    <a:pt x="787847" y="47088"/>
-                  </a:lnTo>
-                  <a:lnTo>
-                    <a:pt x="716225" y="42901"/>
-                  </a:lnTo>
-                  <a:lnTo>
-                    <a:pt x="644602" y="38695"/>
-                  </a:lnTo>
-                  <a:lnTo>
-                    <a:pt x="572980" y="34470"/>
-                  </a:lnTo>
-                  <a:lnTo>
-                    <a:pt x="501357" y="30227"/>
-                  </a:lnTo>
-                  <a:lnTo>
-                    <a:pt x="429735" y="25966"/>
-                  </a:lnTo>
-                  <a:lnTo>
-                    <a:pt x="358112" y="21685"/>
-                  </a:lnTo>
-                  <a:lnTo>
-                    <a:pt x="286490" y="17386"/>
-                  </a:lnTo>
-                  <a:lnTo>
-                    <a:pt x="214867" y="13068"/>
-                  </a:lnTo>
-                  <a:lnTo>
-                    <a:pt x="143245" y="8731"/>
-                  </a:lnTo>
-                  <a:lnTo>
-                    <a:pt x="71622" y="4375"/>
-                  </a:lnTo>
-                  <a:lnTo>
-                    <a:pt x="0" y="0"/>
+                    <a:pt x="70344" y="16682"/>
+                  </a:lnTo>
+                  <a:lnTo>
+                    <a:pt x="140688" y="32999"/>
+                  </a:lnTo>
+                  <a:lnTo>
+                    <a:pt x="211033" y="48960"/>
+                  </a:lnTo>
+                  <a:lnTo>
+                    <a:pt x="281377" y="64572"/>
+                  </a:lnTo>
+                  <a:lnTo>
+                    <a:pt x="351722" y="79843"/>
+                  </a:lnTo>
+                  <a:lnTo>
+                    <a:pt x="422066" y="94780"/>
+                  </a:lnTo>
+                  <a:lnTo>
+                    <a:pt x="492411" y="109390"/>
+                  </a:lnTo>
+                  <a:lnTo>
+                    <a:pt x="562755" y="123682"/>
+                  </a:lnTo>
+                  <a:lnTo>
+                    <a:pt x="633100" y="137661"/>
+                  </a:lnTo>
+                  <a:lnTo>
+                    <a:pt x="703444" y="151334"/>
+                  </a:lnTo>
+                  <a:lnTo>
+                    <a:pt x="773789" y="164709"/>
+                  </a:lnTo>
+                  <a:lnTo>
+                    <a:pt x="844133" y="177791"/>
+                  </a:lnTo>
+                  <a:lnTo>
+                    <a:pt x="914478" y="190587"/>
+                  </a:lnTo>
+                  <a:lnTo>
+                    <a:pt x="984822" y="203104"/>
+                  </a:lnTo>
+                  <a:lnTo>
+                    <a:pt x="1055167" y="215347"/>
+                  </a:lnTo>
+                  <a:lnTo>
+                    <a:pt x="1125511" y="227322"/>
+                  </a:lnTo>
+                  <a:lnTo>
+                    <a:pt x="1195856" y="239036"/>
+                  </a:lnTo>
+                  <a:lnTo>
+                    <a:pt x="1266200" y="250494"/>
+                  </a:lnTo>
+                  <a:lnTo>
+                    <a:pt x="1336545" y="261701"/>
+                  </a:lnTo>
+                  <a:lnTo>
+                    <a:pt x="1406889" y="272664"/>
+                  </a:lnTo>
+                  <a:lnTo>
+                    <a:pt x="1477234" y="283387"/>
+                  </a:lnTo>
+                  <a:lnTo>
+                    <a:pt x="1547578" y="293875"/>
+                  </a:lnTo>
+                  <a:lnTo>
+                    <a:pt x="1617923" y="304134"/>
+                  </a:lnTo>
+                  <a:lnTo>
+                    <a:pt x="1688267" y="314169"/>
+                  </a:lnTo>
+                  <a:lnTo>
+                    <a:pt x="1758612" y="323985"/>
+                  </a:lnTo>
+                  <a:lnTo>
+                    <a:pt x="1828956" y="333586"/>
+                  </a:lnTo>
+                  <a:lnTo>
+                    <a:pt x="1899301" y="342978"/>
+                  </a:lnTo>
+                  <a:lnTo>
+                    <a:pt x="1969645" y="352164"/>
+                  </a:lnTo>
+                  <a:lnTo>
+                    <a:pt x="2039990" y="361149"/>
+                  </a:lnTo>
+                  <a:lnTo>
+                    <a:pt x="2110334" y="369938"/>
+                  </a:lnTo>
+                  <a:lnTo>
+                    <a:pt x="2180679" y="378535"/>
+                  </a:lnTo>
+                  <a:lnTo>
+                    <a:pt x="2251023" y="386944"/>
+                  </a:lnTo>
+                  <a:lnTo>
+                    <a:pt x="2321368" y="395169"/>
+                  </a:lnTo>
+                  <a:lnTo>
+                    <a:pt x="2391712" y="403214"/>
+                  </a:lnTo>
+                  <a:lnTo>
+                    <a:pt x="2462057" y="411084"/>
+                  </a:lnTo>
+                  <a:lnTo>
+                    <a:pt x="2532401" y="418781"/>
+                  </a:lnTo>
+                  <a:lnTo>
+                    <a:pt x="2602746" y="426311"/>
+                  </a:lnTo>
+                  <a:lnTo>
+                    <a:pt x="2673090" y="433675"/>
+                  </a:lnTo>
+                  <a:lnTo>
+                    <a:pt x="2743435" y="440879"/>
+                  </a:lnTo>
+                  <a:lnTo>
+                    <a:pt x="2813779" y="447926"/>
+                  </a:lnTo>
+                  <a:lnTo>
+                    <a:pt x="2884124" y="454818"/>
+                  </a:lnTo>
+                  <a:lnTo>
+                    <a:pt x="2954468" y="461560"/>
+                  </a:lnTo>
+                  <a:lnTo>
+                    <a:pt x="3024813" y="464790"/>
+                  </a:lnTo>
+                  <a:lnTo>
+                    <a:pt x="3095157" y="466097"/>
+                  </a:lnTo>
+                  <a:lnTo>
+                    <a:pt x="3165502" y="467399"/>
+                  </a:lnTo>
+                  <a:lnTo>
+                    <a:pt x="3235846" y="468695"/>
+                  </a:lnTo>
+                  <a:lnTo>
+                    <a:pt x="3306191" y="469985"/>
+                  </a:lnTo>
+                  <a:lnTo>
+                    <a:pt x="3376535" y="471270"/>
+                  </a:lnTo>
+                  <a:lnTo>
+                    <a:pt x="3446880" y="472549"/>
+                  </a:lnTo>
+                  <a:lnTo>
+                    <a:pt x="3517224" y="473822"/>
+                  </a:lnTo>
+                  <a:lnTo>
+                    <a:pt x="3587569" y="475090"/>
+                  </a:lnTo>
+                  <a:lnTo>
+                    <a:pt x="3657913" y="476352"/>
+                  </a:lnTo>
+                  <a:lnTo>
+                    <a:pt x="3728257" y="477609"/>
+                  </a:lnTo>
+                  <a:lnTo>
+                    <a:pt x="3798602" y="478860"/>
+                  </a:lnTo>
+                  <a:lnTo>
+                    <a:pt x="3868946" y="480106"/>
+                  </a:lnTo>
+                  <a:lnTo>
+                    <a:pt x="3939291" y="481346"/>
+                  </a:lnTo>
+                  <a:lnTo>
+                    <a:pt x="4009635" y="482581"/>
+                  </a:lnTo>
+                  <a:lnTo>
+                    <a:pt x="4079980" y="483810"/>
+                  </a:lnTo>
+                  <a:lnTo>
+                    <a:pt x="4150324" y="485035"/>
+                  </a:lnTo>
+                  <a:lnTo>
+                    <a:pt x="4220669" y="486253"/>
+                  </a:lnTo>
+                  <a:lnTo>
+                    <a:pt x="4291013" y="487467"/>
+                  </a:lnTo>
+                  <a:lnTo>
+                    <a:pt x="4361358" y="488675"/>
+                  </a:lnTo>
+                  <a:lnTo>
+                    <a:pt x="4431702" y="489877"/>
+                  </a:lnTo>
+                  <a:lnTo>
+                    <a:pt x="4502047" y="491075"/>
+                  </a:lnTo>
+                  <a:lnTo>
+                    <a:pt x="4572391" y="492267"/>
+                  </a:lnTo>
+                  <a:lnTo>
+                    <a:pt x="4642736" y="493454"/>
+                  </a:lnTo>
+                  <a:lnTo>
+                    <a:pt x="4713080" y="494636"/>
+                  </a:lnTo>
+                  <a:lnTo>
+                    <a:pt x="4783425" y="495813"/>
+                  </a:lnTo>
+                  <a:lnTo>
+                    <a:pt x="4853769" y="496984"/>
+                  </a:lnTo>
+                  <a:lnTo>
+                    <a:pt x="4924114" y="498150"/>
+                  </a:lnTo>
+                  <a:lnTo>
+                    <a:pt x="4994458" y="499312"/>
+                  </a:lnTo>
+                  <a:lnTo>
+                    <a:pt x="5064803" y="500468"/>
+                  </a:lnTo>
+                  <a:lnTo>
+                    <a:pt x="5135147" y="501619"/>
+                  </a:lnTo>
+                  <a:lnTo>
+                    <a:pt x="5205492" y="502765"/>
+                  </a:lnTo>
+                  <a:lnTo>
+                    <a:pt x="5275836" y="503906"/>
+                  </a:lnTo>
+                  <a:lnTo>
+                    <a:pt x="5346181" y="505042"/>
+                  </a:lnTo>
+                  <a:lnTo>
+                    <a:pt x="5416525" y="506173"/>
+                  </a:lnTo>
+                  <a:lnTo>
+                    <a:pt x="5486870" y="507299"/>
+                  </a:lnTo>
+                  <a:lnTo>
+                    <a:pt x="5557214" y="508421"/>
+                  </a:lnTo>
+                  <a:lnTo>
+                    <a:pt x="5627559" y="509537"/>
+                  </a:lnTo>
+                  <a:lnTo>
+                    <a:pt x="5697903" y="510648"/>
+                  </a:lnTo>
+                  <a:lnTo>
+                    <a:pt x="5768248" y="511755"/>
+                  </a:lnTo>
+                  <a:lnTo>
+                    <a:pt x="5838592" y="512856"/>
+                  </a:lnTo>
+                  <a:lnTo>
+                    <a:pt x="5908937" y="513953"/>
+                  </a:lnTo>
+                  <a:lnTo>
+                    <a:pt x="5979281" y="515045"/>
+                  </a:lnTo>
+                  <a:lnTo>
+                    <a:pt x="6049626" y="516132"/>
+                  </a:lnTo>
+                  <a:lnTo>
+                    <a:pt x="6119970" y="517215"/>
+                  </a:lnTo>
+                  <a:lnTo>
+                    <a:pt x="6190315" y="518293"/>
+                  </a:lnTo>
+                  <a:lnTo>
+                    <a:pt x="6260659" y="519366"/>
+                  </a:lnTo>
+                  <a:lnTo>
+                    <a:pt x="6331004" y="520434"/>
+                  </a:lnTo>
+                  <a:lnTo>
+                    <a:pt x="6401348" y="521498"/>
+                  </a:lnTo>
+                  <a:lnTo>
+                    <a:pt x="6471693" y="522557"/>
+                  </a:lnTo>
+                  <a:lnTo>
+                    <a:pt x="6542037" y="523611"/>
+                  </a:lnTo>
+                  <a:lnTo>
+                    <a:pt x="6612382" y="524661"/>
+                  </a:lnTo>
+                  <a:lnTo>
+                    <a:pt x="6682726" y="525706"/>
+                  </a:lnTo>
+                  <a:lnTo>
+                    <a:pt x="6753071" y="526747"/>
+                  </a:lnTo>
+                  <a:lnTo>
+                    <a:pt x="6823415" y="527783"/>
+                  </a:lnTo>
+                  <a:lnTo>
+                    <a:pt x="6893760" y="528814"/>
+                  </a:lnTo>
+                  <a:lnTo>
+                    <a:pt x="6964104" y="529841"/>
                   </a:lnTo>
                 </a:path>
               </a:pathLst>
@@ -4326,312 +4036,637 @@
           </p:nvSpPr>
           <p:spPr>
             <a:xfrm>
-              <a:off x="1172049" y="4103670"/>
-              <a:ext cx="7090630" cy="1061818"/>
+              <a:off x="1235312" y="3039792"/>
+              <a:ext cx="6964104" cy="274881"/>
             </a:xfrm>
             <a:custGeom>
               <a:avLst/>
               <a:pathLst>
-                <a:path w="7090630" h="1061818">
+                <a:path w="6964104" h="274881">
+                  <a:moveTo>
+                    <a:pt x="6964104" y="274881"/>
+                  </a:moveTo>
+                  <a:lnTo>
+                    <a:pt x="6893760" y="272968"/>
+                  </a:lnTo>
+                  <a:lnTo>
+                    <a:pt x="6823415" y="271012"/>
+                  </a:lnTo>
+                  <a:lnTo>
+                    <a:pt x="6753071" y="269013"/>
+                  </a:lnTo>
+                  <a:lnTo>
+                    <a:pt x="6682726" y="266969"/>
+                  </a:lnTo>
+                  <a:lnTo>
+                    <a:pt x="6612382" y="264879"/>
+                  </a:lnTo>
+                  <a:lnTo>
+                    <a:pt x="6542037" y="262742"/>
+                  </a:lnTo>
+                  <a:lnTo>
+                    <a:pt x="6471693" y="260558"/>
+                  </a:lnTo>
+                  <a:lnTo>
+                    <a:pt x="6401348" y="258324"/>
+                  </a:lnTo>
+                  <a:lnTo>
+                    <a:pt x="6331004" y="256041"/>
+                  </a:lnTo>
+                  <a:lnTo>
+                    <a:pt x="6260659" y="253707"/>
+                  </a:lnTo>
+                  <a:lnTo>
+                    <a:pt x="6190315" y="251321"/>
+                  </a:lnTo>
+                  <a:lnTo>
+                    <a:pt x="6119970" y="248882"/>
+                  </a:lnTo>
+                  <a:lnTo>
+                    <a:pt x="6049626" y="246388"/>
+                  </a:lnTo>
+                  <a:lnTo>
+                    <a:pt x="5979281" y="243838"/>
+                  </a:lnTo>
+                  <a:lnTo>
+                    <a:pt x="5908937" y="241231"/>
+                  </a:lnTo>
+                  <a:lnTo>
+                    <a:pt x="5838592" y="238566"/>
+                  </a:lnTo>
+                  <a:lnTo>
+                    <a:pt x="5768248" y="235842"/>
+                  </a:lnTo>
+                  <a:lnTo>
+                    <a:pt x="5697903" y="233056"/>
+                  </a:lnTo>
+                  <a:lnTo>
+                    <a:pt x="5627559" y="230209"/>
+                  </a:lnTo>
+                  <a:lnTo>
+                    <a:pt x="5557214" y="227297"/>
+                  </a:lnTo>
+                  <a:lnTo>
+                    <a:pt x="5486870" y="224321"/>
+                  </a:lnTo>
+                  <a:lnTo>
+                    <a:pt x="5416525" y="221278"/>
+                  </a:lnTo>
+                  <a:lnTo>
+                    <a:pt x="5346181" y="218167"/>
+                  </a:lnTo>
+                  <a:lnTo>
+                    <a:pt x="5275836" y="214987"/>
+                  </a:lnTo>
+                  <a:lnTo>
+                    <a:pt x="5205492" y="211736"/>
+                  </a:lnTo>
+                  <a:lnTo>
+                    <a:pt x="5135147" y="208412"/>
+                  </a:lnTo>
+                  <a:lnTo>
+                    <a:pt x="5064803" y="205013"/>
+                  </a:lnTo>
+                  <a:lnTo>
+                    <a:pt x="4994458" y="201539"/>
+                  </a:lnTo>
+                  <a:lnTo>
+                    <a:pt x="4924114" y="197987"/>
+                  </a:lnTo>
+                  <a:lnTo>
+                    <a:pt x="4853769" y="194356"/>
+                  </a:lnTo>
+                  <a:lnTo>
+                    <a:pt x="4783425" y="190644"/>
+                  </a:lnTo>
+                  <a:lnTo>
+                    <a:pt x="4713080" y="186848"/>
+                  </a:lnTo>
+                  <a:lnTo>
+                    <a:pt x="4642736" y="182968"/>
+                  </a:lnTo>
+                  <a:lnTo>
+                    <a:pt x="4572391" y="179001"/>
+                  </a:lnTo>
+                  <a:lnTo>
+                    <a:pt x="4502047" y="174946"/>
+                  </a:lnTo>
+                  <a:lnTo>
+                    <a:pt x="4431702" y="170800"/>
+                  </a:lnTo>
+                  <a:lnTo>
+                    <a:pt x="4361358" y="166561"/>
+                  </a:lnTo>
+                  <a:lnTo>
+                    <a:pt x="4291013" y="162228"/>
+                  </a:lnTo>
+                  <a:lnTo>
+                    <a:pt x="4220669" y="157797"/>
+                  </a:lnTo>
+                  <a:lnTo>
+                    <a:pt x="4150324" y="153268"/>
+                  </a:lnTo>
+                  <a:lnTo>
+                    <a:pt x="4079980" y="148638"/>
+                  </a:lnTo>
+                  <a:lnTo>
+                    <a:pt x="4009635" y="143904"/>
+                  </a:lnTo>
+                  <a:lnTo>
+                    <a:pt x="3939291" y="139064"/>
+                  </a:lnTo>
+                  <a:lnTo>
+                    <a:pt x="3868946" y="134116"/>
+                  </a:lnTo>
+                  <a:lnTo>
+                    <a:pt x="3798602" y="129058"/>
+                  </a:lnTo>
+                  <a:lnTo>
+                    <a:pt x="3728257" y="123887"/>
+                  </a:lnTo>
+                  <a:lnTo>
+                    <a:pt x="3657913" y="118600"/>
+                  </a:lnTo>
+                  <a:lnTo>
+                    <a:pt x="3587569" y="113195"/>
+                  </a:lnTo>
+                  <a:lnTo>
+                    <a:pt x="3517224" y="107669"/>
+                  </a:lnTo>
+                  <a:lnTo>
+                    <a:pt x="3446880" y="102020"/>
+                  </a:lnTo>
+                  <a:lnTo>
+                    <a:pt x="3376535" y="96244"/>
+                  </a:lnTo>
+                  <a:lnTo>
+                    <a:pt x="3306191" y="90339"/>
+                  </a:lnTo>
+                  <a:lnTo>
+                    <a:pt x="3235846" y="84303"/>
+                  </a:lnTo>
+                  <a:lnTo>
+                    <a:pt x="3165502" y="78132"/>
+                  </a:lnTo>
+                  <a:lnTo>
+                    <a:pt x="3095157" y="71822"/>
+                  </a:lnTo>
+                  <a:lnTo>
+                    <a:pt x="3024813" y="65372"/>
+                  </a:lnTo>
+                  <a:lnTo>
+                    <a:pt x="2954468" y="60695"/>
+                  </a:lnTo>
+                  <a:lnTo>
+                    <a:pt x="2884124" y="59376"/>
+                  </a:lnTo>
+                  <a:lnTo>
+                    <a:pt x="2813779" y="58051"/>
+                  </a:lnTo>
+                  <a:lnTo>
+                    <a:pt x="2743435" y="56721"/>
+                  </a:lnTo>
+                  <a:lnTo>
+                    <a:pt x="2673090" y="55384"/>
+                  </a:lnTo>
+                  <a:lnTo>
+                    <a:pt x="2602746" y="54042"/>
+                  </a:lnTo>
+                  <a:lnTo>
+                    <a:pt x="2532401" y="52694"/>
+                  </a:lnTo>
+                  <a:lnTo>
+                    <a:pt x="2462057" y="51340"/>
+                  </a:lnTo>
+                  <a:lnTo>
+                    <a:pt x="2391712" y="49980"/>
+                  </a:lnTo>
+                  <a:lnTo>
+                    <a:pt x="2321368" y="48614"/>
+                  </a:lnTo>
+                  <a:lnTo>
+                    <a:pt x="2251023" y="47242"/>
+                  </a:lnTo>
+                  <a:lnTo>
+                    <a:pt x="2180679" y="45863"/>
+                  </a:lnTo>
+                  <a:lnTo>
+                    <a:pt x="2110334" y="44479"/>
+                  </a:lnTo>
+                  <a:lnTo>
+                    <a:pt x="2039990" y="43089"/>
+                  </a:lnTo>
+                  <a:lnTo>
+                    <a:pt x="1969645" y="41693"/>
+                  </a:lnTo>
+                  <a:lnTo>
+                    <a:pt x="1899301" y="40290"/>
+                  </a:lnTo>
+                  <a:lnTo>
+                    <a:pt x="1828956" y="38882"/>
+                  </a:lnTo>
+                  <a:lnTo>
+                    <a:pt x="1758612" y="37467"/>
+                  </a:lnTo>
+                  <a:lnTo>
+                    <a:pt x="1688267" y="36046"/>
+                  </a:lnTo>
+                  <a:lnTo>
+                    <a:pt x="1617923" y="34618"/>
+                  </a:lnTo>
+                  <a:lnTo>
+                    <a:pt x="1547578" y="33185"/>
+                  </a:lnTo>
+                  <a:lnTo>
+                    <a:pt x="1477234" y="31745"/>
+                  </a:lnTo>
+                  <a:lnTo>
+                    <a:pt x="1406889" y="30299"/>
+                  </a:lnTo>
+                  <a:lnTo>
+                    <a:pt x="1336545" y="28846"/>
+                  </a:lnTo>
+                  <a:lnTo>
+                    <a:pt x="1266200" y="27387"/>
+                  </a:lnTo>
+                  <a:lnTo>
+                    <a:pt x="1195856" y="25922"/>
+                  </a:lnTo>
+                  <a:lnTo>
+                    <a:pt x="1125511" y="24450"/>
+                  </a:lnTo>
+                  <a:lnTo>
+                    <a:pt x="1055167" y="22971"/>
+                  </a:lnTo>
+                  <a:lnTo>
+                    <a:pt x="984822" y="21486"/>
+                  </a:lnTo>
+                  <a:lnTo>
+                    <a:pt x="914478" y="19995"/>
+                  </a:lnTo>
+                  <a:lnTo>
+                    <a:pt x="844133" y="18497"/>
+                  </a:lnTo>
+                  <a:lnTo>
+                    <a:pt x="773789" y="16993"/>
+                  </a:lnTo>
+                  <a:lnTo>
+                    <a:pt x="703444" y="15481"/>
+                  </a:lnTo>
+                  <a:lnTo>
+                    <a:pt x="633100" y="13964"/>
+                  </a:lnTo>
+                  <a:lnTo>
+                    <a:pt x="562755" y="12439"/>
+                  </a:lnTo>
+                  <a:lnTo>
+                    <a:pt x="492411" y="10908"/>
+                  </a:lnTo>
+                  <a:lnTo>
+                    <a:pt x="422066" y="9370"/>
+                  </a:lnTo>
+                  <a:lnTo>
+                    <a:pt x="351722" y="7825"/>
+                  </a:lnTo>
+                  <a:lnTo>
+                    <a:pt x="281377" y="6274"/>
+                  </a:lnTo>
+                  <a:lnTo>
+                    <a:pt x="211033" y="4716"/>
+                  </a:lnTo>
+                  <a:lnTo>
+                    <a:pt x="140688" y="3150"/>
+                  </a:lnTo>
+                  <a:lnTo>
+                    <a:pt x="70344" y="1578"/>
+                  </a:lnTo>
+                  <a:lnTo>
+                    <a:pt x="0" y="0"/>
+                  </a:lnTo>
+                </a:path>
+              </a:pathLst>
+            </a:custGeom>
+          </p:spPr>
+          <p:txBody>
+            <a:bodyPr/>
+            <a:lstStyle/>
+            <a:p/>
+          </p:txBody>
+        </p:sp>
+        <p:sp>
+          <p:nvSpPr>
+            <p:cNvPr id="26" name="pl26"/>
+            <p:cNvSpPr/>
+            <p:nvPr/>
+          </p:nvSpPr>
+          <p:spPr>
+            <a:xfrm>
+              <a:off x="1235312" y="2875731"/>
+              <a:ext cx="6964104" cy="383185"/>
+            </a:xfrm>
+            <a:custGeom>
+              <a:avLst/>
+              <a:pathLst>
+                <a:path w="6964104" h="383185">
                   <a:moveTo>
                     <a:pt x="0" y="0"/>
                   </a:moveTo>
                   <a:lnTo>
-                    <a:pt x="71622" y="19123"/>
-                  </a:lnTo>
-                  <a:lnTo>
-                    <a:pt x="143245" y="37996"/>
-                  </a:lnTo>
-                  <a:lnTo>
-                    <a:pt x="214867" y="56620"/>
-                  </a:lnTo>
-                  <a:lnTo>
-                    <a:pt x="286490" y="74999"/>
-                  </a:lnTo>
-                  <a:lnTo>
-                    <a:pt x="358112" y="93136"/>
-                  </a:lnTo>
-                  <a:lnTo>
-                    <a:pt x="429735" y="111035"/>
-                  </a:lnTo>
-                  <a:lnTo>
-                    <a:pt x="501357" y="128698"/>
-                  </a:lnTo>
-                  <a:lnTo>
-                    <a:pt x="572980" y="146129"/>
-                  </a:lnTo>
-                  <a:lnTo>
-                    <a:pt x="644602" y="163330"/>
-                  </a:lnTo>
-                  <a:lnTo>
-                    <a:pt x="716225" y="180305"/>
-                  </a:lnTo>
-                  <a:lnTo>
-                    <a:pt x="787847" y="197057"/>
-                  </a:lnTo>
-                  <a:lnTo>
-                    <a:pt x="859470" y="213588"/>
-                  </a:lnTo>
-                  <a:lnTo>
-                    <a:pt x="931092" y="229902"/>
-                  </a:lnTo>
-                  <a:lnTo>
-                    <a:pt x="1002715" y="246001"/>
-                  </a:lnTo>
-                  <a:lnTo>
-                    <a:pt x="1074337" y="261889"/>
-                  </a:lnTo>
-                  <a:lnTo>
-                    <a:pt x="1145960" y="277567"/>
-                  </a:lnTo>
-                  <a:lnTo>
-                    <a:pt x="1217582" y="293039"/>
-                  </a:lnTo>
-                  <a:lnTo>
-                    <a:pt x="1289205" y="308308"/>
-                  </a:lnTo>
-                  <a:lnTo>
-                    <a:pt x="1360827" y="323376"/>
-                  </a:lnTo>
-                  <a:lnTo>
-                    <a:pt x="1432450" y="338245"/>
-                  </a:lnTo>
-                  <a:lnTo>
-                    <a:pt x="1504073" y="352919"/>
-                  </a:lnTo>
-                  <a:lnTo>
-                    <a:pt x="1575695" y="367400"/>
-                  </a:lnTo>
-                  <a:lnTo>
-                    <a:pt x="1647318" y="381690"/>
-                  </a:lnTo>
-                  <a:lnTo>
-                    <a:pt x="1718940" y="395792"/>
-                  </a:lnTo>
-                  <a:lnTo>
-                    <a:pt x="1790563" y="409709"/>
-                  </a:lnTo>
-                  <a:lnTo>
-                    <a:pt x="1862185" y="423442"/>
-                  </a:lnTo>
-                  <a:lnTo>
-                    <a:pt x="1933808" y="436995"/>
-                  </a:lnTo>
-                  <a:lnTo>
-                    <a:pt x="2005430" y="450370"/>
-                  </a:lnTo>
-                  <a:lnTo>
-                    <a:pt x="2077053" y="463569"/>
-                  </a:lnTo>
-                  <a:lnTo>
-                    <a:pt x="2148675" y="476594"/>
-                  </a:lnTo>
-                  <a:lnTo>
-                    <a:pt x="2220298" y="489447"/>
-                  </a:lnTo>
-                  <a:lnTo>
-                    <a:pt x="2291920" y="502132"/>
-                  </a:lnTo>
-                  <a:lnTo>
-                    <a:pt x="2363543" y="514650"/>
-                  </a:lnTo>
-                  <a:lnTo>
-                    <a:pt x="2435165" y="527003"/>
-                  </a:lnTo>
-                  <a:lnTo>
-                    <a:pt x="2506788" y="539193"/>
-                  </a:lnTo>
-                  <a:lnTo>
-                    <a:pt x="2578410" y="551223"/>
-                  </a:lnTo>
-                  <a:lnTo>
-                    <a:pt x="2650033" y="563095"/>
-                  </a:lnTo>
-                  <a:lnTo>
-                    <a:pt x="2721655" y="574810"/>
-                  </a:lnTo>
-                  <a:lnTo>
-                    <a:pt x="2793278" y="586372"/>
-                  </a:lnTo>
-                  <a:lnTo>
-                    <a:pt x="2864901" y="597781"/>
-                  </a:lnTo>
-                  <a:lnTo>
-                    <a:pt x="2936523" y="609041"/>
-                  </a:lnTo>
-                  <a:lnTo>
-                    <a:pt x="3008146" y="620152"/>
-                  </a:lnTo>
-                  <a:lnTo>
-                    <a:pt x="3079768" y="631117"/>
-                  </a:lnTo>
-                  <a:lnTo>
-                    <a:pt x="3151391" y="641937"/>
-                  </a:lnTo>
-                  <a:lnTo>
-                    <a:pt x="3223013" y="652616"/>
-                  </a:lnTo>
-                  <a:lnTo>
-                    <a:pt x="3294636" y="663153"/>
-                  </a:lnTo>
-                  <a:lnTo>
-                    <a:pt x="3366258" y="673553"/>
-                  </a:lnTo>
-                  <a:lnTo>
-                    <a:pt x="3437881" y="683815"/>
-                  </a:lnTo>
-                  <a:lnTo>
-                    <a:pt x="3509503" y="693942"/>
-                  </a:lnTo>
-                  <a:lnTo>
-                    <a:pt x="3581126" y="703937"/>
-                  </a:lnTo>
-                  <a:lnTo>
-                    <a:pt x="3652748" y="713799"/>
-                  </a:lnTo>
-                  <a:lnTo>
-                    <a:pt x="3724371" y="723532"/>
-                  </a:lnTo>
-                  <a:lnTo>
-                    <a:pt x="3795993" y="733137"/>
-                  </a:lnTo>
-                  <a:lnTo>
-                    <a:pt x="3867616" y="742615"/>
-                  </a:lnTo>
-                  <a:lnTo>
-                    <a:pt x="3939238" y="751969"/>
-                  </a:lnTo>
-                  <a:lnTo>
-                    <a:pt x="4010861" y="761200"/>
-                  </a:lnTo>
-                  <a:lnTo>
-                    <a:pt x="4082483" y="770309"/>
-                  </a:lnTo>
-                  <a:lnTo>
-                    <a:pt x="4154106" y="779298"/>
-                  </a:lnTo>
-                  <a:lnTo>
-                    <a:pt x="4225729" y="788170"/>
-                  </a:lnTo>
-                  <a:lnTo>
-                    <a:pt x="4297351" y="796924"/>
-                  </a:lnTo>
-                  <a:lnTo>
-                    <a:pt x="4368974" y="805563"/>
-                  </a:lnTo>
-                  <a:lnTo>
-                    <a:pt x="4440596" y="814089"/>
-                  </a:lnTo>
-                  <a:lnTo>
-                    <a:pt x="4512219" y="822502"/>
-                  </a:lnTo>
-                  <a:lnTo>
-                    <a:pt x="4583841" y="830805"/>
-                  </a:lnTo>
-                  <a:lnTo>
-                    <a:pt x="4655464" y="838998"/>
-                  </a:lnTo>
-                  <a:lnTo>
-                    <a:pt x="4727086" y="847084"/>
-                  </a:lnTo>
-                  <a:lnTo>
-                    <a:pt x="4798709" y="855063"/>
-                  </a:lnTo>
-                  <a:lnTo>
-                    <a:pt x="4870331" y="862938"/>
-                  </a:lnTo>
-                  <a:lnTo>
-                    <a:pt x="4941954" y="870709"/>
-                  </a:lnTo>
-                  <a:lnTo>
-                    <a:pt x="5013576" y="878377"/>
-                  </a:lnTo>
-                  <a:lnTo>
-                    <a:pt x="5085199" y="885945"/>
-                  </a:lnTo>
-                  <a:lnTo>
-                    <a:pt x="5156821" y="893413"/>
-                  </a:lnTo>
-                  <a:lnTo>
-                    <a:pt x="5228444" y="900782"/>
-                  </a:lnTo>
-                  <a:lnTo>
-                    <a:pt x="5300066" y="908055"/>
-                  </a:lnTo>
-                  <a:lnTo>
-                    <a:pt x="5371689" y="915232"/>
-                  </a:lnTo>
-                  <a:lnTo>
-                    <a:pt x="5443311" y="922315"/>
-                  </a:lnTo>
-                  <a:lnTo>
-                    <a:pt x="5514934" y="929305"/>
-                  </a:lnTo>
-                  <a:lnTo>
-                    <a:pt x="5586557" y="936202"/>
-                  </a:lnTo>
-                  <a:lnTo>
-                    <a:pt x="5658179" y="943009"/>
-                  </a:lnTo>
-                  <a:lnTo>
-                    <a:pt x="5729802" y="949726"/>
-                  </a:lnTo>
-                  <a:lnTo>
-                    <a:pt x="5801424" y="956355"/>
-                  </a:lnTo>
-                  <a:lnTo>
-                    <a:pt x="5873047" y="962897"/>
-                  </a:lnTo>
-                  <a:lnTo>
-                    <a:pt x="5944669" y="969353"/>
-                  </a:lnTo>
-                  <a:lnTo>
-                    <a:pt x="6016292" y="975723"/>
-                  </a:lnTo>
-                  <a:lnTo>
-                    <a:pt x="6087914" y="982010"/>
-                  </a:lnTo>
-                  <a:lnTo>
-                    <a:pt x="6159537" y="988214"/>
-                  </a:lnTo>
-                  <a:lnTo>
-                    <a:pt x="6231159" y="994337"/>
-                  </a:lnTo>
-                  <a:lnTo>
-                    <a:pt x="6302782" y="1000379"/>
-                  </a:lnTo>
-                  <a:lnTo>
-                    <a:pt x="6374404" y="1006341"/>
-                  </a:lnTo>
-                  <a:lnTo>
-                    <a:pt x="6446027" y="1012226"/>
-                  </a:lnTo>
-                  <a:lnTo>
-                    <a:pt x="6517649" y="1018032"/>
-                  </a:lnTo>
-                  <a:lnTo>
-                    <a:pt x="6589272" y="1023762"/>
-                  </a:lnTo>
-                  <a:lnTo>
-                    <a:pt x="6660894" y="1029417"/>
-                  </a:lnTo>
-                  <a:lnTo>
-                    <a:pt x="6732517" y="1034998"/>
-                  </a:lnTo>
-                  <a:lnTo>
-                    <a:pt x="6804139" y="1040505"/>
-                  </a:lnTo>
-                  <a:lnTo>
-                    <a:pt x="6875762" y="1045939"/>
-                  </a:lnTo>
-                  <a:lnTo>
-                    <a:pt x="6947385" y="1051302"/>
-                  </a:lnTo>
-                  <a:lnTo>
-                    <a:pt x="7019007" y="1056595"/>
-                  </a:lnTo>
-                  <a:lnTo>
-                    <a:pt x="7090630" y="1061818"/>
+                    <a:pt x="70344" y="6901"/>
+                  </a:lnTo>
+                  <a:lnTo>
+                    <a:pt x="140688" y="13711"/>
+                  </a:lnTo>
+                  <a:lnTo>
+                    <a:pt x="211033" y="20432"/>
+                  </a:lnTo>
+                  <a:lnTo>
+                    <a:pt x="281377" y="27065"/>
+                  </a:lnTo>
+                  <a:lnTo>
+                    <a:pt x="351722" y="33610"/>
+                  </a:lnTo>
+                  <a:lnTo>
+                    <a:pt x="422066" y="40069"/>
+                  </a:lnTo>
+                  <a:lnTo>
+                    <a:pt x="492411" y="46444"/>
+                  </a:lnTo>
+                  <a:lnTo>
+                    <a:pt x="562755" y="52734"/>
+                  </a:lnTo>
+                  <a:lnTo>
+                    <a:pt x="633100" y="58942"/>
+                  </a:lnTo>
+                  <a:lnTo>
+                    <a:pt x="703444" y="65068"/>
+                  </a:lnTo>
+                  <a:lnTo>
+                    <a:pt x="773789" y="71113"/>
+                  </a:lnTo>
+                  <a:lnTo>
+                    <a:pt x="844133" y="77079"/>
+                  </a:lnTo>
+                  <a:lnTo>
+                    <a:pt x="914478" y="82966"/>
+                  </a:lnTo>
+                  <a:lnTo>
+                    <a:pt x="984822" y="88776"/>
+                  </a:lnTo>
+                  <a:lnTo>
+                    <a:pt x="1055167" y="94509"/>
+                  </a:lnTo>
+                  <a:lnTo>
+                    <a:pt x="1125511" y="100167"/>
+                  </a:lnTo>
+                  <a:lnTo>
+                    <a:pt x="1195856" y="105751"/>
+                  </a:lnTo>
+                  <a:lnTo>
+                    <a:pt x="1266200" y="111261"/>
+                  </a:lnTo>
+                  <a:lnTo>
+                    <a:pt x="1336545" y="116698"/>
+                  </a:lnTo>
+                  <a:lnTo>
+                    <a:pt x="1406889" y="122064"/>
+                  </a:lnTo>
+                  <a:lnTo>
+                    <a:pt x="1477234" y="127360"/>
+                  </a:lnTo>
+                  <a:lnTo>
+                    <a:pt x="1547578" y="132586"/>
+                  </a:lnTo>
+                  <a:lnTo>
+                    <a:pt x="1617923" y="137743"/>
+                  </a:lnTo>
+                  <a:lnTo>
+                    <a:pt x="1688267" y="142832"/>
+                  </a:lnTo>
+                  <a:lnTo>
+                    <a:pt x="1758612" y="147854"/>
+                  </a:lnTo>
+                  <a:lnTo>
+                    <a:pt x="1828956" y="152810"/>
+                  </a:lnTo>
+                  <a:lnTo>
+                    <a:pt x="1899301" y="157701"/>
+                  </a:lnTo>
+                  <a:lnTo>
+                    <a:pt x="1969645" y="162528"/>
+                  </a:lnTo>
+                  <a:lnTo>
+                    <a:pt x="2039990" y="167291"/>
+                  </a:lnTo>
+                  <a:lnTo>
+                    <a:pt x="2110334" y="171991"/>
+                  </a:lnTo>
+                  <a:lnTo>
+                    <a:pt x="2180679" y="176630"/>
+                  </a:lnTo>
+                  <a:lnTo>
+                    <a:pt x="2251023" y="181207"/>
+                  </a:lnTo>
+                  <a:lnTo>
+                    <a:pt x="2321368" y="185725"/>
+                  </a:lnTo>
+                  <a:lnTo>
+                    <a:pt x="2391712" y="190183"/>
+                  </a:lnTo>
+                  <a:lnTo>
+                    <a:pt x="2462057" y="194582"/>
+                  </a:lnTo>
+                  <a:lnTo>
+                    <a:pt x="2532401" y="198923"/>
+                  </a:lnTo>
+                  <a:lnTo>
+                    <a:pt x="2602746" y="203207"/>
+                  </a:lnTo>
+                  <a:lnTo>
+                    <a:pt x="2673090" y="207435"/>
+                  </a:lnTo>
+                  <a:lnTo>
+                    <a:pt x="2743435" y="211608"/>
+                  </a:lnTo>
+                  <a:lnTo>
+                    <a:pt x="2813779" y="215725"/>
+                  </a:lnTo>
+                  <a:lnTo>
+                    <a:pt x="2884124" y="219788"/>
+                  </a:lnTo>
+                  <a:lnTo>
+                    <a:pt x="2954468" y="223798"/>
+                  </a:lnTo>
+                  <a:lnTo>
+                    <a:pt x="3024813" y="227755"/>
+                  </a:lnTo>
+                  <a:lnTo>
+                    <a:pt x="3095157" y="231660"/>
+                  </a:lnTo>
+                  <a:lnTo>
+                    <a:pt x="3165502" y="235513"/>
+                  </a:lnTo>
+                  <a:lnTo>
+                    <a:pt x="3235846" y="239316"/>
+                  </a:lnTo>
+                  <a:lnTo>
+                    <a:pt x="3306191" y="243069"/>
+                  </a:lnTo>
+                  <a:lnTo>
+                    <a:pt x="3376535" y="246772"/>
+                  </a:lnTo>
+                  <a:lnTo>
+                    <a:pt x="3446880" y="250427"/>
+                  </a:lnTo>
+                  <a:lnTo>
+                    <a:pt x="3517224" y="254034"/>
+                  </a:lnTo>
+                  <a:lnTo>
+                    <a:pt x="3587569" y="257593"/>
+                  </a:lnTo>
+                  <a:lnTo>
+                    <a:pt x="3657913" y="261105"/>
+                  </a:lnTo>
+                  <a:lnTo>
+                    <a:pt x="3728257" y="264572"/>
+                  </a:lnTo>
+                  <a:lnTo>
+                    <a:pt x="3798602" y="267992"/>
+                  </a:lnTo>
+                  <a:lnTo>
+                    <a:pt x="3868946" y="271368"/>
+                  </a:lnTo>
+                  <a:lnTo>
+                    <a:pt x="3939291" y="274699"/>
+                  </a:lnTo>
+                  <a:lnTo>
+                    <a:pt x="4009635" y="277986"/>
+                  </a:lnTo>
+                  <a:lnTo>
+                    <a:pt x="4079980" y="281230"/>
+                  </a:lnTo>
+                  <a:lnTo>
+                    <a:pt x="4150324" y="284432"/>
+                  </a:lnTo>
+                  <a:lnTo>
+                    <a:pt x="4220669" y="287591"/>
+                  </a:lnTo>
+                  <a:lnTo>
+                    <a:pt x="4291013" y="290708"/>
+                  </a:lnTo>
+                  <a:lnTo>
+                    <a:pt x="4361358" y="293785"/>
+                  </a:lnTo>
+                  <a:lnTo>
+                    <a:pt x="4431702" y="296821"/>
+                  </a:lnTo>
+                  <a:lnTo>
+                    <a:pt x="4502047" y="299818"/>
+                  </a:lnTo>
+                  <a:lnTo>
+                    <a:pt x="4572391" y="302774"/>
+                  </a:lnTo>
+                  <a:lnTo>
+                    <a:pt x="4642736" y="305692"/>
+                  </a:lnTo>
+                  <a:lnTo>
+                    <a:pt x="4713080" y="308572"/>
+                  </a:lnTo>
+                  <a:lnTo>
+                    <a:pt x="4783425" y="311414"/>
+                  </a:lnTo>
+                  <a:lnTo>
+                    <a:pt x="4853769" y="314218"/>
+                  </a:lnTo>
+                  <a:lnTo>
+                    <a:pt x="4924114" y="316985"/>
+                  </a:lnTo>
+                  <a:lnTo>
+                    <a:pt x="4994458" y="319716"/>
+                  </a:lnTo>
+                  <a:lnTo>
+                    <a:pt x="5064803" y="322411"/>
+                  </a:lnTo>
+                  <a:lnTo>
+                    <a:pt x="5135147" y="325071"/>
+                  </a:lnTo>
+                  <a:lnTo>
+                    <a:pt x="5205492" y="327695"/>
+                  </a:lnTo>
+                  <a:lnTo>
+                    <a:pt x="5275836" y="330286"/>
+                  </a:lnTo>
+                  <a:lnTo>
+                    <a:pt x="5346181" y="332842"/>
+                  </a:lnTo>
+                  <a:lnTo>
+                    <a:pt x="5416525" y="335364"/>
+                  </a:lnTo>
+                  <a:lnTo>
+                    <a:pt x="5486870" y="337853"/>
+                  </a:lnTo>
+                  <a:lnTo>
+                    <a:pt x="5557214" y="340310"/>
+                  </a:lnTo>
+                  <a:lnTo>
+                    <a:pt x="5627559" y="342734"/>
+                  </a:lnTo>
+                  <a:lnTo>
+                    <a:pt x="5697903" y="345126"/>
+                  </a:lnTo>
+                  <a:lnTo>
+                    <a:pt x="5768248" y="347487"/>
+                  </a:lnTo>
+                  <a:lnTo>
+                    <a:pt x="5838592" y="349816"/>
+                  </a:lnTo>
+                  <a:lnTo>
+                    <a:pt x="5908937" y="352115"/>
+                  </a:lnTo>
+                  <a:lnTo>
+                    <a:pt x="5979281" y="354384"/>
+                  </a:lnTo>
+                  <a:lnTo>
+                    <a:pt x="6049626" y="356623"/>
+                  </a:lnTo>
+                  <a:lnTo>
+                    <a:pt x="6119970" y="358833"/>
+                  </a:lnTo>
+                  <a:lnTo>
+                    <a:pt x="6190315" y="361013"/>
+                  </a:lnTo>
+                  <a:lnTo>
+                    <a:pt x="6260659" y="363165"/>
+                  </a:lnTo>
+                  <a:lnTo>
+                    <a:pt x="6331004" y="365288"/>
+                  </a:lnTo>
+                  <a:lnTo>
+                    <a:pt x="6401348" y="367384"/>
+                  </a:lnTo>
+                  <a:lnTo>
+                    <a:pt x="6471693" y="369451"/>
+                  </a:lnTo>
+                  <a:lnTo>
+                    <a:pt x="6542037" y="371492"/>
+                  </a:lnTo>
+                  <a:lnTo>
+                    <a:pt x="6612382" y="373506"/>
+                  </a:lnTo>
+                  <a:lnTo>
+                    <a:pt x="6682726" y="375493"/>
+                  </a:lnTo>
+                  <a:lnTo>
+                    <a:pt x="6753071" y="377455"/>
+                  </a:lnTo>
+                  <a:lnTo>
+                    <a:pt x="6823415" y="379390"/>
+                  </a:lnTo>
+                  <a:lnTo>
+                    <a:pt x="6893760" y="381300"/>
+                  </a:lnTo>
+                  <a:lnTo>
+                    <a:pt x="6964104" y="383185"/>
                   </a:lnTo>
                 </a:path>
               </a:pathLst>
@@ -4654,27 +4689,27 @@
         </p:sp>
         <p:sp>
           <p:nvSpPr>
-            <p:cNvPr id="26" name="pl26"/>
+            <p:cNvPr id="27" name="pl27"/>
             <p:cNvSpPr/>
             <p:nvPr/>
           </p:nvSpPr>
           <p:spPr>
             <a:xfrm>
-              <a:off x="817517" y="4727786"/>
-              <a:ext cx="7799693" cy="0"/>
+              <a:off x="887106" y="3100960"/>
+              <a:ext cx="7660515" cy="0"/>
             </a:xfrm>
             <a:custGeom>
               <a:avLst/>
               <a:pathLst>
-                <a:path w="7799693" h="0">
+                <a:path w="7660515" h="0">
                   <a:moveTo>
                     <a:pt x="0" y="0"/>
                   </a:moveTo>
                   <a:lnTo>
-                    <a:pt x="7799693" y="0"/>
-                  </a:lnTo>
-                  <a:lnTo>
-                    <a:pt x="7799693" y="0"/>
+                    <a:pt x="7660515" y="0"/>
+                  </a:lnTo>
+                  <a:lnTo>
+                    <a:pt x="7660515" y="0"/>
                   </a:lnTo>
                 </a:path>
               </a:pathLst>
@@ -4697,21 +4732,21 @@
         </p:sp>
         <p:sp>
           <p:nvSpPr>
-            <p:cNvPr id="27" name="pl27"/>
+            <p:cNvPr id="28" name="pl28"/>
             <p:cNvSpPr/>
             <p:nvPr/>
           </p:nvSpPr>
           <p:spPr>
             <a:xfrm>
-              <a:off x="4205975" y="2073503"/>
-              <a:ext cx="0" cy="3649639"/>
+              <a:off x="4215100" y="2143092"/>
+              <a:ext cx="0" cy="1317069"/>
             </a:xfrm>
             <a:custGeom>
               <a:avLst/>
               <a:pathLst>
-                <a:path w="0" h="3649639">
+                <a:path w="0" h="1317069">
                   <a:moveTo>
-                    <a:pt x="0" y="3649639"/>
+                    <a:pt x="0" y="1317069"/>
                   </a:moveTo>
                   <a:lnTo>
                     <a:pt x="0" y="0"/>
@@ -4740,21 +4775,21 @@
         </p:sp>
         <p:sp>
           <p:nvSpPr>
-            <p:cNvPr id="28" name="pl28"/>
+            <p:cNvPr id="29" name="pl29"/>
             <p:cNvSpPr/>
             <p:nvPr/>
           </p:nvSpPr>
           <p:spPr>
             <a:xfrm>
-              <a:off x="3016442" y="2073503"/>
-              <a:ext cx="0" cy="3649639"/>
+              <a:off x="3046793" y="2143092"/>
+              <a:ext cx="0" cy="1317069"/>
             </a:xfrm>
             <a:custGeom>
               <a:avLst/>
               <a:pathLst>
-                <a:path w="0" h="3649639">
+                <a:path w="0" h="1317069">
                   <a:moveTo>
-                    <a:pt x="0" y="3649639"/>
+                    <a:pt x="0" y="1317069"/>
                   </a:moveTo>
                   <a:lnTo>
                     <a:pt x="0" y="0"/>
@@ -4783,21 +4818,21 @@
         </p:sp>
         <p:sp>
           <p:nvSpPr>
-            <p:cNvPr id="29" name="pl29"/>
+            <p:cNvPr id="30" name="pl30"/>
             <p:cNvSpPr/>
             <p:nvPr/>
           </p:nvSpPr>
           <p:spPr>
             <a:xfrm>
-              <a:off x="5421760" y="2073503"/>
-              <a:ext cx="0" cy="3649639"/>
+              <a:off x="5409191" y="2143092"/>
+              <a:ext cx="0" cy="1317069"/>
             </a:xfrm>
             <a:custGeom>
               <a:avLst/>
               <a:pathLst>
-                <a:path w="0" h="3649639">
+                <a:path w="0" h="1317069">
                   <a:moveTo>
-                    <a:pt x="0" y="3649639"/>
+                    <a:pt x="0" y="1317069"/>
                   </a:moveTo>
                   <a:lnTo>
                     <a:pt x="0" y="0"/>
@@ -4826,13 +4861,13 @@
         </p:sp>
         <p:sp>
           <p:nvSpPr>
-            <p:cNvPr id="30" name="tx30"/>
+            <p:cNvPr id="31" name="tx31"/>
             <p:cNvSpPr/>
             <p:nvPr/>
           </p:nvSpPr>
           <p:spPr>
             <a:xfrm>
-              <a:off x="692708" y="5517199"/>
+              <a:off x="762297" y="3360243"/>
               <a:ext cx="62179" cy="80101"/>
             </a:xfrm>
             <a:prstGeom prst="rect">
@@ -4872,13 +4907,13 @@
         </p:sp>
         <p:sp>
           <p:nvSpPr>
-            <p:cNvPr id="31" name="tx31"/>
+            <p:cNvPr id="32" name="tx32"/>
             <p:cNvSpPr/>
             <p:nvPr/>
           </p:nvSpPr>
           <p:spPr>
             <a:xfrm>
-              <a:off x="692708" y="4687735"/>
+              <a:off x="762297" y="3060909"/>
               <a:ext cx="62179" cy="80101"/>
             </a:xfrm>
             <a:prstGeom prst="rect">
@@ -4918,13 +4953,13 @@
         </p:sp>
         <p:sp>
           <p:nvSpPr>
-            <p:cNvPr id="32" name="tx32"/>
+            <p:cNvPr id="33" name="tx33"/>
             <p:cNvSpPr/>
             <p:nvPr/>
           </p:nvSpPr>
           <p:spPr>
             <a:xfrm>
-              <a:off x="692708" y="3858272"/>
+              <a:off x="762297" y="2761575"/>
               <a:ext cx="62179" cy="80101"/>
             </a:xfrm>
             <a:prstGeom prst="rect">
@@ -4964,13 +4999,13 @@
         </p:sp>
         <p:sp>
           <p:nvSpPr>
-            <p:cNvPr id="33" name="tx33"/>
+            <p:cNvPr id="34" name="tx34"/>
             <p:cNvSpPr/>
             <p:nvPr/>
           </p:nvSpPr>
           <p:spPr>
             <a:xfrm>
-              <a:off x="692708" y="3028808"/>
+              <a:off x="762297" y="2462242"/>
               <a:ext cx="62179" cy="80101"/>
             </a:xfrm>
             <a:prstGeom prst="rect">
@@ -5010,13 +5045,13 @@
         </p:sp>
         <p:sp>
           <p:nvSpPr>
-            <p:cNvPr id="34" name="tx34"/>
+            <p:cNvPr id="35" name="tx35"/>
             <p:cNvSpPr/>
             <p:nvPr/>
           </p:nvSpPr>
           <p:spPr>
             <a:xfrm>
-              <a:off x="692708" y="2199345"/>
+              <a:off x="762297" y="2162908"/>
               <a:ext cx="62179" cy="80101"/>
             </a:xfrm>
             <a:prstGeom prst="rect">
@@ -5056,13 +5091,13 @@
         </p:sp>
         <p:sp>
           <p:nvSpPr>
-            <p:cNvPr id="35" name="tx35"/>
+            <p:cNvPr id="36" name="tx36"/>
             <p:cNvSpPr/>
             <p:nvPr/>
           </p:nvSpPr>
           <p:spPr>
             <a:xfrm>
-              <a:off x="1977028" y="5785772"/>
+              <a:off x="2024485" y="3522791"/>
               <a:ext cx="161574" cy="80101"/>
             </a:xfrm>
             <a:prstGeom prst="rect">
@@ -5102,13 +5137,13 @@
         </p:sp>
         <p:sp>
           <p:nvSpPr>
-            <p:cNvPr id="36" name="tx36"/>
+            <p:cNvPr id="37" name="tx37"/>
             <p:cNvSpPr/>
             <p:nvPr/>
           </p:nvSpPr>
           <p:spPr>
             <a:xfrm>
-              <a:off x="3728813" y="5785772"/>
+              <a:off x="3745012" y="3522791"/>
               <a:ext cx="161574" cy="80101"/>
             </a:xfrm>
             <a:prstGeom prst="rect">
@@ -5148,13 +5183,13 @@
         </p:sp>
         <p:sp>
           <p:nvSpPr>
-            <p:cNvPr id="37" name="tx37"/>
+            <p:cNvPr id="38" name="tx38"/>
             <p:cNvSpPr/>
             <p:nvPr/>
           </p:nvSpPr>
           <p:spPr>
             <a:xfrm>
-              <a:off x="5530296" y="5785772"/>
+              <a:off x="5515235" y="3522791"/>
               <a:ext cx="62179" cy="80101"/>
             </a:xfrm>
             <a:prstGeom prst="rect">
@@ -5194,13 +5229,13 @@
         </p:sp>
         <p:sp>
           <p:nvSpPr>
-            <p:cNvPr id="38" name="tx38"/>
+            <p:cNvPr id="39" name="tx39"/>
             <p:cNvSpPr/>
             <p:nvPr/>
           </p:nvSpPr>
           <p:spPr>
             <a:xfrm>
-              <a:off x="7250992" y="5785772"/>
+              <a:off x="7204672" y="3522791"/>
               <a:ext cx="124358" cy="80101"/>
             </a:xfrm>
             <a:prstGeom prst="rect">
@@ -5240,13 +5275,13 @@
         </p:sp>
         <p:sp>
           <p:nvSpPr>
-            <p:cNvPr id="39" name="tx39"/>
+            <p:cNvPr id="40" name="tx40"/>
             <p:cNvSpPr/>
             <p:nvPr/>
           </p:nvSpPr>
           <p:spPr>
             <a:xfrm>
-              <a:off x="1561815" y="5925448"/>
+              <a:off x="1561815" y="3662467"/>
               <a:ext cx="6311097" cy="100218"/>
             </a:xfrm>
             <a:prstGeom prst="rect">
@@ -5286,13 +5321,13 @@
         </p:sp>
         <p:sp>
           <p:nvSpPr>
-            <p:cNvPr id="40" name="tx40"/>
+            <p:cNvPr id="41" name="tx41"/>
             <p:cNvSpPr/>
             <p:nvPr/>
           </p:nvSpPr>
           <p:spPr>
             <a:xfrm rot="-5400000">
-              <a:off x="68446" y="3848213"/>
+              <a:off x="138035" y="2751517"/>
               <a:ext cx="1016904" cy="100218"/>
             </a:xfrm>
             <a:prstGeom prst="rect">
@@ -5332,13 +5367,13 @@
         </p:sp>
         <p:sp>
           <p:nvSpPr>
-            <p:cNvPr id="41" name="tx41"/>
+            <p:cNvPr id="42" name="tx42"/>
             <p:cNvSpPr/>
             <p:nvPr/>
           </p:nvSpPr>
           <p:spPr>
             <a:xfrm>
-              <a:off x="817517" y="1896563"/>
+              <a:off x="887106" y="1966152"/>
               <a:ext cx="6959864" cy="82021"/>
             </a:xfrm>
             <a:prstGeom prst="rect">
@@ -5378,13 +5413,3746 @@
         </p:sp>
         <p:sp>
           <p:nvSpPr>
-            <p:cNvPr id="42" name="tx42"/>
+            <p:cNvPr id="43" name="tx43"/>
             <p:cNvSpPr/>
             <p:nvPr/>
           </p:nvSpPr>
           <p:spPr>
             <a:xfrm>
-              <a:off x="817517" y="1669789"/>
+              <a:off x="887106" y="1739378"/>
+              <a:ext cx="2951591" cy="120152"/>
+            </a:xfrm>
+            <a:prstGeom prst="rect">
+              <a:avLst/>
+            </a:prstGeom>
+            <a:noFill/>
+          </p:spPr>
+          <p:txBody>
+            <a:bodyPr lIns="0" rIns="0" tIns="0" bIns="0" anchorCtr="1" anchor="ctr" wrap="none"/>
+            <a:lstStyle/>
+            <a:p>
+              <a:pPr algn="l" marL="0" marR="0" indent="0">
+                <a:lnSpc>
+                  <a:spcPts val="1320"/>
+                </a:lnSpc>
+                <a:spcBef>
+                  <a:spcPts val="0"/>
+                </a:spcBef>
+                <a:spcAft>
+                  <a:spcPts val="0"/>
+                </a:spcAft>
+              </a:pPr>
+              <a:r>
+                <a:rPr sz="1320">
+                  <a:solidFill>
+                    <a:srgbClr val="000000">
+                      <a:alpha val="100000"/>
+                    </a:srgbClr>
+                  </a:solidFill>
+                  <a:latin typeface="Helvetica"/>
+                  <a:cs typeface="Helvetica"/>
+                </a:rPr>
+                <a:t>Thrombocytopenia Grade 2 (Sensitivity)</a:t>
+              </a:r>
+            </a:p>
+          </p:txBody>
+        </p:sp>
+        <p:sp>
+          <p:nvSpPr>
+            <p:cNvPr id="44" name="pl44"/>
+            <p:cNvSpPr/>
+            <p:nvPr/>
+          </p:nvSpPr>
+          <p:spPr>
+            <a:xfrm>
+              <a:off x="887106" y="5444019"/>
+              <a:ext cx="7660515" cy="0"/>
+            </a:xfrm>
+            <a:custGeom>
+              <a:avLst/>
+              <a:pathLst>
+                <a:path w="7660515" h="0">
+                  <a:moveTo>
+                    <a:pt x="0" y="0"/>
+                  </a:moveTo>
+                  <a:lnTo>
+                    <a:pt x="7660515" y="0"/>
+                  </a:lnTo>
+                  <a:lnTo>
+                    <a:pt x="7660515" y="0"/>
+                  </a:lnTo>
+                </a:path>
+              </a:pathLst>
+            </a:custGeom>
+            <a:ln w="6775" cap="flat">
+              <a:solidFill>
+                <a:srgbClr val="EBEBEB">
+                  <a:alpha val="100000"/>
+                </a:srgbClr>
+              </a:solidFill>
+              <a:prstDash val="solid"/>
+              <a:round/>
+            </a:ln>
+          </p:spPr>
+          <p:txBody>
+            <a:bodyPr/>
+            <a:lstStyle/>
+            <a:p/>
+          </p:txBody>
+        </p:sp>
+        <p:sp>
+          <p:nvSpPr>
+            <p:cNvPr id="45" name="pl45"/>
+            <p:cNvSpPr/>
+            <p:nvPr/>
+          </p:nvSpPr>
+          <p:spPr>
+            <a:xfrm>
+              <a:off x="887106" y="5144686"/>
+              <a:ext cx="7660515" cy="0"/>
+            </a:xfrm>
+            <a:custGeom>
+              <a:avLst/>
+              <a:pathLst>
+                <a:path w="7660515" h="0">
+                  <a:moveTo>
+                    <a:pt x="0" y="0"/>
+                  </a:moveTo>
+                  <a:lnTo>
+                    <a:pt x="7660515" y="0"/>
+                  </a:lnTo>
+                  <a:lnTo>
+                    <a:pt x="7660515" y="0"/>
+                  </a:lnTo>
+                </a:path>
+              </a:pathLst>
+            </a:custGeom>
+            <a:ln w="6775" cap="flat">
+              <a:solidFill>
+                <a:srgbClr val="EBEBEB">
+                  <a:alpha val="100000"/>
+                </a:srgbClr>
+              </a:solidFill>
+              <a:prstDash val="solid"/>
+              <a:round/>
+            </a:ln>
+          </p:spPr>
+          <p:txBody>
+            <a:bodyPr/>
+            <a:lstStyle/>
+            <a:p/>
+          </p:txBody>
+        </p:sp>
+        <p:sp>
+          <p:nvSpPr>
+            <p:cNvPr id="46" name="pl46"/>
+            <p:cNvSpPr/>
+            <p:nvPr/>
+          </p:nvSpPr>
+          <p:spPr>
+            <a:xfrm>
+              <a:off x="887106" y="4845352"/>
+              <a:ext cx="7660515" cy="0"/>
+            </a:xfrm>
+            <a:custGeom>
+              <a:avLst/>
+              <a:pathLst>
+                <a:path w="7660515" h="0">
+                  <a:moveTo>
+                    <a:pt x="0" y="0"/>
+                  </a:moveTo>
+                  <a:lnTo>
+                    <a:pt x="7660515" y="0"/>
+                  </a:lnTo>
+                  <a:lnTo>
+                    <a:pt x="7660515" y="0"/>
+                  </a:lnTo>
+                </a:path>
+              </a:pathLst>
+            </a:custGeom>
+            <a:ln w="6775" cap="flat">
+              <a:solidFill>
+                <a:srgbClr val="EBEBEB">
+                  <a:alpha val="100000"/>
+                </a:srgbClr>
+              </a:solidFill>
+              <a:prstDash val="solid"/>
+              <a:round/>
+            </a:ln>
+          </p:spPr>
+          <p:txBody>
+            <a:bodyPr/>
+            <a:lstStyle/>
+            <a:p/>
+          </p:txBody>
+        </p:sp>
+        <p:sp>
+          <p:nvSpPr>
+            <p:cNvPr id="47" name="pl47"/>
+            <p:cNvSpPr/>
+            <p:nvPr/>
+          </p:nvSpPr>
+          <p:spPr>
+            <a:xfrm>
+              <a:off x="887106" y="4546018"/>
+              <a:ext cx="7660515" cy="0"/>
+            </a:xfrm>
+            <a:custGeom>
+              <a:avLst/>
+              <a:pathLst>
+                <a:path w="7660515" h="0">
+                  <a:moveTo>
+                    <a:pt x="0" y="0"/>
+                  </a:moveTo>
+                  <a:lnTo>
+                    <a:pt x="7660515" y="0"/>
+                  </a:lnTo>
+                  <a:lnTo>
+                    <a:pt x="7660515" y="0"/>
+                  </a:lnTo>
+                </a:path>
+              </a:pathLst>
+            </a:custGeom>
+            <a:ln w="6775" cap="flat">
+              <a:solidFill>
+                <a:srgbClr val="EBEBEB">
+                  <a:alpha val="100000"/>
+                </a:srgbClr>
+              </a:solidFill>
+              <a:prstDash val="solid"/>
+              <a:round/>
+            </a:ln>
+          </p:spPr>
+          <p:txBody>
+            <a:bodyPr/>
+            <a:lstStyle/>
+            <a:p/>
+          </p:txBody>
+        </p:sp>
+        <p:sp>
+          <p:nvSpPr>
+            <p:cNvPr id="48" name="pl48"/>
+            <p:cNvSpPr/>
+            <p:nvPr/>
+          </p:nvSpPr>
+          <p:spPr>
+            <a:xfrm>
+              <a:off x="1675141" y="4336484"/>
+              <a:ext cx="0" cy="1317069"/>
+            </a:xfrm>
+            <a:custGeom>
+              <a:avLst/>
+              <a:pathLst>
+                <a:path w="0" h="1317069">
+                  <a:moveTo>
+                    <a:pt x="0" y="1317069"/>
+                  </a:moveTo>
+                  <a:lnTo>
+                    <a:pt x="0" y="0"/>
+                  </a:lnTo>
+                  <a:lnTo>
+                    <a:pt x="0" y="0"/>
+                  </a:lnTo>
+                </a:path>
+              </a:pathLst>
+            </a:custGeom>
+            <a:ln w="6775" cap="flat">
+              <a:solidFill>
+                <a:srgbClr val="EBEBEB">
+                  <a:alpha val="100000"/>
+                </a:srgbClr>
+              </a:solidFill>
+              <a:prstDash val="solid"/>
+              <a:round/>
+            </a:ln>
+          </p:spPr>
+          <p:txBody>
+            <a:bodyPr/>
+            <a:lstStyle/>
+            <a:p/>
+          </p:txBody>
+        </p:sp>
+        <p:sp>
+          <p:nvSpPr>
+            <p:cNvPr id="49" name="pl49"/>
+            <p:cNvSpPr/>
+            <p:nvPr/>
+          </p:nvSpPr>
+          <p:spPr>
+            <a:xfrm>
+              <a:off x="2535404" y="4336484"/>
+              <a:ext cx="0" cy="1317069"/>
+            </a:xfrm>
+            <a:custGeom>
+              <a:avLst/>
+              <a:pathLst>
+                <a:path w="0" h="1317069">
+                  <a:moveTo>
+                    <a:pt x="0" y="1317069"/>
+                  </a:moveTo>
+                  <a:lnTo>
+                    <a:pt x="0" y="0"/>
+                  </a:lnTo>
+                  <a:lnTo>
+                    <a:pt x="0" y="0"/>
+                  </a:lnTo>
+                </a:path>
+              </a:pathLst>
+            </a:custGeom>
+            <a:ln w="6775" cap="flat">
+              <a:solidFill>
+                <a:srgbClr val="EBEBEB">
+                  <a:alpha val="100000"/>
+                </a:srgbClr>
+              </a:solidFill>
+              <a:prstDash val="solid"/>
+              <a:round/>
+            </a:ln>
+          </p:spPr>
+          <p:txBody>
+            <a:bodyPr/>
+            <a:lstStyle/>
+            <a:p/>
+          </p:txBody>
+        </p:sp>
+        <p:sp>
+          <p:nvSpPr>
+            <p:cNvPr id="50" name="pl50"/>
+            <p:cNvSpPr/>
+            <p:nvPr/>
+          </p:nvSpPr>
+          <p:spPr>
+            <a:xfrm>
+              <a:off x="3395667" y="4336484"/>
+              <a:ext cx="0" cy="1317069"/>
+            </a:xfrm>
+            <a:custGeom>
+              <a:avLst/>
+              <a:pathLst>
+                <a:path w="0" h="1317069">
+                  <a:moveTo>
+                    <a:pt x="0" y="1317069"/>
+                  </a:moveTo>
+                  <a:lnTo>
+                    <a:pt x="0" y="0"/>
+                  </a:lnTo>
+                  <a:lnTo>
+                    <a:pt x="0" y="0"/>
+                  </a:lnTo>
+                </a:path>
+              </a:pathLst>
+            </a:custGeom>
+            <a:ln w="6775" cap="flat">
+              <a:solidFill>
+                <a:srgbClr val="EBEBEB">
+                  <a:alpha val="100000"/>
+                </a:srgbClr>
+              </a:solidFill>
+              <a:prstDash val="solid"/>
+              <a:round/>
+            </a:ln>
+          </p:spPr>
+          <p:txBody>
+            <a:bodyPr/>
+            <a:lstStyle/>
+            <a:p/>
+          </p:txBody>
+        </p:sp>
+        <p:sp>
+          <p:nvSpPr>
+            <p:cNvPr id="51" name="pl51"/>
+            <p:cNvSpPr/>
+            <p:nvPr/>
+          </p:nvSpPr>
+          <p:spPr>
+            <a:xfrm>
+              <a:off x="4255930" y="4336484"/>
+              <a:ext cx="0" cy="1317069"/>
+            </a:xfrm>
+            <a:custGeom>
+              <a:avLst/>
+              <a:pathLst>
+                <a:path w="0" h="1317069">
+                  <a:moveTo>
+                    <a:pt x="0" y="1317069"/>
+                  </a:moveTo>
+                  <a:lnTo>
+                    <a:pt x="0" y="0"/>
+                  </a:lnTo>
+                  <a:lnTo>
+                    <a:pt x="0" y="0"/>
+                  </a:lnTo>
+                </a:path>
+              </a:pathLst>
+            </a:custGeom>
+            <a:ln w="6775" cap="flat">
+              <a:solidFill>
+                <a:srgbClr val="EBEBEB">
+                  <a:alpha val="100000"/>
+                </a:srgbClr>
+              </a:solidFill>
+              <a:prstDash val="solid"/>
+              <a:round/>
+            </a:ln>
+          </p:spPr>
+          <p:txBody>
+            <a:bodyPr/>
+            <a:lstStyle/>
+            <a:p/>
+          </p:txBody>
+        </p:sp>
+        <p:sp>
+          <p:nvSpPr>
+            <p:cNvPr id="52" name="pl52"/>
+            <p:cNvSpPr/>
+            <p:nvPr/>
+          </p:nvSpPr>
+          <p:spPr>
+            <a:xfrm>
+              <a:off x="5116193" y="4336484"/>
+              <a:ext cx="0" cy="1317069"/>
+            </a:xfrm>
+            <a:custGeom>
+              <a:avLst/>
+              <a:pathLst>
+                <a:path w="0" h="1317069">
+                  <a:moveTo>
+                    <a:pt x="0" y="1317069"/>
+                  </a:moveTo>
+                  <a:lnTo>
+                    <a:pt x="0" y="0"/>
+                  </a:lnTo>
+                  <a:lnTo>
+                    <a:pt x="0" y="0"/>
+                  </a:lnTo>
+                </a:path>
+              </a:pathLst>
+            </a:custGeom>
+            <a:ln w="6775" cap="flat">
+              <a:solidFill>
+                <a:srgbClr val="EBEBEB">
+                  <a:alpha val="100000"/>
+                </a:srgbClr>
+              </a:solidFill>
+              <a:prstDash val="solid"/>
+              <a:round/>
+            </a:ln>
+          </p:spPr>
+          <p:txBody>
+            <a:bodyPr/>
+            <a:lstStyle/>
+            <a:p/>
+          </p:txBody>
+        </p:sp>
+        <p:sp>
+          <p:nvSpPr>
+            <p:cNvPr id="53" name="pl53"/>
+            <p:cNvSpPr/>
+            <p:nvPr/>
+          </p:nvSpPr>
+          <p:spPr>
+            <a:xfrm>
+              <a:off x="5976457" y="4336484"/>
+              <a:ext cx="0" cy="1317069"/>
+            </a:xfrm>
+            <a:custGeom>
+              <a:avLst/>
+              <a:pathLst>
+                <a:path w="0" h="1317069">
+                  <a:moveTo>
+                    <a:pt x="0" y="1317069"/>
+                  </a:moveTo>
+                  <a:lnTo>
+                    <a:pt x="0" y="0"/>
+                  </a:lnTo>
+                  <a:lnTo>
+                    <a:pt x="0" y="0"/>
+                  </a:lnTo>
+                </a:path>
+              </a:pathLst>
+            </a:custGeom>
+            <a:ln w="6775" cap="flat">
+              <a:solidFill>
+                <a:srgbClr val="EBEBEB">
+                  <a:alpha val="100000"/>
+                </a:srgbClr>
+              </a:solidFill>
+              <a:prstDash val="solid"/>
+              <a:round/>
+            </a:ln>
+          </p:spPr>
+          <p:txBody>
+            <a:bodyPr/>
+            <a:lstStyle/>
+            <a:p/>
+          </p:txBody>
+        </p:sp>
+        <p:sp>
+          <p:nvSpPr>
+            <p:cNvPr id="54" name="pl54"/>
+            <p:cNvSpPr/>
+            <p:nvPr/>
+          </p:nvSpPr>
+          <p:spPr>
+            <a:xfrm>
+              <a:off x="6836720" y="4336484"/>
+              <a:ext cx="0" cy="1317069"/>
+            </a:xfrm>
+            <a:custGeom>
+              <a:avLst/>
+              <a:pathLst>
+                <a:path w="0" h="1317069">
+                  <a:moveTo>
+                    <a:pt x="0" y="1317069"/>
+                  </a:moveTo>
+                  <a:lnTo>
+                    <a:pt x="0" y="0"/>
+                  </a:lnTo>
+                  <a:lnTo>
+                    <a:pt x="0" y="0"/>
+                  </a:lnTo>
+                </a:path>
+              </a:pathLst>
+            </a:custGeom>
+            <a:ln w="6775" cap="flat">
+              <a:solidFill>
+                <a:srgbClr val="EBEBEB">
+                  <a:alpha val="100000"/>
+                </a:srgbClr>
+              </a:solidFill>
+              <a:prstDash val="solid"/>
+              <a:round/>
+            </a:ln>
+          </p:spPr>
+          <p:txBody>
+            <a:bodyPr/>
+            <a:lstStyle/>
+            <a:p/>
+          </p:txBody>
+        </p:sp>
+        <p:sp>
+          <p:nvSpPr>
+            <p:cNvPr id="55" name="pl55"/>
+            <p:cNvSpPr/>
+            <p:nvPr/>
+          </p:nvSpPr>
+          <p:spPr>
+            <a:xfrm>
+              <a:off x="7696983" y="4336484"/>
+              <a:ext cx="0" cy="1317069"/>
+            </a:xfrm>
+            <a:custGeom>
+              <a:avLst/>
+              <a:pathLst>
+                <a:path w="0" h="1317069">
+                  <a:moveTo>
+                    <a:pt x="0" y="1317069"/>
+                  </a:moveTo>
+                  <a:lnTo>
+                    <a:pt x="0" y="0"/>
+                  </a:lnTo>
+                  <a:lnTo>
+                    <a:pt x="0" y="0"/>
+                  </a:lnTo>
+                </a:path>
+              </a:pathLst>
+            </a:custGeom>
+            <a:ln w="6775" cap="flat">
+              <a:solidFill>
+                <a:srgbClr val="EBEBEB">
+                  <a:alpha val="100000"/>
+                </a:srgbClr>
+              </a:solidFill>
+              <a:prstDash val="solid"/>
+              <a:round/>
+            </a:ln>
+          </p:spPr>
+          <p:txBody>
+            <a:bodyPr/>
+            <a:lstStyle/>
+            <a:p/>
+          </p:txBody>
+        </p:sp>
+        <p:sp>
+          <p:nvSpPr>
+            <p:cNvPr id="56" name="pl56"/>
+            <p:cNvSpPr/>
+            <p:nvPr/>
+          </p:nvSpPr>
+          <p:spPr>
+            <a:xfrm>
+              <a:off x="887106" y="5593686"/>
+              <a:ext cx="7660515" cy="0"/>
+            </a:xfrm>
+            <a:custGeom>
+              <a:avLst/>
+              <a:pathLst>
+                <a:path w="7660515" h="0">
+                  <a:moveTo>
+                    <a:pt x="0" y="0"/>
+                  </a:moveTo>
+                  <a:lnTo>
+                    <a:pt x="7660515" y="0"/>
+                  </a:lnTo>
+                  <a:lnTo>
+                    <a:pt x="7660515" y="0"/>
+                  </a:lnTo>
+                </a:path>
+              </a:pathLst>
+            </a:custGeom>
+            <a:ln w="13550" cap="flat">
+              <a:solidFill>
+                <a:srgbClr val="EBEBEB">
+                  <a:alpha val="100000"/>
+                </a:srgbClr>
+              </a:solidFill>
+              <a:prstDash val="solid"/>
+              <a:round/>
+            </a:ln>
+          </p:spPr>
+          <p:txBody>
+            <a:bodyPr/>
+            <a:lstStyle/>
+            <a:p/>
+          </p:txBody>
+        </p:sp>
+        <p:sp>
+          <p:nvSpPr>
+            <p:cNvPr id="57" name="pl57"/>
+            <p:cNvSpPr/>
+            <p:nvPr/>
+          </p:nvSpPr>
+          <p:spPr>
+            <a:xfrm>
+              <a:off x="887106" y="5294352"/>
+              <a:ext cx="7660515" cy="0"/>
+            </a:xfrm>
+            <a:custGeom>
+              <a:avLst/>
+              <a:pathLst>
+                <a:path w="7660515" h="0">
+                  <a:moveTo>
+                    <a:pt x="0" y="0"/>
+                  </a:moveTo>
+                  <a:lnTo>
+                    <a:pt x="7660515" y="0"/>
+                  </a:lnTo>
+                  <a:lnTo>
+                    <a:pt x="7660515" y="0"/>
+                  </a:lnTo>
+                </a:path>
+              </a:pathLst>
+            </a:custGeom>
+            <a:ln w="13550" cap="flat">
+              <a:solidFill>
+                <a:srgbClr val="EBEBEB">
+                  <a:alpha val="100000"/>
+                </a:srgbClr>
+              </a:solidFill>
+              <a:prstDash val="solid"/>
+              <a:round/>
+            </a:ln>
+          </p:spPr>
+          <p:txBody>
+            <a:bodyPr/>
+            <a:lstStyle/>
+            <a:p/>
+          </p:txBody>
+        </p:sp>
+        <p:sp>
+          <p:nvSpPr>
+            <p:cNvPr id="58" name="pl58"/>
+            <p:cNvSpPr/>
+            <p:nvPr/>
+          </p:nvSpPr>
+          <p:spPr>
+            <a:xfrm>
+              <a:off x="887106" y="4995019"/>
+              <a:ext cx="7660515" cy="0"/>
+            </a:xfrm>
+            <a:custGeom>
+              <a:avLst/>
+              <a:pathLst>
+                <a:path w="7660515" h="0">
+                  <a:moveTo>
+                    <a:pt x="0" y="0"/>
+                  </a:moveTo>
+                  <a:lnTo>
+                    <a:pt x="7660515" y="0"/>
+                  </a:lnTo>
+                  <a:lnTo>
+                    <a:pt x="7660515" y="0"/>
+                  </a:lnTo>
+                </a:path>
+              </a:pathLst>
+            </a:custGeom>
+            <a:ln w="13550" cap="flat">
+              <a:solidFill>
+                <a:srgbClr val="EBEBEB">
+                  <a:alpha val="100000"/>
+                </a:srgbClr>
+              </a:solidFill>
+              <a:prstDash val="solid"/>
+              <a:round/>
+            </a:ln>
+          </p:spPr>
+          <p:txBody>
+            <a:bodyPr/>
+            <a:lstStyle/>
+            <a:p/>
+          </p:txBody>
+        </p:sp>
+        <p:sp>
+          <p:nvSpPr>
+            <p:cNvPr id="59" name="pl59"/>
+            <p:cNvSpPr/>
+            <p:nvPr/>
+          </p:nvSpPr>
+          <p:spPr>
+            <a:xfrm>
+              <a:off x="887106" y="4695685"/>
+              <a:ext cx="7660515" cy="0"/>
+            </a:xfrm>
+            <a:custGeom>
+              <a:avLst/>
+              <a:pathLst>
+                <a:path w="7660515" h="0">
+                  <a:moveTo>
+                    <a:pt x="0" y="0"/>
+                  </a:moveTo>
+                  <a:lnTo>
+                    <a:pt x="7660515" y="0"/>
+                  </a:lnTo>
+                  <a:lnTo>
+                    <a:pt x="7660515" y="0"/>
+                  </a:lnTo>
+                </a:path>
+              </a:pathLst>
+            </a:custGeom>
+            <a:ln w="13550" cap="flat">
+              <a:solidFill>
+                <a:srgbClr val="EBEBEB">
+                  <a:alpha val="100000"/>
+                </a:srgbClr>
+              </a:solidFill>
+              <a:prstDash val="solid"/>
+              <a:round/>
+            </a:ln>
+          </p:spPr>
+          <p:txBody>
+            <a:bodyPr/>
+            <a:lstStyle/>
+            <a:p/>
+          </p:txBody>
+        </p:sp>
+        <p:sp>
+          <p:nvSpPr>
+            <p:cNvPr id="60" name="pl60"/>
+            <p:cNvSpPr/>
+            <p:nvPr/>
+          </p:nvSpPr>
+          <p:spPr>
+            <a:xfrm>
+              <a:off x="887106" y="4396351"/>
+              <a:ext cx="7660515" cy="0"/>
+            </a:xfrm>
+            <a:custGeom>
+              <a:avLst/>
+              <a:pathLst>
+                <a:path w="7660515" h="0">
+                  <a:moveTo>
+                    <a:pt x="0" y="0"/>
+                  </a:moveTo>
+                  <a:lnTo>
+                    <a:pt x="7660515" y="0"/>
+                  </a:lnTo>
+                  <a:lnTo>
+                    <a:pt x="7660515" y="0"/>
+                  </a:lnTo>
+                </a:path>
+              </a:pathLst>
+            </a:custGeom>
+            <a:ln w="13550" cap="flat">
+              <a:solidFill>
+                <a:srgbClr val="EBEBEB">
+                  <a:alpha val="100000"/>
+                </a:srgbClr>
+              </a:solidFill>
+              <a:prstDash val="solid"/>
+              <a:round/>
+            </a:ln>
+          </p:spPr>
+          <p:txBody>
+            <a:bodyPr/>
+            <a:lstStyle/>
+            <a:p/>
+          </p:txBody>
+        </p:sp>
+        <p:sp>
+          <p:nvSpPr>
+            <p:cNvPr id="61" name="pl61"/>
+            <p:cNvSpPr/>
+            <p:nvPr/>
+          </p:nvSpPr>
+          <p:spPr>
+            <a:xfrm>
+              <a:off x="1245010" y="4336484"/>
+              <a:ext cx="0" cy="1317069"/>
+            </a:xfrm>
+            <a:custGeom>
+              <a:avLst/>
+              <a:pathLst>
+                <a:path w="0" h="1317069">
+                  <a:moveTo>
+                    <a:pt x="0" y="1317069"/>
+                  </a:moveTo>
+                  <a:lnTo>
+                    <a:pt x="0" y="0"/>
+                  </a:lnTo>
+                  <a:lnTo>
+                    <a:pt x="0" y="0"/>
+                  </a:lnTo>
+                </a:path>
+              </a:pathLst>
+            </a:custGeom>
+            <a:ln w="13550" cap="flat">
+              <a:solidFill>
+                <a:srgbClr val="EBEBEB">
+                  <a:alpha val="100000"/>
+                </a:srgbClr>
+              </a:solidFill>
+              <a:prstDash val="solid"/>
+              <a:round/>
+            </a:ln>
+          </p:spPr>
+          <p:txBody>
+            <a:bodyPr/>
+            <a:lstStyle/>
+            <a:p/>
+          </p:txBody>
+        </p:sp>
+        <p:sp>
+          <p:nvSpPr>
+            <p:cNvPr id="62" name="pl62"/>
+            <p:cNvSpPr/>
+            <p:nvPr/>
+          </p:nvSpPr>
+          <p:spPr>
+            <a:xfrm>
+              <a:off x="2105273" y="4336484"/>
+              <a:ext cx="0" cy="1317069"/>
+            </a:xfrm>
+            <a:custGeom>
+              <a:avLst/>
+              <a:pathLst>
+                <a:path w="0" h="1317069">
+                  <a:moveTo>
+                    <a:pt x="0" y="1317069"/>
+                  </a:moveTo>
+                  <a:lnTo>
+                    <a:pt x="0" y="0"/>
+                  </a:lnTo>
+                  <a:lnTo>
+                    <a:pt x="0" y="0"/>
+                  </a:lnTo>
+                </a:path>
+              </a:pathLst>
+            </a:custGeom>
+            <a:ln w="13550" cap="flat">
+              <a:solidFill>
+                <a:srgbClr val="EBEBEB">
+                  <a:alpha val="100000"/>
+                </a:srgbClr>
+              </a:solidFill>
+              <a:prstDash val="solid"/>
+              <a:round/>
+            </a:ln>
+          </p:spPr>
+          <p:txBody>
+            <a:bodyPr/>
+            <a:lstStyle/>
+            <a:p/>
+          </p:txBody>
+        </p:sp>
+        <p:sp>
+          <p:nvSpPr>
+            <p:cNvPr id="63" name="pl63"/>
+            <p:cNvSpPr/>
+            <p:nvPr/>
+          </p:nvSpPr>
+          <p:spPr>
+            <a:xfrm>
+              <a:off x="2965536" y="4336484"/>
+              <a:ext cx="0" cy="1317069"/>
+            </a:xfrm>
+            <a:custGeom>
+              <a:avLst/>
+              <a:pathLst>
+                <a:path w="0" h="1317069">
+                  <a:moveTo>
+                    <a:pt x="0" y="1317069"/>
+                  </a:moveTo>
+                  <a:lnTo>
+                    <a:pt x="0" y="0"/>
+                  </a:lnTo>
+                  <a:lnTo>
+                    <a:pt x="0" y="0"/>
+                  </a:lnTo>
+                </a:path>
+              </a:pathLst>
+            </a:custGeom>
+            <a:ln w="13550" cap="flat">
+              <a:solidFill>
+                <a:srgbClr val="EBEBEB">
+                  <a:alpha val="100000"/>
+                </a:srgbClr>
+              </a:solidFill>
+              <a:prstDash val="solid"/>
+              <a:round/>
+            </a:ln>
+          </p:spPr>
+          <p:txBody>
+            <a:bodyPr/>
+            <a:lstStyle/>
+            <a:p/>
+          </p:txBody>
+        </p:sp>
+        <p:sp>
+          <p:nvSpPr>
+            <p:cNvPr id="64" name="pl64"/>
+            <p:cNvSpPr/>
+            <p:nvPr/>
+          </p:nvSpPr>
+          <p:spPr>
+            <a:xfrm>
+              <a:off x="3825799" y="4336484"/>
+              <a:ext cx="0" cy="1317069"/>
+            </a:xfrm>
+            <a:custGeom>
+              <a:avLst/>
+              <a:pathLst>
+                <a:path w="0" h="1317069">
+                  <a:moveTo>
+                    <a:pt x="0" y="1317069"/>
+                  </a:moveTo>
+                  <a:lnTo>
+                    <a:pt x="0" y="0"/>
+                  </a:lnTo>
+                  <a:lnTo>
+                    <a:pt x="0" y="0"/>
+                  </a:lnTo>
+                </a:path>
+              </a:pathLst>
+            </a:custGeom>
+            <a:ln w="13550" cap="flat">
+              <a:solidFill>
+                <a:srgbClr val="EBEBEB">
+                  <a:alpha val="100000"/>
+                </a:srgbClr>
+              </a:solidFill>
+              <a:prstDash val="solid"/>
+              <a:round/>
+            </a:ln>
+          </p:spPr>
+          <p:txBody>
+            <a:bodyPr/>
+            <a:lstStyle/>
+            <a:p/>
+          </p:txBody>
+        </p:sp>
+        <p:sp>
+          <p:nvSpPr>
+            <p:cNvPr id="65" name="pl65"/>
+            <p:cNvSpPr/>
+            <p:nvPr/>
+          </p:nvSpPr>
+          <p:spPr>
+            <a:xfrm>
+              <a:off x="4686062" y="4336484"/>
+              <a:ext cx="0" cy="1317069"/>
+            </a:xfrm>
+            <a:custGeom>
+              <a:avLst/>
+              <a:pathLst>
+                <a:path w="0" h="1317069">
+                  <a:moveTo>
+                    <a:pt x="0" y="1317069"/>
+                  </a:moveTo>
+                  <a:lnTo>
+                    <a:pt x="0" y="0"/>
+                  </a:lnTo>
+                  <a:lnTo>
+                    <a:pt x="0" y="0"/>
+                  </a:lnTo>
+                </a:path>
+              </a:pathLst>
+            </a:custGeom>
+            <a:ln w="13550" cap="flat">
+              <a:solidFill>
+                <a:srgbClr val="EBEBEB">
+                  <a:alpha val="100000"/>
+                </a:srgbClr>
+              </a:solidFill>
+              <a:prstDash val="solid"/>
+              <a:round/>
+            </a:ln>
+          </p:spPr>
+          <p:txBody>
+            <a:bodyPr/>
+            <a:lstStyle/>
+            <a:p/>
+          </p:txBody>
+        </p:sp>
+        <p:sp>
+          <p:nvSpPr>
+            <p:cNvPr id="66" name="pl66"/>
+            <p:cNvSpPr/>
+            <p:nvPr/>
+          </p:nvSpPr>
+          <p:spPr>
+            <a:xfrm>
+              <a:off x="5546325" y="4336484"/>
+              <a:ext cx="0" cy="1317069"/>
+            </a:xfrm>
+            <a:custGeom>
+              <a:avLst/>
+              <a:pathLst>
+                <a:path w="0" h="1317069">
+                  <a:moveTo>
+                    <a:pt x="0" y="1317069"/>
+                  </a:moveTo>
+                  <a:lnTo>
+                    <a:pt x="0" y="0"/>
+                  </a:lnTo>
+                  <a:lnTo>
+                    <a:pt x="0" y="0"/>
+                  </a:lnTo>
+                </a:path>
+              </a:pathLst>
+            </a:custGeom>
+            <a:ln w="13550" cap="flat">
+              <a:solidFill>
+                <a:srgbClr val="EBEBEB">
+                  <a:alpha val="100000"/>
+                </a:srgbClr>
+              </a:solidFill>
+              <a:prstDash val="solid"/>
+              <a:round/>
+            </a:ln>
+          </p:spPr>
+          <p:txBody>
+            <a:bodyPr/>
+            <a:lstStyle/>
+            <a:p/>
+          </p:txBody>
+        </p:sp>
+        <p:sp>
+          <p:nvSpPr>
+            <p:cNvPr id="67" name="pl67"/>
+            <p:cNvSpPr/>
+            <p:nvPr/>
+          </p:nvSpPr>
+          <p:spPr>
+            <a:xfrm>
+              <a:off x="6406588" y="4336484"/>
+              <a:ext cx="0" cy="1317069"/>
+            </a:xfrm>
+            <a:custGeom>
+              <a:avLst/>
+              <a:pathLst>
+                <a:path w="0" h="1317069">
+                  <a:moveTo>
+                    <a:pt x="0" y="1317069"/>
+                  </a:moveTo>
+                  <a:lnTo>
+                    <a:pt x="0" y="0"/>
+                  </a:lnTo>
+                  <a:lnTo>
+                    <a:pt x="0" y="0"/>
+                  </a:lnTo>
+                </a:path>
+              </a:pathLst>
+            </a:custGeom>
+            <a:ln w="13550" cap="flat">
+              <a:solidFill>
+                <a:srgbClr val="EBEBEB">
+                  <a:alpha val="100000"/>
+                </a:srgbClr>
+              </a:solidFill>
+              <a:prstDash val="solid"/>
+              <a:round/>
+            </a:ln>
+          </p:spPr>
+          <p:txBody>
+            <a:bodyPr/>
+            <a:lstStyle/>
+            <a:p/>
+          </p:txBody>
+        </p:sp>
+        <p:sp>
+          <p:nvSpPr>
+            <p:cNvPr id="68" name="pl68"/>
+            <p:cNvSpPr/>
+            <p:nvPr/>
+          </p:nvSpPr>
+          <p:spPr>
+            <a:xfrm>
+              <a:off x="7266851" y="4336484"/>
+              <a:ext cx="0" cy="1317069"/>
+            </a:xfrm>
+            <a:custGeom>
+              <a:avLst/>
+              <a:pathLst>
+                <a:path w="0" h="1317069">
+                  <a:moveTo>
+                    <a:pt x="0" y="1317069"/>
+                  </a:moveTo>
+                  <a:lnTo>
+                    <a:pt x="0" y="0"/>
+                  </a:lnTo>
+                  <a:lnTo>
+                    <a:pt x="0" y="0"/>
+                  </a:lnTo>
+                </a:path>
+              </a:pathLst>
+            </a:custGeom>
+            <a:ln w="13550" cap="flat">
+              <a:solidFill>
+                <a:srgbClr val="EBEBEB">
+                  <a:alpha val="100000"/>
+                </a:srgbClr>
+              </a:solidFill>
+              <a:prstDash val="solid"/>
+              <a:round/>
+            </a:ln>
+          </p:spPr>
+          <p:txBody>
+            <a:bodyPr/>
+            <a:lstStyle/>
+            <a:p/>
+          </p:txBody>
+        </p:sp>
+        <p:sp>
+          <p:nvSpPr>
+            <p:cNvPr id="69" name="pl69"/>
+            <p:cNvSpPr/>
+            <p:nvPr/>
+          </p:nvSpPr>
+          <p:spPr>
+            <a:xfrm>
+              <a:off x="8127114" y="4336484"/>
+              <a:ext cx="0" cy="1317069"/>
+            </a:xfrm>
+            <a:custGeom>
+              <a:avLst/>
+              <a:pathLst>
+                <a:path w="0" h="1317069">
+                  <a:moveTo>
+                    <a:pt x="0" y="1317069"/>
+                  </a:moveTo>
+                  <a:lnTo>
+                    <a:pt x="0" y="0"/>
+                  </a:lnTo>
+                  <a:lnTo>
+                    <a:pt x="0" y="0"/>
+                  </a:lnTo>
+                </a:path>
+              </a:pathLst>
+            </a:custGeom>
+            <a:ln w="13550" cap="flat">
+              <a:solidFill>
+                <a:srgbClr val="EBEBEB">
+                  <a:alpha val="100000"/>
+                </a:srgbClr>
+              </a:solidFill>
+              <a:prstDash val="solid"/>
+              <a:round/>
+            </a:ln>
+          </p:spPr>
+          <p:txBody>
+            <a:bodyPr/>
+            <a:lstStyle/>
+            <a:p/>
+          </p:txBody>
+        </p:sp>
+        <p:sp>
+          <p:nvSpPr>
+            <p:cNvPr id="70" name="pg70"/>
+            <p:cNvSpPr/>
+            <p:nvPr/>
+          </p:nvSpPr>
+          <p:spPr>
+            <a:xfrm>
+              <a:off x="1235312" y="4830402"/>
+              <a:ext cx="6964104" cy="677663"/>
+            </a:xfrm>
+            <a:custGeom>
+              <a:avLst/>
+              <a:pathLst>
+                <a:path w="6964104" h="677663">
+                  <a:moveTo>
+                    <a:pt x="0" y="0"/>
+                  </a:moveTo>
+                  <a:lnTo>
+                    <a:pt x="70344" y="16682"/>
+                  </a:lnTo>
+                  <a:lnTo>
+                    <a:pt x="140688" y="32999"/>
+                  </a:lnTo>
+                  <a:lnTo>
+                    <a:pt x="211033" y="48960"/>
+                  </a:lnTo>
+                  <a:lnTo>
+                    <a:pt x="281377" y="64572"/>
+                  </a:lnTo>
+                  <a:lnTo>
+                    <a:pt x="351722" y="79843"/>
+                  </a:lnTo>
+                  <a:lnTo>
+                    <a:pt x="422066" y="94780"/>
+                  </a:lnTo>
+                  <a:lnTo>
+                    <a:pt x="492411" y="109390"/>
+                  </a:lnTo>
+                  <a:lnTo>
+                    <a:pt x="562755" y="123682"/>
+                  </a:lnTo>
+                  <a:lnTo>
+                    <a:pt x="633100" y="137661"/>
+                  </a:lnTo>
+                  <a:lnTo>
+                    <a:pt x="703444" y="151334"/>
+                  </a:lnTo>
+                  <a:lnTo>
+                    <a:pt x="773789" y="164709"/>
+                  </a:lnTo>
+                  <a:lnTo>
+                    <a:pt x="844133" y="177791"/>
+                  </a:lnTo>
+                  <a:lnTo>
+                    <a:pt x="914478" y="190587"/>
+                  </a:lnTo>
+                  <a:lnTo>
+                    <a:pt x="984822" y="203104"/>
+                  </a:lnTo>
+                  <a:lnTo>
+                    <a:pt x="1055167" y="215347"/>
+                  </a:lnTo>
+                  <a:lnTo>
+                    <a:pt x="1125511" y="227322"/>
+                  </a:lnTo>
+                  <a:lnTo>
+                    <a:pt x="1195856" y="239036"/>
+                  </a:lnTo>
+                  <a:lnTo>
+                    <a:pt x="1266200" y="250494"/>
+                  </a:lnTo>
+                  <a:lnTo>
+                    <a:pt x="1336545" y="261701"/>
+                  </a:lnTo>
+                  <a:lnTo>
+                    <a:pt x="1406889" y="272664"/>
+                  </a:lnTo>
+                  <a:lnTo>
+                    <a:pt x="1477234" y="283387"/>
+                  </a:lnTo>
+                  <a:lnTo>
+                    <a:pt x="1547578" y="293875"/>
+                  </a:lnTo>
+                  <a:lnTo>
+                    <a:pt x="1617923" y="304134"/>
+                  </a:lnTo>
+                  <a:lnTo>
+                    <a:pt x="1688267" y="314169"/>
+                  </a:lnTo>
+                  <a:lnTo>
+                    <a:pt x="1758612" y="323985"/>
+                  </a:lnTo>
+                  <a:lnTo>
+                    <a:pt x="1828956" y="333586"/>
+                  </a:lnTo>
+                  <a:lnTo>
+                    <a:pt x="1899301" y="342978"/>
+                  </a:lnTo>
+                  <a:lnTo>
+                    <a:pt x="1969645" y="352164"/>
+                  </a:lnTo>
+                  <a:lnTo>
+                    <a:pt x="2039990" y="361149"/>
+                  </a:lnTo>
+                  <a:lnTo>
+                    <a:pt x="2110334" y="369938"/>
+                  </a:lnTo>
+                  <a:lnTo>
+                    <a:pt x="2180679" y="378535"/>
+                  </a:lnTo>
+                  <a:lnTo>
+                    <a:pt x="2251023" y="386944"/>
+                  </a:lnTo>
+                  <a:lnTo>
+                    <a:pt x="2321368" y="395169"/>
+                  </a:lnTo>
+                  <a:lnTo>
+                    <a:pt x="2391712" y="403214"/>
+                  </a:lnTo>
+                  <a:lnTo>
+                    <a:pt x="2462057" y="411084"/>
+                  </a:lnTo>
+                  <a:lnTo>
+                    <a:pt x="2532401" y="418781"/>
+                  </a:lnTo>
+                  <a:lnTo>
+                    <a:pt x="2602746" y="426311"/>
+                  </a:lnTo>
+                  <a:lnTo>
+                    <a:pt x="2673090" y="433675"/>
+                  </a:lnTo>
+                  <a:lnTo>
+                    <a:pt x="2743435" y="440879"/>
+                  </a:lnTo>
+                  <a:lnTo>
+                    <a:pt x="2813779" y="447926"/>
+                  </a:lnTo>
+                  <a:lnTo>
+                    <a:pt x="2884124" y="454818"/>
+                  </a:lnTo>
+                  <a:lnTo>
+                    <a:pt x="2954468" y="461560"/>
+                  </a:lnTo>
+                  <a:lnTo>
+                    <a:pt x="3024813" y="464790"/>
+                  </a:lnTo>
+                  <a:lnTo>
+                    <a:pt x="3095157" y="466097"/>
+                  </a:lnTo>
+                  <a:lnTo>
+                    <a:pt x="3165502" y="467399"/>
+                  </a:lnTo>
+                  <a:lnTo>
+                    <a:pt x="3235846" y="468695"/>
+                  </a:lnTo>
+                  <a:lnTo>
+                    <a:pt x="3306191" y="469985"/>
+                  </a:lnTo>
+                  <a:lnTo>
+                    <a:pt x="3376535" y="471270"/>
+                  </a:lnTo>
+                  <a:lnTo>
+                    <a:pt x="3446880" y="472549"/>
+                  </a:lnTo>
+                  <a:lnTo>
+                    <a:pt x="3517224" y="473822"/>
+                  </a:lnTo>
+                  <a:lnTo>
+                    <a:pt x="3587569" y="475090"/>
+                  </a:lnTo>
+                  <a:lnTo>
+                    <a:pt x="3657913" y="476352"/>
+                  </a:lnTo>
+                  <a:lnTo>
+                    <a:pt x="3728257" y="477609"/>
+                  </a:lnTo>
+                  <a:lnTo>
+                    <a:pt x="3798602" y="478860"/>
+                  </a:lnTo>
+                  <a:lnTo>
+                    <a:pt x="3868946" y="480106"/>
+                  </a:lnTo>
+                  <a:lnTo>
+                    <a:pt x="3939291" y="481346"/>
+                  </a:lnTo>
+                  <a:lnTo>
+                    <a:pt x="4009635" y="482581"/>
+                  </a:lnTo>
+                  <a:lnTo>
+                    <a:pt x="4079980" y="483810"/>
+                  </a:lnTo>
+                  <a:lnTo>
+                    <a:pt x="4150324" y="485035"/>
+                  </a:lnTo>
+                  <a:lnTo>
+                    <a:pt x="4220669" y="486253"/>
+                  </a:lnTo>
+                  <a:lnTo>
+                    <a:pt x="4291013" y="487467"/>
+                  </a:lnTo>
+                  <a:lnTo>
+                    <a:pt x="4361358" y="488675"/>
+                  </a:lnTo>
+                  <a:lnTo>
+                    <a:pt x="4431702" y="489877"/>
+                  </a:lnTo>
+                  <a:lnTo>
+                    <a:pt x="4502047" y="491075"/>
+                  </a:lnTo>
+                  <a:lnTo>
+                    <a:pt x="4572391" y="492267"/>
+                  </a:lnTo>
+                  <a:lnTo>
+                    <a:pt x="4642736" y="493454"/>
+                  </a:lnTo>
+                  <a:lnTo>
+                    <a:pt x="4713080" y="494636"/>
+                  </a:lnTo>
+                  <a:lnTo>
+                    <a:pt x="4783425" y="495813"/>
+                  </a:lnTo>
+                  <a:lnTo>
+                    <a:pt x="4853769" y="496984"/>
+                  </a:lnTo>
+                  <a:lnTo>
+                    <a:pt x="4924114" y="498150"/>
+                  </a:lnTo>
+                  <a:lnTo>
+                    <a:pt x="4994458" y="499312"/>
+                  </a:lnTo>
+                  <a:lnTo>
+                    <a:pt x="5064803" y="500468"/>
+                  </a:lnTo>
+                  <a:lnTo>
+                    <a:pt x="5135147" y="501619"/>
+                  </a:lnTo>
+                  <a:lnTo>
+                    <a:pt x="5205492" y="502765"/>
+                  </a:lnTo>
+                  <a:lnTo>
+                    <a:pt x="5275836" y="503906"/>
+                  </a:lnTo>
+                  <a:lnTo>
+                    <a:pt x="5346181" y="505042"/>
+                  </a:lnTo>
+                  <a:lnTo>
+                    <a:pt x="5416525" y="506173"/>
+                  </a:lnTo>
+                  <a:lnTo>
+                    <a:pt x="5486870" y="507299"/>
+                  </a:lnTo>
+                  <a:lnTo>
+                    <a:pt x="5557214" y="508421"/>
+                  </a:lnTo>
+                  <a:lnTo>
+                    <a:pt x="5627559" y="509537"/>
+                  </a:lnTo>
+                  <a:lnTo>
+                    <a:pt x="5697903" y="510648"/>
+                  </a:lnTo>
+                  <a:lnTo>
+                    <a:pt x="5768248" y="511755"/>
+                  </a:lnTo>
+                  <a:lnTo>
+                    <a:pt x="5838592" y="512856"/>
+                  </a:lnTo>
+                  <a:lnTo>
+                    <a:pt x="5908937" y="513953"/>
+                  </a:lnTo>
+                  <a:lnTo>
+                    <a:pt x="5979281" y="515045"/>
+                  </a:lnTo>
+                  <a:lnTo>
+                    <a:pt x="6049626" y="516132"/>
+                  </a:lnTo>
+                  <a:lnTo>
+                    <a:pt x="6119970" y="517215"/>
+                  </a:lnTo>
+                  <a:lnTo>
+                    <a:pt x="6190315" y="518293"/>
+                  </a:lnTo>
+                  <a:lnTo>
+                    <a:pt x="6260659" y="519366"/>
+                  </a:lnTo>
+                  <a:lnTo>
+                    <a:pt x="6331004" y="520434"/>
+                  </a:lnTo>
+                  <a:lnTo>
+                    <a:pt x="6401348" y="521498"/>
+                  </a:lnTo>
+                  <a:lnTo>
+                    <a:pt x="6471693" y="522557"/>
+                  </a:lnTo>
+                  <a:lnTo>
+                    <a:pt x="6542037" y="523611"/>
+                  </a:lnTo>
+                  <a:lnTo>
+                    <a:pt x="6612382" y="524661"/>
+                  </a:lnTo>
+                  <a:lnTo>
+                    <a:pt x="6682726" y="525706"/>
+                  </a:lnTo>
+                  <a:lnTo>
+                    <a:pt x="6753071" y="526747"/>
+                  </a:lnTo>
+                  <a:lnTo>
+                    <a:pt x="6823415" y="527783"/>
+                  </a:lnTo>
+                  <a:lnTo>
+                    <a:pt x="6893760" y="528814"/>
+                  </a:lnTo>
+                  <a:lnTo>
+                    <a:pt x="6964104" y="529841"/>
+                  </a:lnTo>
+                  <a:lnTo>
+                    <a:pt x="6964104" y="677663"/>
+                  </a:lnTo>
+                  <a:lnTo>
+                    <a:pt x="6893760" y="675750"/>
+                  </a:lnTo>
+                  <a:lnTo>
+                    <a:pt x="6823415" y="673794"/>
+                  </a:lnTo>
+                  <a:lnTo>
+                    <a:pt x="6753071" y="671795"/>
+                  </a:lnTo>
+                  <a:lnTo>
+                    <a:pt x="6682726" y="669751"/>
+                  </a:lnTo>
+                  <a:lnTo>
+                    <a:pt x="6612382" y="667661"/>
+                  </a:lnTo>
+                  <a:lnTo>
+                    <a:pt x="6542037" y="665524"/>
+                  </a:lnTo>
+                  <a:lnTo>
+                    <a:pt x="6471693" y="663340"/>
+                  </a:lnTo>
+                  <a:lnTo>
+                    <a:pt x="6401348" y="661107"/>
+                  </a:lnTo>
+                  <a:lnTo>
+                    <a:pt x="6331004" y="658824"/>
+                  </a:lnTo>
+                  <a:lnTo>
+                    <a:pt x="6260659" y="656490"/>
+                  </a:lnTo>
+                  <a:lnTo>
+                    <a:pt x="6190315" y="654103"/>
+                  </a:lnTo>
+                  <a:lnTo>
+                    <a:pt x="6119970" y="651664"/>
+                  </a:lnTo>
+                  <a:lnTo>
+                    <a:pt x="6049626" y="649170"/>
+                  </a:lnTo>
+                  <a:lnTo>
+                    <a:pt x="5979281" y="646620"/>
+                  </a:lnTo>
+                  <a:lnTo>
+                    <a:pt x="5908937" y="644013"/>
+                  </a:lnTo>
+                  <a:lnTo>
+                    <a:pt x="5838592" y="641348"/>
+                  </a:lnTo>
+                  <a:lnTo>
+                    <a:pt x="5768248" y="638624"/>
+                  </a:lnTo>
+                  <a:lnTo>
+                    <a:pt x="5697903" y="635838"/>
+                  </a:lnTo>
+                  <a:lnTo>
+                    <a:pt x="5627559" y="632991"/>
+                  </a:lnTo>
+                  <a:lnTo>
+                    <a:pt x="5557214" y="630079"/>
+                  </a:lnTo>
+                  <a:lnTo>
+                    <a:pt x="5486870" y="627103"/>
+                  </a:lnTo>
+                  <a:lnTo>
+                    <a:pt x="5416525" y="624060"/>
+                  </a:lnTo>
+                  <a:lnTo>
+                    <a:pt x="5346181" y="620949"/>
+                  </a:lnTo>
+                  <a:lnTo>
+                    <a:pt x="5275836" y="617769"/>
+                  </a:lnTo>
+                  <a:lnTo>
+                    <a:pt x="5205492" y="614518"/>
+                  </a:lnTo>
+                  <a:lnTo>
+                    <a:pt x="5135147" y="611194"/>
+                  </a:lnTo>
+                  <a:lnTo>
+                    <a:pt x="5064803" y="607795"/>
+                  </a:lnTo>
+                  <a:lnTo>
+                    <a:pt x="4994458" y="604321"/>
+                  </a:lnTo>
+                  <a:lnTo>
+                    <a:pt x="4924114" y="600769"/>
+                  </a:lnTo>
+                  <a:lnTo>
+                    <a:pt x="4853769" y="597138"/>
+                  </a:lnTo>
+                  <a:lnTo>
+                    <a:pt x="4783425" y="593426"/>
+                  </a:lnTo>
+                  <a:lnTo>
+                    <a:pt x="4713080" y="589630"/>
+                  </a:lnTo>
+                  <a:lnTo>
+                    <a:pt x="4642736" y="585750"/>
+                  </a:lnTo>
+                  <a:lnTo>
+                    <a:pt x="4572391" y="581783"/>
+                  </a:lnTo>
+                  <a:lnTo>
+                    <a:pt x="4502047" y="577728"/>
+                  </a:lnTo>
+                  <a:lnTo>
+                    <a:pt x="4431702" y="573582"/>
+                  </a:lnTo>
+                  <a:lnTo>
+                    <a:pt x="4361358" y="569343"/>
+                  </a:lnTo>
+                  <a:lnTo>
+                    <a:pt x="4291013" y="565010"/>
+                  </a:lnTo>
+                  <a:lnTo>
+                    <a:pt x="4220669" y="560580"/>
+                  </a:lnTo>
+                  <a:lnTo>
+                    <a:pt x="4150324" y="556050"/>
+                  </a:lnTo>
+                  <a:lnTo>
+                    <a:pt x="4079980" y="551420"/>
+                  </a:lnTo>
+                  <a:lnTo>
+                    <a:pt x="4009635" y="546686"/>
+                  </a:lnTo>
+                  <a:lnTo>
+                    <a:pt x="3939291" y="541846"/>
+                  </a:lnTo>
+                  <a:lnTo>
+                    <a:pt x="3868946" y="536899"/>
+                  </a:lnTo>
+                  <a:lnTo>
+                    <a:pt x="3798602" y="531840"/>
+                  </a:lnTo>
+                  <a:lnTo>
+                    <a:pt x="3728257" y="526669"/>
+                  </a:lnTo>
+                  <a:lnTo>
+                    <a:pt x="3657913" y="521382"/>
+                  </a:lnTo>
+                  <a:lnTo>
+                    <a:pt x="3587569" y="515977"/>
+                  </a:lnTo>
+                  <a:lnTo>
+                    <a:pt x="3517224" y="510451"/>
+                  </a:lnTo>
+                  <a:lnTo>
+                    <a:pt x="3446880" y="504802"/>
+                  </a:lnTo>
+                  <a:lnTo>
+                    <a:pt x="3376535" y="499026"/>
+                  </a:lnTo>
+                  <a:lnTo>
+                    <a:pt x="3306191" y="493122"/>
+                  </a:lnTo>
+                  <a:lnTo>
+                    <a:pt x="3235846" y="487085"/>
+                  </a:lnTo>
+                  <a:lnTo>
+                    <a:pt x="3165502" y="480914"/>
+                  </a:lnTo>
+                  <a:lnTo>
+                    <a:pt x="3095157" y="474604"/>
+                  </a:lnTo>
+                  <a:lnTo>
+                    <a:pt x="3024813" y="468154"/>
+                  </a:lnTo>
+                  <a:lnTo>
+                    <a:pt x="2954468" y="463477"/>
+                  </a:lnTo>
+                  <a:lnTo>
+                    <a:pt x="2884124" y="462158"/>
+                  </a:lnTo>
+                  <a:lnTo>
+                    <a:pt x="2813779" y="460833"/>
+                  </a:lnTo>
+                  <a:lnTo>
+                    <a:pt x="2743435" y="459503"/>
+                  </a:lnTo>
+                  <a:lnTo>
+                    <a:pt x="2673090" y="458166"/>
+                  </a:lnTo>
+                  <a:lnTo>
+                    <a:pt x="2602746" y="456824"/>
+                  </a:lnTo>
+                  <a:lnTo>
+                    <a:pt x="2532401" y="455476"/>
+                  </a:lnTo>
+                  <a:lnTo>
+                    <a:pt x="2462057" y="454122"/>
+                  </a:lnTo>
+                  <a:lnTo>
+                    <a:pt x="2391712" y="452762"/>
+                  </a:lnTo>
+                  <a:lnTo>
+                    <a:pt x="2321368" y="451396"/>
+                  </a:lnTo>
+                  <a:lnTo>
+                    <a:pt x="2251023" y="450024"/>
+                  </a:lnTo>
+                  <a:lnTo>
+                    <a:pt x="2180679" y="448646"/>
+                  </a:lnTo>
+                  <a:lnTo>
+                    <a:pt x="2110334" y="447261"/>
+                  </a:lnTo>
+                  <a:lnTo>
+                    <a:pt x="2039990" y="445871"/>
+                  </a:lnTo>
+                  <a:lnTo>
+                    <a:pt x="1969645" y="444475"/>
+                  </a:lnTo>
+                  <a:lnTo>
+                    <a:pt x="1899301" y="443072"/>
+                  </a:lnTo>
+                  <a:lnTo>
+                    <a:pt x="1828956" y="441664"/>
+                  </a:lnTo>
+                  <a:lnTo>
+                    <a:pt x="1758612" y="440249"/>
+                  </a:lnTo>
+                  <a:lnTo>
+                    <a:pt x="1688267" y="438828"/>
+                  </a:lnTo>
+                  <a:lnTo>
+                    <a:pt x="1617923" y="437400"/>
+                  </a:lnTo>
+                  <a:lnTo>
+                    <a:pt x="1547578" y="435967"/>
+                  </a:lnTo>
+                  <a:lnTo>
+                    <a:pt x="1477234" y="434527"/>
+                  </a:lnTo>
+                  <a:lnTo>
+                    <a:pt x="1406889" y="433081"/>
+                  </a:lnTo>
+                  <a:lnTo>
+                    <a:pt x="1336545" y="431628"/>
+                  </a:lnTo>
+                  <a:lnTo>
+                    <a:pt x="1266200" y="430169"/>
+                  </a:lnTo>
+                  <a:lnTo>
+                    <a:pt x="1195856" y="428704"/>
+                  </a:lnTo>
+                  <a:lnTo>
+                    <a:pt x="1125511" y="427232"/>
+                  </a:lnTo>
+                  <a:lnTo>
+                    <a:pt x="1055167" y="425753"/>
+                  </a:lnTo>
+                  <a:lnTo>
+                    <a:pt x="984822" y="424269"/>
+                  </a:lnTo>
+                  <a:lnTo>
+                    <a:pt x="914478" y="422777"/>
+                  </a:lnTo>
+                  <a:lnTo>
+                    <a:pt x="844133" y="421279"/>
+                  </a:lnTo>
+                  <a:lnTo>
+                    <a:pt x="773789" y="419775"/>
+                  </a:lnTo>
+                  <a:lnTo>
+                    <a:pt x="703444" y="418264"/>
+                  </a:lnTo>
+                  <a:lnTo>
+                    <a:pt x="633100" y="416746"/>
+                  </a:lnTo>
+                  <a:lnTo>
+                    <a:pt x="562755" y="415221"/>
+                  </a:lnTo>
+                  <a:lnTo>
+                    <a:pt x="492411" y="413690"/>
+                  </a:lnTo>
+                  <a:lnTo>
+                    <a:pt x="422066" y="412152"/>
+                  </a:lnTo>
+                  <a:lnTo>
+                    <a:pt x="351722" y="410608"/>
+                  </a:lnTo>
+                  <a:lnTo>
+                    <a:pt x="281377" y="409056"/>
+                  </a:lnTo>
+                  <a:lnTo>
+                    <a:pt x="211033" y="407498"/>
+                  </a:lnTo>
+                  <a:lnTo>
+                    <a:pt x="140688" y="405933"/>
+                  </a:lnTo>
+                  <a:lnTo>
+                    <a:pt x="70344" y="404361"/>
+                  </a:lnTo>
+                  <a:lnTo>
+                    <a:pt x="0" y="402782"/>
+                  </a:lnTo>
+                  <a:close/>
+                </a:path>
+              </a:pathLst>
+            </a:custGeom>
+            <a:solidFill>
+              <a:srgbClr val="FF8C00">
+                <a:alpha val="20000"/>
+              </a:srgbClr>
+            </a:solidFill>
+          </p:spPr>
+          <p:txBody>
+            <a:bodyPr/>
+            <a:lstStyle/>
+            <a:p/>
+          </p:txBody>
+        </p:sp>
+        <p:sp>
+          <p:nvSpPr>
+            <p:cNvPr id="71" name="pl71"/>
+            <p:cNvSpPr/>
+            <p:nvPr/>
+          </p:nvSpPr>
+          <p:spPr>
+            <a:xfrm>
+              <a:off x="1235312" y="4830402"/>
+              <a:ext cx="6964104" cy="529841"/>
+            </a:xfrm>
+            <a:custGeom>
+              <a:avLst/>
+              <a:pathLst>
+                <a:path w="6964104" h="529841">
+                  <a:moveTo>
+                    <a:pt x="0" y="0"/>
+                  </a:moveTo>
+                  <a:lnTo>
+                    <a:pt x="70344" y="16682"/>
+                  </a:lnTo>
+                  <a:lnTo>
+                    <a:pt x="140688" y="32999"/>
+                  </a:lnTo>
+                  <a:lnTo>
+                    <a:pt x="211033" y="48960"/>
+                  </a:lnTo>
+                  <a:lnTo>
+                    <a:pt x="281377" y="64572"/>
+                  </a:lnTo>
+                  <a:lnTo>
+                    <a:pt x="351722" y="79843"/>
+                  </a:lnTo>
+                  <a:lnTo>
+                    <a:pt x="422066" y="94780"/>
+                  </a:lnTo>
+                  <a:lnTo>
+                    <a:pt x="492411" y="109390"/>
+                  </a:lnTo>
+                  <a:lnTo>
+                    <a:pt x="562755" y="123682"/>
+                  </a:lnTo>
+                  <a:lnTo>
+                    <a:pt x="633100" y="137661"/>
+                  </a:lnTo>
+                  <a:lnTo>
+                    <a:pt x="703444" y="151334"/>
+                  </a:lnTo>
+                  <a:lnTo>
+                    <a:pt x="773789" y="164709"/>
+                  </a:lnTo>
+                  <a:lnTo>
+                    <a:pt x="844133" y="177791"/>
+                  </a:lnTo>
+                  <a:lnTo>
+                    <a:pt x="914478" y="190587"/>
+                  </a:lnTo>
+                  <a:lnTo>
+                    <a:pt x="984822" y="203104"/>
+                  </a:lnTo>
+                  <a:lnTo>
+                    <a:pt x="1055167" y="215347"/>
+                  </a:lnTo>
+                  <a:lnTo>
+                    <a:pt x="1125511" y="227322"/>
+                  </a:lnTo>
+                  <a:lnTo>
+                    <a:pt x="1195856" y="239036"/>
+                  </a:lnTo>
+                  <a:lnTo>
+                    <a:pt x="1266200" y="250494"/>
+                  </a:lnTo>
+                  <a:lnTo>
+                    <a:pt x="1336545" y="261701"/>
+                  </a:lnTo>
+                  <a:lnTo>
+                    <a:pt x="1406889" y="272664"/>
+                  </a:lnTo>
+                  <a:lnTo>
+                    <a:pt x="1477234" y="283387"/>
+                  </a:lnTo>
+                  <a:lnTo>
+                    <a:pt x="1547578" y="293875"/>
+                  </a:lnTo>
+                  <a:lnTo>
+                    <a:pt x="1617923" y="304134"/>
+                  </a:lnTo>
+                  <a:lnTo>
+                    <a:pt x="1688267" y="314169"/>
+                  </a:lnTo>
+                  <a:lnTo>
+                    <a:pt x="1758612" y="323985"/>
+                  </a:lnTo>
+                  <a:lnTo>
+                    <a:pt x="1828956" y="333586"/>
+                  </a:lnTo>
+                  <a:lnTo>
+                    <a:pt x="1899301" y="342978"/>
+                  </a:lnTo>
+                  <a:lnTo>
+                    <a:pt x="1969645" y="352164"/>
+                  </a:lnTo>
+                  <a:lnTo>
+                    <a:pt x="2039990" y="361149"/>
+                  </a:lnTo>
+                  <a:lnTo>
+                    <a:pt x="2110334" y="369938"/>
+                  </a:lnTo>
+                  <a:lnTo>
+                    <a:pt x="2180679" y="378535"/>
+                  </a:lnTo>
+                  <a:lnTo>
+                    <a:pt x="2251023" y="386944"/>
+                  </a:lnTo>
+                  <a:lnTo>
+                    <a:pt x="2321368" y="395169"/>
+                  </a:lnTo>
+                  <a:lnTo>
+                    <a:pt x="2391712" y="403214"/>
+                  </a:lnTo>
+                  <a:lnTo>
+                    <a:pt x="2462057" y="411084"/>
+                  </a:lnTo>
+                  <a:lnTo>
+                    <a:pt x="2532401" y="418781"/>
+                  </a:lnTo>
+                  <a:lnTo>
+                    <a:pt x="2602746" y="426311"/>
+                  </a:lnTo>
+                  <a:lnTo>
+                    <a:pt x="2673090" y="433675"/>
+                  </a:lnTo>
+                  <a:lnTo>
+                    <a:pt x="2743435" y="440879"/>
+                  </a:lnTo>
+                  <a:lnTo>
+                    <a:pt x="2813779" y="447926"/>
+                  </a:lnTo>
+                  <a:lnTo>
+                    <a:pt x="2884124" y="454818"/>
+                  </a:lnTo>
+                  <a:lnTo>
+                    <a:pt x="2954468" y="461560"/>
+                  </a:lnTo>
+                  <a:lnTo>
+                    <a:pt x="3024813" y="464790"/>
+                  </a:lnTo>
+                  <a:lnTo>
+                    <a:pt x="3095157" y="466097"/>
+                  </a:lnTo>
+                  <a:lnTo>
+                    <a:pt x="3165502" y="467399"/>
+                  </a:lnTo>
+                  <a:lnTo>
+                    <a:pt x="3235846" y="468695"/>
+                  </a:lnTo>
+                  <a:lnTo>
+                    <a:pt x="3306191" y="469985"/>
+                  </a:lnTo>
+                  <a:lnTo>
+                    <a:pt x="3376535" y="471270"/>
+                  </a:lnTo>
+                  <a:lnTo>
+                    <a:pt x="3446880" y="472549"/>
+                  </a:lnTo>
+                  <a:lnTo>
+                    <a:pt x="3517224" y="473822"/>
+                  </a:lnTo>
+                  <a:lnTo>
+                    <a:pt x="3587569" y="475090"/>
+                  </a:lnTo>
+                  <a:lnTo>
+                    <a:pt x="3657913" y="476352"/>
+                  </a:lnTo>
+                  <a:lnTo>
+                    <a:pt x="3728257" y="477609"/>
+                  </a:lnTo>
+                  <a:lnTo>
+                    <a:pt x="3798602" y="478860"/>
+                  </a:lnTo>
+                  <a:lnTo>
+                    <a:pt x="3868946" y="480106"/>
+                  </a:lnTo>
+                  <a:lnTo>
+                    <a:pt x="3939291" y="481346"/>
+                  </a:lnTo>
+                  <a:lnTo>
+                    <a:pt x="4009635" y="482581"/>
+                  </a:lnTo>
+                  <a:lnTo>
+                    <a:pt x="4079980" y="483810"/>
+                  </a:lnTo>
+                  <a:lnTo>
+                    <a:pt x="4150324" y="485035"/>
+                  </a:lnTo>
+                  <a:lnTo>
+                    <a:pt x="4220669" y="486253"/>
+                  </a:lnTo>
+                  <a:lnTo>
+                    <a:pt x="4291013" y="487467"/>
+                  </a:lnTo>
+                  <a:lnTo>
+                    <a:pt x="4361358" y="488675"/>
+                  </a:lnTo>
+                  <a:lnTo>
+                    <a:pt x="4431702" y="489877"/>
+                  </a:lnTo>
+                  <a:lnTo>
+                    <a:pt x="4502047" y="491075"/>
+                  </a:lnTo>
+                  <a:lnTo>
+                    <a:pt x="4572391" y="492267"/>
+                  </a:lnTo>
+                  <a:lnTo>
+                    <a:pt x="4642736" y="493454"/>
+                  </a:lnTo>
+                  <a:lnTo>
+                    <a:pt x="4713080" y="494636"/>
+                  </a:lnTo>
+                  <a:lnTo>
+                    <a:pt x="4783425" y="495813"/>
+                  </a:lnTo>
+                  <a:lnTo>
+                    <a:pt x="4853769" y="496984"/>
+                  </a:lnTo>
+                  <a:lnTo>
+                    <a:pt x="4924114" y="498150"/>
+                  </a:lnTo>
+                  <a:lnTo>
+                    <a:pt x="4994458" y="499312"/>
+                  </a:lnTo>
+                  <a:lnTo>
+                    <a:pt x="5064803" y="500468"/>
+                  </a:lnTo>
+                  <a:lnTo>
+                    <a:pt x="5135147" y="501619"/>
+                  </a:lnTo>
+                  <a:lnTo>
+                    <a:pt x="5205492" y="502765"/>
+                  </a:lnTo>
+                  <a:lnTo>
+                    <a:pt x="5275836" y="503906"/>
+                  </a:lnTo>
+                  <a:lnTo>
+                    <a:pt x="5346181" y="505042"/>
+                  </a:lnTo>
+                  <a:lnTo>
+                    <a:pt x="5416525" y="506173"/>
+                  </a:lnTo>
+                  <a:lnTo>
+                    <a:pt x="5486870" y="507299"/>
+                  </a:lnTo>
+                  <a:lnTo>
+                    <a:pt x="5557214" y="508421"/>
+                  </a:lnTo>
+                  <a:lnTo>
+                    <a:pt x="5627559" y="509537"/>
+                  </a:lnTo>
+                  <a:lnTo>
+                    <a:pt x="5697903" y="510648"/>
+                  </a:lnTo>
+                  <a:lnTo>
+                    <a:pt x="5768248" y="511755"/>
+                  </a:lnTo>
+                  <a:lnTo>
+                    <a:pt x="5838592" y="512856"/>
+                  </a:lnTo>
+                  <a:lnTo>
+                    <a:pt x="5908937" y="513953"/>
+                  </a:lnTo>
+                  <a:lnTo>
+                    <a:pt x="5979281" y="515045"/>
+                  </a:lnTo>
+                  <a:lnTo>
+                    <a:pt x="6049626" y="516132"/>
+                  </a:lnTo>
+                  <a:lnTo>
+                    <a:pt x="6119970" y="517215"/>
+                  </a:lnTo>
+                  <a:lnTo>
+                    <a:pt x="6190315" y="518293"/>
+                  </a:lnTo>
+                  <a:lnTo>
+                    <a:pt x="6260659" y="519366"/>
+                  </a:lnTo>
+                  <a:lnTo>
+                    <a:pt x="6331004" y="520434"/>
+                  </a:lnTo>
+                  <a:lnTo>
+                    <a:pt x="6401348" y="521498"/>
+                  </a:lnTo>
+                  <a:lnTo>
+                    <a:pt x="6471693" y="522557"/>
+                  </a:lnTo>
+                  <a:lnTo>
+                    <a:pt x="6542037" y="523611"/>
+                  </a:lnTo>
+                  <a:lnTo>
+                    <a:pt x="6612382" y="524661"/>
+                  </a:lnTo>
+                  <a:lnTo>
+                    <a:pt x="6682726" y="525706"/>
+                  </a:lnTo>
+                  <a:lnTo>
+                    <a:pt x="6753071" y="526747"/>
+                  </a:lnTo>
+                  <a:lnTo>
+                    <a:pt x="6823415" y="527783"/>
+                  </a:lnTo>
+                  <a:lnTo>
+                    <a:pt x="6893760" y="528814"/>
+                  </a:lnTo>
+                  <a:lnTo>
+                    <a:pt x="6964104" y="529841"/>
+                  </a:lnTo>
+                </a:path>
+              </a:pathLst>
+            </a:custGeom>
+          </p:spPr>
+          <p:txBody>
+            <a:bodyPr/>
+            <a:lstStyle/>
+            <a:p/>
+          </p:txBody>
+        </p:sp>
+        <p:sp>
+          <p:nvSpPr>
+            <p:cNvPr id="72" name="pl72"/>
+            <p:cNvSpPr/>
+            <p:nvPr/>
+          </p:nvSpPr>
+          <p:spPr>
+            <a:xfrm>
+              <a:off x="1235312" y="5233184"/>
+              <a:ext cx="6964104" cy="274881"/>
+            </a:xfrm>
+            <a:custGeom>
+              <a:avLst/>
+              <a:pathLst>
+                <a:path w="6964104" h="274881">
+                  <a:moveTo>
+                    <a:pt x="6964104" y="274881"/>
+                  </a:moveTo>
+                  <a:lnTo>
+                    <a:pt x="6893760" y="272968"/>
+                  </a:lnTo>
+                  <a:lnTo>
+                    <a:pt x="6823415" y="271012"/>
+                  </a:lnTo>
+                  <a:lnTo>
+                    <a:pt x="6753071" y="269013"/>
+                  </a:lnTo>
+                  <a:lnTo>
+                    <a:pt x="6682726" y="266969"/>
+                  </a:lnTo>
+                  <a:lnTo>
+                    <a:pt x="6612382" y="264879"/>
+                  </a:lnTo>
+                  <a:lnTo>
+                    <a:pt x="6542037" y="262742"/>
+                  </a:lnTo>
+                  <a:lnTo>
+                    <a:pt x="6471693" y="260558"/>
+                  </a:lnTo>
+                  <a:lnTo>
+                    <a:pt x="6401348" y="258324"/>
+                  </a:lnTo>
+                  <a:lnTo>
+                    <a:pt x="6331004" y="256041"/>
+                  </a:lnTo>
+                  <a:lnTo>
+                    <a:pt x="6260659" y="253707"/>
+                  </a:lnTo>
+                  <a:lnTo>
+                    <a:pt x="6190315" y="251321"/>
+                  </a:lnTo>
+                  <a:lnTo>
+                    <a:pt x="6119970" y="248882"/>
+                  </a:lnTo>
+                  <a:lnTo>
+                    <a:pt x="6049626" y="246388"/>
+                  </a:lnTo>
+                  <a:lnTo>
+                    <a:pt x="5979281" y="243838"/>
+                  </a:lnTo>
+                  <a:lnTo>
+                    <a:pt x="5908937" y="241231"/>
+                  </a:lnTo>
+                  <a:lnTo>
+                    <a:pt x="5838592" y="238566"/>
+                  </a:lnTo>
+                  <a:lnTo>
+                    <a:pt x="5768248" y="235842"/>
+                  </a:lnTo>
+                  <a:lnTo>
+                    <a:pt x="5697903" y="233056"/>
+                  </a:lnTo>
+                  <a:lnTo>
+                    <a:pt x="5627559" y="230209"/>
+                  </a:lnTo>
+                  <a:lnTo>
+                    <a:pt x="5557214" y="227297"/>
+                  </a:lnTo>
+                  <a:lnTo>
+                    <a:pt x="5486870" y="224321"/>
+                  </a:lnTo>
+                  <a:lnTo>
+                    <a:pt x="5416525" y="221278"/>
+                  </a:lnTo>
+                  <a:lnTo>
+                    <a:pt x="5346181" y="218167"/>
+                  </a:lnTo>
+                  <a:lnTo>
+                    <a:pt x="5275836" y="214987"/>
+                  </a:lnTo>
+                  <a:lnTo>
+                    <a:pt x="5205492" y="211736"/>
+                  </a:lnTo>
+                  <a:lnTo>
+                    <a:pt x="5135147" y="208412"/>
+                  </a:lnTo>
+                  <a:lnTo>
+                    <a:pt x="5064803" y="205013"/>
+                  </a:lnTo>
+                  <a:lnTo>
+                    <a:pt x="4994458" y="201539"/>
+                  </a:lnTo>
+                  <a:lnTo>
+                    <a:pt x="4924114" y="197987"/>
+                  </a:lnTo>
+                  <a:lnTo>
+                    <a:pt x="4853769" y="194356"/>
+                  </a:lnTo>
+                  <a:lnTo>
+                    <a:pt x="4783425" y="190644"/>
+                  </a:lnTo>
+                  <a:lnTo>
+                    <a:pt x="4713080" y="186848"/>
+                  </a:lnTo>
+                  <a:lnTo>
+                    <a:pt x="4642736" y="182968"/>
+                  </a:lnTo>
+                  <a:lnTo>
+                    <a:pt x="4572391" y="179001"/>
+                  </a:lnTo>
+                  <a:lnTo>
+                    <a:pt x="4502047" y="174946"/>
+                  </a:lnTo>
+                  <a:lnTo>
+                    <a:pt x="4431702" y="170800"/>
+                  </a:lnTo>
+                  <a:lnTo>
+                    <a:pt x="4361358" y="166561"/>
+                  </a:lnTo>
+                  <a:lnTo>
+                    <a:pt x="4291013" y="162228"/>
+                  </a:lnTo>
+                  <a:lnTo>
+                    <a:pt x="4220669" y="157797"/>
+                  </a:lnTo>
+                  <a:lnTo>
+                    <a:pt x="4150324" y="153268"/>
+                  </a:lnTo>
+                  <a:lnTo>
+                    <a:pt x="4079980" y="148638"/>
+                  </a:lnTo>
+                  <a:lnTo>
+                    <a:pt x="4009635" y="143904"/>
+                  </a:lnTo>
+                  <a:lnTo>
+                    <a:pt x="3939291" y="139064"/>
+                  </a:lnTo>
+                  <a:lnTo>
+                    <a:pt x="3868946" y="134116"/>
+                  </a:lnTo>
+                  <a:lnTo>
+                    <a:pt x="3798602" y="129058"/>
+                  </a:lnTo>
+                  <a:lnTo>
+                    <a:pt x="3728257" y="123887"/>
+                  </a:lnTo>
+                  <a:lnTo>
+                    <a:pt x="3657913" y="118600"/>
+                  </a:lnTo>
+                  <a:lnTo>
+                    <a:pt x="3587569" y="113195"/>
+                  </a:lnTo>
+                  <a:lnTo>
+                    <a:pt x="3517224" y="107669"/>
+                  </a:lnTo>
+                  <a:lnTo>
+                    <a:pt x="3446880" y="102020"/>
+                  </a:lnTo>
+                  <a:lnTo>
+                    <a:pt x="3376535" y="96244"/>
+                  </a:lnTo>
+                  <a:lnTo>
+                    <a:pt x="3306191" y="90339"/>
+                  </a:lnTo>
+                  <a:lnTo>
+                    <a:pt x="3235846" y="84303"/>
+                  </a:lnTo>
+                  <a:lnTo>
+                    <a:pt x="3165502" y="78132"/>
+                  </a:lnTo>
+                  <a:lnTo>
+                    <a:pt x="3095157" y="71822"/>
+                  </a:lnTo>
+                  <a:lnTo>
+                    <a:pt x="3024813" y="65372"/>
+                  </a:lnTo>
+                  <a:lnTo>
+                    <a:pt x="2954468" y="60695"/>
+                  </a:lnTo>
+                  <a:lnTo>
+                    <a:pt x="2884124" y="59376"/>
+                  </a:lnTo>
+                  <a:lnTo>
+                    <a:pt x="2813779" y="58051"/>
+                  </a:lnTo>
+                  <a:lnTo>
+                    <a:pt x="2743435" y="56721"/>
+                  </a:lnTo>
+                  <a:lnTo>
+                    <a:pt x="2673090" y="55384"/>
+                  </a:lnTo>
+                  <a:lnTo>
+                    <a:pt x="2602746" y="54042"/>
+                  </a:lnTo>
+                  <a:lnTo>
+                    <a:pt x="2532401" y="52694"/>
+                  </a:lnTo>
+                  <a:lnTo>
+                    <a:pt x="2462057" y="51340"/>
+                  </a:lnTo>
+                  <a:lnTo>
+                    <a:pt x="2391712" y="49980"/>
+                  </a:lnTo>
+                  <a:lnTo>
+                    <a:pt x="2321368" y="48614"/>
+                  </a:lnTo>
+                  <a:lnTo>
+                    <a:pt x="2251023" y="47242"/>
+                  </a:lnTo>
+                  <a:lnTo>
+                    <a:pt x="2180679" y="45863"/>
+                  </a:lnTo>
+                  <a:lnTo>
+                    <a:pt x="2110334" y="44479"/>
+                  </a:lnTo>
+                  <a:lnTo>
+                    <a:pt x="2039990" y="43089"/>
+                  </a:lnTo>
+                  <a:lnTo>
+                    <a:pt x="1969645" y="41693"/>
+                  </a:lnTo>
+                  <a:lnTo>
+                    <a:pt x="1899301" y="40290"/>
+                  </a:lnTo>
+                  <a:lnTo>
+                    <a:pt x="1828956" y="38882"/>
+                  </a:lnTo>
+                  <a:lnTo>
+                    <a:pt x="1758612" y="37467"/>
+                  </a:lnTo>
+                  <a:lnTo>
+                    <a:pt x="1688267" y="36046"/>
+                  </a:lnTo>
+                  <a:lnTo>
+                    <a:pt x="1617923" y="34618"/>
+                  </a:lnTo>
+                  <a:lnTo>
+                    <a:pt x="1547578" y="33185"/>
+                  </a:lnTo>
+                  <a:lnTo>
+                    <a:pt x="1477234" y="31745"/>
+                  </a:lnTo>
+                  <a:lnTo>
+                    <a:pt x="1406889" y="30299"/>
+                  </a:lnTo>
+                  <a:lnTo>
+                    <a:pt x="1336545" y="28846"/>
+                  </a:lnTo>
+                  <a:lnTo>
+                    <a:pt x="1266200" y="27387"/>
+                  </a:lnTo>
+                  <a:lnTo>
+                    <a:pt x="1195856" y="25922"/>
+                  </a:lnTo>
+                  <a:lnTo>
+                    <a:pt x="1125511" y="24450"/>
+                  </a:lnTo>
+                  <a:lnTo>
+                    <a:pt x="1055167" y="22971"/>
+                  </a:lnTo>
+                  <a:lnTo>
+                    <a:pt x="984822" y="21486"/>
+                  </a:lnTo>
+                  <a:lnTo>
+                    <a:pt x="914478" y="19995"/>
+                  </a:lnTo>
+                  <a:lnTo>
+                    <a:pt x="844133" y="18497"/>
+                  </a:lnTo>
+                  <a:lnTo>
+                    <a:pt x="773789" y="16993"/>
+                  </a:lnTo>
+                  <a:lnTo>
+                    <a:pt x="703444" y="15481"/>
+                  </a:lnTo>
+                  <a:lnTo>
+                    <a:pt x="633100" y="13964"/>
+                  </a:lnTo>
+                  <a:lnTo>
+                    <a:pt x="562755" y="12439"/>
+                  </a:lnTo>
+                  <a:lnTo>
+                    <a:pt x="492411" y="10908"/>
+                  </a:lnTo>
+                  <a:lnTo>
+                    <a:pt x="422066" y="9370"/>
+                  </a:lnTo>
+                  <a:lnTo>
+                    <a:pt x="351722" y="7825"/>
+                  </a:lnTo>
+                  <a:lnTo>
+                    <a:pt x="281377" y="6274"/>
+                  </a:lnTo>
+                  <a:lnTo>
+                    <a:pt x="211033" y="4716"/>
+                  </a:lnTo>
+                  <a:lnTo>
+                    <a:pt x="140688" y="3150"/>
+                  </a:lnTo>
+                  <a:lnTo>
+                    <a:pt x="70344" y="1578"/>
+                  </a:lnTo>
+                  <a:lnTo>
+                    <a:pt x="0" y="0"/>
+                  </a:lnTo>
+                </a:path>
+              </a:pathLst>
+            </a:custGeom>
+          </p:spPr>
+          <p:txBody>
+            <a:bodyPr/>
+            <a:lstStyle/>
+            <a:p/>
+          </p:txBody>
+        </p:sp>
+        <p:sp>
+          <p:nvSpPr>
+            <p:cNvPr id="73" name="pl73"/>
+            <p:cNvSpPr/>
+            <p:nvPr/>
+          </p:nvSpPr>
+          <p:spPr>
+            <a:xfrm>
+              <a:off x="1235312" y="5069124"/>
+              <a:ext cx="6964104" cy="383185"/>
+            </a:xfrm>
+            <a:custGeom>
+              <a:avLst/>
+              <a:pathLst>
+                <a:path w="6964104" h="383185">
+                  <a:moveTo>
+                    <a:pt x="0" y="0"/>
+                  </a:moveTo>
+                  <a:lnTo>
+                    <a:pt x="70344" y="6901"/>
+                  </a:lnTo>
+                  <a:lnTo>
+                    <a:pt x="140688" y="13711"/>
+                  </a:lnTo>
+                  <a:lnTo>
+                    <a:pt x="211033" y="20432"/>
+                  </a:lnTo>
+                  <a:lnTo>
+                    <a:pt x="281377" y="27065"/>
+                  </a:lnTo>
+                  <a:lnTo>
+                    <a:pt x="351722" y="33610"/>
+                  </a:lnTo>
+                  <a:lnTo>
+                    <a:pt x="422066" y="40069"/>
+                  </a:lnTo>
+                  <a:lnTo>
+                    <a:pt x="492411" y="46444"/>
+                  </a:lnTo>
+                  <a:lnTo>
+                    <a:pt x="562755" y="52734"/>
+                  </a:lnTo>
+                  <a:lnTo>
+                    <a:pt x="633100" y="58942"/>
+                  </a:lnTo>
+                  <a:lnTo>
+                    <a:pt x="703444" y="65068"/>
+                  </a:lnTo>
+                  <a:lnTo>
+                    <a:pt x="773789" y="71113"/>
+                  </a:lnTo>
+                  <a:lnTo>
+                    <a:pt x="844133" y="77079"/>
+                  </a:lnTo>
+                  <a:lnTo>
+                    <a:pt x="914478" y="82966"/>
+                  </a:lnTo>
+                  <a:lnTo>
+                    <a:pt x="984822" y="88776"/>
+                  </a:lnTo>
+                  <a:lnTo>
+                    <a:pt x="1055167" y="94509"/>
+                  </a:lnTo>
+                  <a:lnTo>
+                    <a:pt x="1125511" y="100167"/>
+                  </a:lnTo>
+                  <a:lnTo>
+                    <a:pt x="1195856" y="105751"/>
+                  </a:lnTo>
+                  <a:lnTo>
+                    <a:pt x="1266200" y="111261"/>
+                  </a:lnTo>
+                  <a:lnTo>
+                    <a:pt x="1336545" y="116698"/>
+                  </a:lnTo>
+                  <a:lnTo>
+                    <a:pt x="1406889" y="122064"/>
+                  </a:lnTo>
+                  <a:lnTo>
+                    <a:pt x="1477234" y="127360"/>
+                  </a:lnTo>
+                  <a:lnTo>
+                    <a:pt x="1547578" y="132586"/>
+                  </a:lnTo>
+                  <a:lnTo>
+                    <a:pt x="1617923" y="137743"/>
+                  </a:lnTo>
+                  <a:lnTo>
+                    <a:pt x="1688267" y="142832"/>
+                  </a:lnTo>
+                  <a:lnTo>
+                    <a:pt x="1758612" y="147854"/>
+                  </a:lnTo>
+                  <a:lnTo>
+                    <a:pt x="1828956" y="152810"/>
+                  </a:lnTo>
+                  <a:lnTo>
+                    <a:pt x="1899301" y="157701"/>
+                  </a:lnTo>
+                  <a:lnTo>
+                    <a:pt x="1969645" y="162528"/>
+                  </a:lnTo>
+                  <a:lnTo>
+                    <a:pt x="2039990" y="167291"/>
+                  </a:lnTo>
+                  <a:lnTo>
+                    <a:pt x="2110334" y="171991"/>
+                  </a:lnTo>
+                  <a:lnTo>
+                    <a:pt x="2180679" y="176630"/>
+                  </a:lnTo>
+                  <a:lnTo>
+                    <a:pt x="2251023" y="181207"/>
+                  </a:lnTo>
+                  <a:lnTo>
+                    <a:pt x="2321368" y="185725"/>
+                  </a:lnTo>
+                  <a:lnTo>
+                    <a:pt x="2391712" y="190183"/>
+                  </a:lnTo>
+                  <a:lnTo>
+                    <a:pt x="2462057" y="194582"/>
+                  </a:lnTo>
+                  <a:lnTo>
+                    <a:pt x="2532401" y="198923"/>
+                  </a:lnTo>
+                  <a:lnTo>
+                    <a:pt x="2602746" y="203207"/>
+                  </a:lnTo>
+                  <a:lnTo>
+                    <a:pt x="2673090" y="207435"/>
+                  </a:lnTo>
+                  <a:lnTo>
+                    <a:pt x="2743435" y="211608"/>
+                  </a:lnTo>
+                  <a:lnTo>
+                    <a:pt x="2813779" y="215725"/>
+                  </a:lnTo>
+                  <a:lnTo>
+                    <a:pt x="2884124" y="219788"/>
+                  </a:lnTo>
+                  <a:lnTo>
+                    <a:pt x="2954468" y="223798"/>
+                  </a:lnTo>
+                  <a:lnTo>
+                    <a:pt x="3024813" y="227755"/>
+                  </a:lnTo>
+                  <a:lnTo>
+                    <a:pt x="3095157" y="231660"/>
+                  </a:lnTo>
+                  <a:lnTo>
+                    <a:pt x="3165502" y="235513"/>
+                  </a:lnTo>
+                  <a:lnTo>
+                    <a:pt x="3235846" y="239316"/>
+                  </a:lnTo>
+                  <a:lnTo>
+                    <a:pt x="3306191" y="243069"/>
+                  </a:lnTo>
+                  <a:lnTo>
+                    <a:pt x="3376535" y="246772"/>
+                  </a:lnTo>
+                  <a:lnTo>
+                    <a:pt x="3446880" y="250427"/>
+                  </a:lnTo>
+                  <a:lnTo>
+                    <a:pt x="3517224" y="254034"/>
+                  </a:lnTo>
+                  <a:lnTo>
+                    <a:pt x="3587569" y="257593"/>
+                  </a:lnTo>
+                  <a:lnTo>
+                    <a:pt x="3657913" y="261105"/>
+                  </a:lnTo>
+                  <a:lnTo>
+                    <a:pt x="3728257" y="264572"/>
+                  </a:lnTo>
+                  <a:lnTo>
+                    <a:pt x="3798602" y="267992"/>
+                  </a:lnTo>
+                  <a:lnTo>
+                    <a:pt x="3868946" y="271368"/>
+                  </a:lnTo>
+                  <a:lnTo>
+                    <a:pt x="3939291" y="274699"/>
+                  </a:lnTo>
+                  <a:lnTo>
+                    <a:pt x="4009635" y="277986"/>
+                  </a:lnTo>
+                  <a:lnTo>
+                    <a:pt x="4079980" y="281230"/>
+                  </a:lnTo>
+                  <a:lnTo>
+                    <a:pt x="4150324" y="284432"/>
+                  </a:lnTo>
+                  <a:lnTo>
+                    <a:pt x="4220669" y="287591"/>
+                  </a:lnTo>
+                  <a:lnTo>
+                    <a:pt x="4291013" y="290708"/>
+                  </a:lnTo>
+                  <a:lnTo>
+                    <a:pt x="4361358" y="293785"/>
+                  </a:lnTo>
+                  <a:lnTo>
+                    <a:pt x="4431702" y="296821"/>
+                  </a:lnTo>
+                  <a:lnTo>
+                    <a:pt x="4502047" y="299818"/>
+                  </a:lnTo>
+                  <a:lnTo>
+                    <a:pt x="4572391" y="302774"/>
+                  </a:lnTo>
+                  <a:lnTo>
+                    <a:pt x="4642736" y="305692"/>
+                  </a:lnTo>
+                  <a:lnTo>
+                    <a:pt x="4713080" y="308572"/>
+                  </a:lnTo>
+                  <a:lnTo>
+                    <a:pt x="4783425" y="311414"/>
+                  </a:lnTo>
+                  <a:lnTo>
+                    <a:pt x="4853769" y="314218"/>
+                  </a:lnTo>
+                  <a:lnTo>
+                    <a:pt x="4924114" y="316985"/>
+                  </a:lnTo>
+                  <a:lnTo>
+                    <a:pt x="4994458" y="319716"/>
+                  </a:lnTo>
+                  <a:lnTo>
+                    <a:pt x="5064803" y="322411"/>
+                  </a:lnTo>
+                  <a:lnTo>
+                    <a:pt x="5135147" y="325071"/>
+                  </a:lnTo>
+                  <a:lnTo>
+                    <a:pt x="5205492" y="327695"/>
+                  </a:lnTo>
+                  <a:lnTo>
+                    <a:pt x="5275836" y="330286"/>
+                  </a:lnTo>
+                  <a:lnTo>
+                    <a:pt x="5346181" y="332842"/>
+                  </a:lnTo>
+                  <a:lnTo>
+                    <a:pt x="5416525" y="335364"/>
+                  </a:lnTo>
+                  <a:lnTo>
+                    <a:pt x="5486870" y="337853"/>
+                  </a:lnTo>
+                  <a:lnTo>
+                    <a:pt x="5557214" y="340310"/>
+                  </a:lnTo>
+                  <a:lnTo>
+                    <a:pt x="5627559" y="342734"/>
+                  </a:lnTo>
+                  <a:lnTo>
+                    <a:pt x="5697903" y="345126"/>
+                  </a:lnTo>
+                  <a:lnTo>
+                    <a:pt x="5768248" y="347487"/>
+                  </a:lnTo>
+                  <a:lnTo>
+                    <a:pt x="5838592" y="349816"/>
+                  </a:lnTo>
+                  <a:lnTo>
+                    <a:pt x="5908937" y="352115"/>
+                  </a:lnTo>
+                  <a:lnTo>
+                    <a:pt x="5979281" y="354384"/>
+                  </a:lnTo>
+                  <a:lnTo>
+                    <a:pt x="6049626" y="356623"/>
+                  </a:lnTo>
+                  <a:lnTo>
+                    <a:pt x="6119970" y="358833"/>
+                  </a:lnTo>
+                  <a:lnTo>
+                    <a:pt x="6190315" y="361013"/>
+                  </a:lnTo>
+                  <a:lnTo>
+                    <a:pt x="6260659" y="363165"/>
+                  </a:lnTo>
+                  <a:lnTo>
+                    <a:pt x="6331004" y="365288"/>
+                  </a:lnTo>
+                  <a:lnTo>
+                    <a:pt x="6401348" y="367384"/>
+                  </a:lnTo>
+                  <a:lnTo>
+                    <a:pt x="6471693" y="369451"/>
+                  </a:lnTo>
+                  <a:lnTo>
+                    <a:pt x="6542037" y="371492"/>
+                  </a:lnTo>
+                  <a:lnTo>
+                    <a:pt x="6612382" y="373506"/>
+                  </a:lnTo>
+                  <a:lnTo>
+                    <a:pt x="6682726" y="375493"/>
+                  </a:lnTo>
+                  <a:lnTo>
+                    <a:pt x="6753071" y="377455"/>
+                  </a:lnTo>
+                  <a:lnTo>
+                    <a:pt x="6823415" y="379390"/>
+                  </a:lnTo>
+                  <a:lnTo>
+                    <a:pt x="6893760" y="381300"/>
+                  </a:lnTo>
+                  <a:lnTo>
+                    <a:pt x="6964104" y="383185"/>
+                  </a:lnTo>
+                </a:path>
+              </a:pathLst>
+            </a:custGeom>
+            <a:ln w="27101" cap="flat">
+              <a:solidFill>
+                <a:srgbClr val="FF8C00">
+                  <a:alpha val="100000"/>
+                </a:srgbClr>
+              </a:solidFill>
+              <a:prstDash val="solid"/>
+              <a:round/>
+            </a:ln>
+          </p:spPr>
+          <p:txBody>
+            <a:bodyPr/>
+            <a:lstStyle/>
+            <a:p/>
+          </p:txBody>
+        </p:sp>
+        <p:sp>
+          <p:nvSpPr>
+            <p:cNvPr id="74" name="pl74"/>
+            <p:cNvSpPr/>
+            <p:nvPr/>
+          </p:nvSpPr>
+          <p:spPr>
+            <a:xfrm>
+              <a:off x="887106" y="5294352"/>
+              <a:ext cx="7660515" cy="0"/>
+            </a:xfrm>
+            <a:custGeom>
+              <a:avLst/>
+              <a:pathLst>
+                <a:path w="7660515" h="0">
+                  <a:moveTo>
+                    <a:pt x="0" y="0"/>
+                  </a:moveTo>
+                  <a:lnTo>
+                    <a:pt x="7660515" y="0"/>
+                  </a:lnTo>
+                  <a:lnTo>
+                    <a:pt x="7660515" y="0"/>
+                  </a:lnTo>
+                </a:path>
+              </a:pathLst>
+            </a:custGeom>
+            <a:ln w="13550" cap="flat">
+              <a:solidFill>
+                <a:srgbClr val="7F7F7F">
+                  <a:alpha val="100000"/>
+                </a:srgbClr>
+              </a:solidFill>
+              <a:prstDash val="dash"/>
+              <a:round/>
+            </a:ln>
+          </p:spPr>
+          <p:txBody>
+            <a:bodyPr/>
+            <a:lstStyle/>
+            <a:p/>
+          </p:txBody>
+        </p:sp>
+        <p:sp>
+          <p:nvSpPr>
+            <p:cNvPr id="75" name="pl75"/>
+            <p:cNvSpPr/>
+            <p:nvPr/>
+          </p:nvSpPr>
+          <p:spPr>
+            <a:xfrm>
+              <a:off x="4215100" y="4336484"/>
+              <a:ext cx="0" cy="1317069"/>
+            </a:xfrm>
+            <a:custGeom>
+              <a:avLst/>
+              <a:pathLst>
+                <a:path w="0" h="1317069">
+                  <a:moveTo>
+                    <a:pt x="0" y="1317069"/>
+                  </a:moveTo>
+                  <a:lnTo>
+                    <a:pt x="0" y="0"/>
+                  </a:lnTo>
+                  <a:lnTo>
+                    <a:pt x="0" y="0"/>
+                  </a:lnTo>
+                </a:path>
+              </a:pathLst>
+            </a:custGeom>
+            <a:ln w="13550" cap="flat">
+              <a:solidFill>
+                <a:srgbClr val="666666">
+                  <a:alpha val="100000"/>
+                </a:srgbClr>
+              </a:solidFill>
+              <a:prstDash val="dot"/>
+              <a:round/>
+            </a:ln>
+          </p:spPr>
+          <p:txBody>
+            <a:bodyPr/>
+            <a:lstStyle/>
+            <a:p/>
+          </p:txBody>
+        </p:sp>
+        <p:sp>
+          <p:nvSpPr>
+            <p:cNvPr id="76" name="pl76"/>
+            <p:cNvSpPr/>
+            <p:nvPr/>
+          </p:nvSpPr>
+          <p:spPr>
+            <a:xfrm>
+              <a:off x="3046793" y="4336484"/>
+              <a:ext cx="0" cy="1317069"/>
+            </a:xfrm>
+            <a:custGeom>
+              <a:avLst/>
+              <a:pathLst>
+                <a:path w="0" h="1317069">
+                  <a:moveTo>
+                    <a:pt x="0" y="1317069"/>
+                  </a:moveTo>
+                  <a:lnTo>
+                    <a:pt x="0" y="0"/>
+                  </a:lnTo>
+                  <a:lnTo>
+                    <a:pt x="0" y="0"/>
+                  </a:lnTo>
+                </a:path>
+              </a:pathLst>
+            </a:custGeom>
+            <a:ln w="13550" cap="flat">
+              <a:solidFill>
+                <a:srgbClr val="4682B4">
+                  <a:alpha val="69803"/>
+                </a:srgbClr>
+              </a:solidFill>
+              <a:prstDash val="dash"/>
+              <a:round/>
+            </a:ln>
+          </p:spPr>
+          <p:txBody>
+            <a:bodyPr/>
+            <a:lstStyle/>
+            <a:p/>
+          </p:txBody>
+        </p:sp>
+        <p:sp>
+          <p:nvSpPr>
+            <p:cNvPr id="77" name="pl77"/>
+            <p:cNvSpPr/>
+            <p:nvPr/>
+          </p:nvSpPr>
+          <p:spPr>
+            <a:xfrm>
+              <a:off x="5409191" y="4336484"/>
+              <a:ext cx="0" cy="1317069"/>
+            </a:xfrm>
+            <a:custGeom>
+              <a:avLst/>
+              <a:pathLst>
+                <a:path w="0" h="1317069">
+                  <a:moveTo>
+                    <a:pt x="0" y="1317069"/>
+                  </a:moveTo>
+                  <a:lnTo>
+                    <a:pt x="0" y="0"/>
+                  </a:lnTo>
+                  <a:lnTo>
+                    <a:pt x="0" y="0"/>
+                  </a:lnTo>
+                </a:path>
+              </a:pathLst>
+            </a:custGeom>
+            <a:ln w="13550" cap="flat">
+              <a:solidFill>
+                <a:srgbClr val="4682B4">
+                  <a:alpha val="69803"/>
+                </a:srgbClr>
+              </a:solidFill>
+              <a:prstDash val="dash"/>
+              <a:round/>
+            </a:ln>
+          </p:spPr>
+          <p:txBody>
+            <a:bodyPr/>
+            <a:lstStyle/>
+            <a:p/>
+          </p:txBody>
+        </p:sp>
+        <p:sp>
+          <p:nvSpPr>
+            <p:cNvPr id="78" name="tx78"/>
+            <p:cNvSpPr/>
+            <p:nvPr/>
+          </p:nvSpPr>
+          <p:spPr>
+            <a:xfrm>
+              <a:off x="762297" y="5553636"/>
+              <a:ext cx="62179" cy="80101"/>
+            </a:xfrm>
+            <a:prstGeom prst="rect">
+              <a:avLst/>
+            </a:prstGeom>
+            <a:noFill/>
+          </p:spPr>
+          <p:txBody>
+            <a:bodyPr lIns="0" rIns="0" tIns="0" bIns="0" anchorCtr="1" anchor="ctr" wrap="none"/>
+            <a:lstStyle/>
+            <a:p>
+              <a:pPr algn="l" marL="0" marR="0" indent="0">
+                <a:lnSpc>
+                  <a:spcPts val="880"/>
+                </a:lnSpc>
+                <a:spcBef>
+                  <a:spcPts val="0"/>
+                </a:spcBef>
+                <a:spcAft>
+                  <a:spcPts val="0"/>
+                </a:spcAft>
+              </a:pPr>
+              <a:r>
+                <a:rPr sz="880">
+                  <a:solidFill>
+                    <a:srgbClr val="4D4D4D">
+                      <a:alpha val="100000"/>
+                    </a:srgbClr>
+                  </a:solidFill>
+                  <a:latin typeface="Helvetica"/>
+                  <a:cs typeface="Helvetica"/>
+                </a:rPr>
+                <a:t>0</a:t>
+              </a:r>
+            </a:p>
+          </p:txBody>
+        </p:sp>
+        <p:sp>
+          <p:nvSpPr>
+            <p:cNvPr id="79" name="tx79"/>
+            <p:cNvSpPr/>
+            <p:nvPr/>
+          </p:nvSpPr>
+          <p:spPr>
+            <a:xfrm>
+              <a:off x="762297" y="5254302"/>
+              <a:ext cx="62179" cy="80101"/>
+            </a:xfrm>
+            <a:prstGeom prst="rect">
+              <a:avLst/>
+            </a:prstGeom>
+            <a:noFill/>
+          </p:spPr>
+          <p:txBody>
+            <a:bodyPr lIns="0" rIns="0" tIns="0" bIns="0" anchorCtr="1" anchor="ctr" wrap="none"/>
+            <a:lstStyle/>
+            <a:p>
+              <a:pPr algn="l" marL="0" marR="0" indent="0">
+                <a:lnSpc>
+                  <a:spcPts val="880"/>
+                </a:lnSpc>
+                <a:spcBef>
+                  <a:spcPts val="0"/>
+                </a:spcBef>
+                <a:spcAft>
+                  <a:spcPts val="0"/>
+                </a:spcAft>
+              </a:pPr>
+              <a:r>
+                <a:rPr sz="880">
+                  <a:solidFill>
+                    <a:srgbClr val="4D4D4D">
+                      <a:alpha val="100000"/>
+                    </a:srgbClr>
+                  </a:solidFill>
+                  <a:latin typeface="Helvetica"/>
+                  <a:cs typeface="Helvetica"/>
+                </a:rPr>
+                <a:t>1</a:t>
+              </a:r>
+            </a:p>
+          </p:txBody>
+        </p:sp>
+        <p:sp>
+          <p:nvSpPr>
+            <p:cNvPr id="80" name="tx80"/>
+            <p:cNvSpPr/>
+            <p:nvPr/>
+          </p:nvSpPr>
+          <p:spPr>
+            <a:xfrm>
+              <a:off x="762297" y="4954968"/>
+              <a:ext cx="62179" cy="80101"/>
+            </a:xfrm>
+            <a:prstGeom prst="rect">
+              <a:avLst/>
+            </a:prstGeom>
+            <a:noFill/>
+          </p:spPr>
+          <p:txBody>
+            <a:bodyPr lIns="0" rIns="0" tIns="0" bIns="0" anchorCtr="1" anchor="ctr" wrap="none"/>
+            <a:lstStyle/>
+            <a:p>
+              <a:pPr algn="l" marL="0" marR="0" indent="0">
+                <a:lnSpc>
+                  <a:spcPts val="880"/>
+                </a:lnSpc>
+                <a:spcBef>
+                  <a:spcPts val="0"/>
+                </a:spcBef>
+                <a:spcAft>
+                  <a:spcPts val="0"/>
+                </a:spcAft>
+              </a:pPr>
+              <a:r>
+                <a:rPr sz="880">
+                  <a:solidFill>
+                    <a:srgbClr val="4D4D4D">
+                      <a:alpha val="100000"/>
+                    </a:srgbClr>
+                  </a:solidFill>
+                  <a:latin typeface="Helvetica"/>
+                  <a:cs typeface="Helvetica"/>
+                </a:rPr>
+                <a:t>2</a:t>
+              </a:r>
+            </a:p>
+          </p:txBody>
+        </p:sp>
+        <p:sp>
+          <p:nvSpPr>
+            <p:cNvPr id="81" name="tx81"/>
+            <p:cNvSpPr/>
+            <p:nvPr/>
+          </p:nvSpPr>
+          <p:spPr>
+            <a:xfrm>
+              <a:off x="762297" y="4655634"/>
+              <a:ext cx="62179" cy="80101"/>
+            </a:xfrm>
+            <a:prstGeom prst="rect">
+              <a:avLst/>
+            </a:prstGeom>
+            <a:noFill/>
+          </p:spPr>
+          <p:txBody>
+            <a:bodyPr lIns="0" rIns="0" tIns="0" bIns="0" anchorCtr="1" anchor="ctr" wrap="none"/>
+            <a:lstStyle/>
+            <a:p>
+              <a:pPr algn="l" marL="0" marR="0" indent="0">
+                <a:lnSpc>
+                  <a:spcPts val="880"/>
+                </a:lnSpc>
+                <a:spcBef>
+                  <a:spcPts val="0"/>
+                </a:spcBef>
+                <a:spcAft>
+                  <a:spcPts val="0"/>
+                </a:spcAft>
+              </a:pPr>
+              <a:r>
+                <a:rPr sz="880">
+                  <a:solidFill>
+                    <a:srgbClr val="4D4D4D">
+                      <a:alpha val="100000"/>
+                    </a:srgbClr>
+                  </a:solidFill>
+                  <a:latin typeface="Helvetica"/>
+                  <a:cs typeface="Helvetica"/>
+                </a:rPr>
+                <a:t>3</a:t>
+              </a:r>
+            </a:p>
+          </p:txBody>
+        </p:sp>
+        <p:sp>
+          <p:nvSpPr>
+            <p:cNvPr id="82" name="tx82"/>
+            <p:cNvSpPr/>
+            <p:nvPr/>
+          </p:nvSpPr>
+          <p:spPr>
+            <a:xfrm>
+              <a:off x="762297" y="4356300"/>
+              <a:ext cx="62179" cy="80101"/>
+            </a:xfrm>
+            <a:prstGeom prst="rect">
+              <a:avLst/>
+            </a:prstGeom>
+            <a:noFill/>
+          </p:spPr>
+          <p:txBody>
+            <a:bodyPr lIns="0" rIns="0" tIns="0" bIns="0" anchorCtr="1" anchor="ctr" wrap="none"/>
+            <a:lstStyle/>
+            <a:p>
+              <a:pPr algn="l" marL="0" marR="0" indent="0">
+                <a:lnSpc>
+                  <a:spcPts val="880"/>
+                </a:lnSpc>
+                <a:spcBef>
+                  <a:spcPts val="0"/>
+                </a:spcBef>
+                <a:spcAft>
+                  <a:spcPts val="0"/>
+                </a:spcAft>
+              </a:pPr>
+              <a:r>
+                <a:rPr sz="880">
+                  <a:solidFill>
+                    <a:srgbClr val="4D4D4D">
+                      <a:alpha val="100000"/>
+                    </a:srgbClr>
+                  </a:solidFill>
+                  <a:latin typeface="Helvetica"/>
+                  <a:cs typeface="Helvetica"/>
+                </a:rPr>
+                <a:t>4</a:t>
+              </a:r>
+            </a:p>
+          </p:txBody>
+        </p:sp>
+        <p:sp>
+          <p:nvSpPr>
+            <p:cNvPr id="83" name="tx83"/>
+            <p:cNvSpPr/>
+            <p:nvPr/>
+          </p:nvSpPr>
+          <p:spPr>
+            <a:xfrm>
+              <a:off x="1164222" y="5716183"/>
+              <a:ext cx="161574" cy="80101"/>
+            </a:xfrm>
+            <a:prstGeom prst="rect">
+              <a:avLst/>
+            </a:prstGeom>
+            <a:noFill/>
+          </p:spPr>
+          <p:txBody>
+            <a:bodyPr lIns="0" rIns="0" tIns="0" bIns="0" anchorCtr="1" anchor="ctr" wrap="none"/>
+            <a:lstStyle/>
+            <a:p>
+              <a:pPr algn="l" marL="0" marR="0" indent="0">
+                <a:lnSpc>
+                  <a:spcPts val="880"/>
+                </a:lnSpc>
+                <a:spcBef>
+                  <a:spcPts val="0"/>
+                </a:spcBef>
+                <a:spcAft>
+                  <a:spcPts val="0"/>
+                </a:spcAft>
+              </a:pPr>
+              <a:r>
+                <a:rPr sz="880">
+                  <a:solidFill>
+                    <a:srgbClr val="4D4D4D">
+                      <a:alpha val="100000"/>
+                    </a:srgbClr>
+                  </a:solidFill>
+                  <a:latin typeface="Helvetica"/>
+                  <a:cs typeface="Helvetica"/>
+                </a:rPr>
+                <a:t>-50</a:t>
+              </a:r>
+            </a:p>
+          </p:txBody>
+        </p:sp>
+        <p:sp>
+          <p:nvSpPr>
+            <p:cNvPr id="84" name="tx84"/>
+            <p:cNvSpPr/>
+            <p:nvPr/>
+          </p:nvSpPr>
+          <p:spPr>
+            <a:xfrm>
+              <a:off x="2024485" y="5716183"/>
+              <a:ext cx="161574" cy="80101"/>
+            </a:xfrm>
+            <a:prstGeom prst="rect">
+              <a:avLst/>
+            </a:prstGeom>
+            <a:noFill/>
+          </p:spPr>
+          <p:txBody>
+            <a:bodyPr lIns="0" rIns="0" tIns="0" bIns="0" anchorCtr="1" anchor="ctr" wrap="none"/>
+            <a:lstStyle/>
+            <a:p>
+              <a:pPr algn="l" marL="0" marR="0" indent="0">
+                <a:lnSpc>
+                  <a:spcPts val="880"/>
+                </a:lnSpc>
+                <a:spcBef>
+                  <a:spcPts val="0"/>
+                </a:spcBef>
+                <a:spcAft>
+                  <a:spcPts val="0"/>
+                </a:spcAft>
+              </a:pPr>
+              <a:r>
+                <a:rPr sz="880">
+                  <a:solidFill>
+                    <a:srgbClr val="4D4D4D">
+                      <a:alpha val="100000"/>
+                    </a:srgbClr>
+                  </a:solidFill>
+                  <a:latin typeface="Helvetica"/>
+                  <a:cs typeface="Helvetica"/>
+                </a:rPr>
+                <a:t>-40</a:t>
+              </a:r>
+            </a:p>
+          </p:txBody>
+        </p:sp>
+        <p:sp>
+          <p:nvSpPr>
+            <p:cNvPr id="85" name="tx85"/>
+            <p:cNvSpPr/>
+            <p:nvPr/>
+          </p:nvSpPr>
+          <p:spPr>
+            <a:xfrm>
+              <a:off x="2884749" y="5716183"/>
+              <a:ext cx="161574" cy="80101"/>
+            </a:xfrm>
+            <a:prstGeom prst="rect">
+              <a:avLst/>
+            </a:prstGeom>
+            <a:noFill/>
+          </p:spPr>
+          <p:txBody>
+            <a:bodyPr lIns="0" rIns="0" tIns="0" bIns="0" anchorCtr="1" anchor="ctr" wrap="none"/>
+            <a:lstStyle/>
+            <a:p>
+              <a:pPr algn="l" marL="0" marR="0" indent="0">
+                <a:lnSpc>
+                  <a:spcPts val="880"/>
+                </a:lnSpc>
+                <a:spcBef>
+                  <a:spcPts val="0"/>
+                </a:spcBef>
+                <a:spcAft>
+                  <a:spcPts val="0"/>
+                </a:spcAft>
+              </a:pPr>
+              <a:r>
+                <a:rPr sz="880">
+                  <a:solidFill>
+                    <a:srgbClr val="4D4D4D">
+                      <a:alpha val="100000"/>
+                    </a:srgbClr>
+                  </a:solidFill>
+                  <a:latin typeface="Helvetica"/>
+                  <a:cs typeface="Helvetica"/>
+                </a:rPr>
+                <a:t>-30</a:t>
+              </a:r>
+            </a:p>
+          </p:txBody>
+        </p:sp>
+        <p:sp>
+          <p:nvSpPr>
+            <p:cNvPr id="86" name="tx86"/>
+            <p:cNvSpPr/>
+            <p:nvPr/>
+          </p:nvSpPr>
+          <p:spPr>
+            <a:xfrm>
+              <a:off x="3745012" y="5716183"/>
+              <a:ext cx="161574" cy="80101"/>
+            </a:xfrm>
+            <a:prstGeom prst="rect">
+              <a:avLst/>
+            </a:prstGeom>
+            <a:noFill/>
+          </p:spPr>
+          <p:txBody>
+            <a:bodyPr lIns="0" rIns="0" tIns="0" bIns="0" anchorCtr="1" anchor="ctr" wrap="none"/>
+            <a:lstStyle/>
+            <a:p>
+              <a:pPr algn="l" marL="0" marR="0" indent="0">
+                <a:lnSpc>
+                  <a:spcPts val="880"/>
+                </a:lnSpc>
+                <a:spcBef>
+                  <a:spcPts val="0"/>
+                </a:spcBef>
+                <a:spcAft>
+                  <a:spcPts val="0"/>
+                </a:spcAft>
+              </a:pPr>
+              <a:r>
+                <a:rPr sz="880">
+                  <a:solidFill>
+                    <a:srgbClr val="4D4D4D">
+                      <a:alpha val="100000"/>
+                    </a:srgbClr>
+                  </a:solidFill>
+                  <a:latin typeface="Helvetica"/>
+                  <a:cs typeface="Helvetica"/>
+                </a:rPr>
+                <a:t>-20</a:t>
+              </a:r>
+            </a:p>
+          </p:txBody>
+        </p:sp>
+        <p:sp>
+          <p:nvSpPr>
+            <p:cNvPr id="87" name="tx87"/>
+            <p:cNvSpPr/>
+            <p:nvPr/>
+          </p:nvSpPr>
+          <p:spPr>
+            <a:xfrm>
+              <a:off x="4605275" y="5716183"/>
+              <a:ext cx="161574" cy="80101"/>
+            </a:xfrm>
+            <a:prstGeom prst="rect">
+              <a:avLst/>
+            </a:prstGeom>
+            <a:noFill/>
+          </p:spPr>
+          <p:txBody>
+            <a:bodyPr lIns="0" rIns="0" tIns="0" bIns="0" anchorCtr="1" anchor="ctr" wrap="none"/>
+            <a:lstStyle/>
+            <a:p>
+              <a:pPr algn="l" marL="0" marR="0" indent="0">
+                <a:lnSpc>
+                  <a:spcPts val="880"/>
+                </a:lnSpc>
+                <a:spcBef>
+                  <a:spcPts val="0"/>
+                </a:spcBef>
+                <a:spcAft>
+                  <a:spcPts val="0"/>
+                </a:spcAft>
+              </a:pPr>
+              <a:r>
+                <a:rPr sz="880">
+                  <a:solidFill>
+                    <a:srgbClr val="4D4D4D">
+                      <a:alpha val="100000"/>
+                    </a:srgbClr>
+                  </a:solidFill>
+                  <a:latin typeface="Helvetica"/>
+                  <a:cs typeface="Helvetica"/>
+                </a:rPr>
+                <a:t>-10</a:t>
+              </a:r>
+            </a:p>
+          </p:txBody>
+        </p:sp>
+        <p:sp>
+          <p:nvSpPr>
+            <p:cNvPr id="88" name="tx88"/>
+            <p:cNvSpPr/>
+            <p:nvPr/>
+          </p:nvSpPr>
+          <p:spPr>
+            <a:xfrm>
+              <a:off x="5515235" y="5716183"/>
+              <a:ext cx="62179" cy="80101"/>
+            </a:xfrm>
+            <a:prstGeom prst="rect">
+              <a:avLst/>
+            </a:prstGeom>
+            <a:noFill/>
+          </p:spPr>
+          <p:txBody>
+            <a:bodyPr lIns="0" rIns="0" tIns="0" bIns="0" anchorCtr="1" anchor="ctr" wrap="none"/>
+            <a:lstStyle/>
+            <a:p>
+              <a:pPr algn="l" marL="0" marR="0" indent="0">
+                <a:lnSpc>
+                  <a:spcPts val="880"/>
+                </a:lnSpc>
+                <a:spcBef>
+                  <a:spcPts val="0"/>
+                </a:spcBef>
+                <a:spcAft>
+                  <a:spcPts val="0"/>
+                </a:spcAft>
+              </a:pPr>
+              <a:r>
+                <a:rPr sz="880">
+                  <a:solidFill>
+                    <a:srgbClr val="4D4D4D">
+                      <a:alpha val="100000"/>
+                    </a:srgbClr>
+                  </a:solidFill>
+                  <a:latin typeface="Helvetica"/>
+                  <a:cs typeface="Helvetica"/>
+                </a:rPr>
+                <a:t>0</a:t>
+              </a:r>
+            </a:p>
+          </p:txBody>
+        </p:sp>
+        <p:sp>
+          <p:nvSpPr>
+            <p:cNvPr id="89" name="tx89"/>
+            <p:cNvSpPr/>
+            <p:nvPr/>
+          </p:nvSpPr>
+          <p:spPr>
+            <a:xfrm>
+              <a:off x="6344409" y="5716183"/>
+              <a:ext cx="124358" cy="80101"/>
+            </a:xfrm>
+            <a:prstGeom prst="rect">
+              <a:avLst/>
+            </a:prstGeom>
+            <a:noFill/>
+          </p:spPr>
+          <p:txBody>
+            <a:bodyPr lIns="0" rIns="0" tIns="0" bIns="0" anchorCtr="1" anchor="ctr" wrap="none"/>
+            <a:lstStyle/>
+            <a:p>
+              <a:pPr algn="l" marL="0" marR="0" indent="0">
+                <a:lnSpc>
+                  <a:spcPts val="880"/>
+                </a:lnSpc>
+                <a:spcBef>
+                  <a:spcPts val="0"/>
+                </a:spcBef>
+                <a:spcAft>
+                  <a:spcPts val="0"/>
+                </a:spcAft>
+              </a:pPr>
+              <a:r>
+                <a:rPr sz="880">
+                  <a:solidFill>
+                    <a:srgbClr val="4D4D4D">
+                      <a:alpha val="100000"/>
+                    </a:srgbClr>
+                  </a:solidFill>
+                  <a:latin typeface="Helvetica"/>
+                  <a:cs typeface="Helvetica"/>
+                </a:rPr>
+                <a:t>10</a:t>
+              </a:r>
+            </a:p>
+          </p:txBody>
+        </p:sp>
+        <p:sp>
+          <p:nvSpPr>
+            <p:cNvPr id="90" name="tx90"/>
+            <p:cNvSpPr/>
+            <p:nvPr/>
+          </p:nvSpPr>
+          <p:spPr>
+            <a:xfrm>
+              <a:off x="7204672" y="5716183"/>
+              <a:ext cx="124358" cy="80101"/>
+            </a:xfrm>
+            <a:prstGeom prst="rect">
+              <a:avLst/>
+            </a:prstGeom>
+            <a:noFill/>
+          </p:spPr>
+          <p:txBody>
+            <a:bodyPr lIns="0" rIns="0" tIns="0" bIns="0" anchorCtr="1" anchor="ctr" wrap="none"/>
+            <a:lstStyle/>
+            <a:p>
+              <a:pPr algn="l" marL="0" marR="0" indent="0">
+                <a:lnSpc>
+                  <a:spcPts val="880"/>
+                </a:lnSpc>
+                <a:spcBef>
+                  <a:spcPts val="0"/>
+                </a:spcBef>
+                <a:spcAft>
+                  <a:spcPts val="0"/>
+                </a:spcAft>
+              </a:pPr>
+              <a:r>
+                <a:rPr sz="880">
+                  <a:solidFill>
+                    <a:srgbClr val="4D4D4D">
+                      <a:alpha val="100000"/>
+                    </a:srgbClr>
+                  </a:solidFill>
+                  <a:latin typeface="Helvetica"/>
+                  <a:cs typeface="Helvetica"/>
+                </a:rPr>
+                <a:t>20</a:t>
+              </a:r>
+            </a:p>
+          </p:txBody>
+        </p:sp>
+        <p:sp>
+          <p:nvSpPr>
+            <p:cNvPr id="91" name="tx91"/>
+            <p:cNvSpPr/>
+            <p:nvPr/>
+          </p:nvSpPr>
+          <p:spPr>
+            <a:xfrm>
+              <a:off x="8064935" y="5716183"/>
+              <a:ext cx="124358" cy="80101"/>
+            </a:xfrm>
+            <a:prstGeom prst="rect">
+              <a:avLst/>
+            </a:prstGeom>
+            <a:noFill/>
+          </p:spPr>
+          <p:txBody>
+            <a:bodyPr lIns="0" rIns="0" tIns="0" bIns="0" anchorCtr="1" anchor="ctr" wrap="none"/>
+            <a:lstStyle/>
+            <a:p>
+              <a:pPr algn="l" marL="0" marR="0" indent="0">
+                <a:lnSpc>
+                  <a:spcPts val="880"/>
+                </a:lnSpc>
+                <a:spcBef>
+                  <a:spcPts val="0"/>
+                </a:spcBef>
+                <a:spcAft>
+                  <a:spcPts val="0"/>
+                </a:spcAft>
+              </a:pPr>
+              <a:r>
+                <a:rPr sz="880">
+                  <a:solidFill>
+                    <a:srgbClr val="4D4D4D">
+                      <a:alpha val="100000"/>
+                    </a:srgbClr>
+                  </a:solidFill>
+                  <a:latin typeface="Helvetica"/>
+                  <a:cs typeface="Helvetica"/>
+                </a:rPr>
+                <a:t>30</a:t>
+              </a:r>
+            </a:p>
+          </p:txBody>
+        </p:sp>
+        <p:sp>
+          <p:nvSpPr>
+            <p:cNvPr id="92" name="tx92"/>
+            <p:cNvSpPr/>
+            <p:nvPr/>
+          </p:nvSpPr>
+          <p:spPr>
+            <a:xfrm>
+              <a:off x="1561815" y="5855859"/>
+              <a:ext cx="6311097" cy="100218"/>
+            </a:xfrm>
+            <a:prstGeom prst="rect">
+              <a:avLst/>
+            </a:prstGeom>
+            <a:noFill/>
+          </p:spPr>
+          <p:txBody>
+            <a:bodyPr lIns="0" rIns="0" tIns="0" bIns="0" anchorCtr="1" anchor="ctr" wrap="none"/>
+            <a:lstStyle/>
+            <a:p>
+              <a:pPr algn="l" marL="0" marR="0" indent="0">
+                <a:lnSpc>
+                  <a:spcPts val="1100"/>
+                </a:lnSpc>
+                <a:spcBef>
+                  <a:spcPts val="0"/>
+                </a:spcBef>
+                <a:spcAft>
+                  <a:spcPts val="0"/>
+                </a:spcAft>
+              </a:pPr>
+              <a:r>
+                <a:rPr sz="1100">
+                  <a:solidFill>
+                    <a:srgbClr val="000000">
+                      <a:alpha val="100000"/>
+                    </a:srgbClr>
+                  </a:solidFill>
+                  <a:latin typeface="Helvetica"/>
+                  <a:cs typeface="Helvetica"/>
+                </a:rPr>
+                <a:t>Sensitivity eGFR Difference (%): 100 × (CKD-EPI 2012 CysC − CKD-EPI 2021 Cr) / CKD-EPI 2021 Cr</a:t>
+              </a:r>
+            </a:p>
+          </p:txBody>
+        </p:sp>
+        <p:sp>
+          <p:nvSpPr>
+            <p:cNvPr id="93" name="tx93"/>
+            <p:cNvSpPr/>
+            <p:nvPr/>
+          </p:nvSpPr>
+          <p:spPr>
+            <a:xfrm rot="-5400000">
+              <a:off x="138035" y="4944909"/>
+              <a:ext cx="1016904" cy="100218"/>
+            </a:xfrm>
+            <a:prstGeom prst="rect">
+              <a:avLst/>
+            </a:prstGeom>
+            <a:noFill/>
+          </p:spPr>
+          <p:txBody>
+            <a:bodyPr lIns="0" rIns="0" tIns="0" bIns="0" anchorCtr="1" anchor="ctr" wrap="none"/>
+            <a:lstStyle/>
+            <a:p>
+              <a:pPr algn="l" marL="0" marR="0" indent="0">
+                <a:lnSpc>
+                  <a:spcPts val="1100"/>
+                </a:lnSpc>
+                <a:spcBef>
+                  <a:spcPts val="0"/>
+                </a:spcBef>
+                <a:spcAft>
+                  <a:spcPts val="0"/>
+                </a:spcAft>
+              </a:pPr>
+              <a:r>
+                <a:rPr sz="1100">
+                  <a:solidFill>
+                    <a:srgbClr val="000000">
+                      <a:alpha val="100000"/>
+                    </a:srgbClr>
+                  </a:solidFill>
+                  <a:latin typeface="Helvetica"/>
+                  <a:cs typeface="Helvetica"/>
+                </a:rPr>
+                <a:t>subHR (95% CI)</a:t>
+              </a:r>
+            </a:p>
+          </p:txBody>
+        </p:sp>
+        <p:sp>
+          <p:nvSpPr>
+            <p:cNvPr id="94" name="tx94"/>
+            <p:cNvSpPr/>
+            <p:nvPr/>
+          </p:nvSpPr>
+          <p:spPr>
+            <a:xfrm>
+              <a:off x="887106" y="4159544"/>
+              <a:ext cx="6959864" cy="82021"/>
+            </a:xfrm>
+            <a:prstGeom prst="rect">
+              <a:avLst/>
+            </a:prstGeom>
+            <a:noFill/>
+          </p:spPr>
+          <p:txBody>
+            <a:bodyPr lIns="0" rIns="0" tIns="0" bIns="0" anchorCtr="1" anchor="ctr" wrap="none"/>
+            <a:lstStyle/>
+            <a:p>
+              <a:pPr algn="l" marL="0" marR="0" indent="0">
+                <a:lnSpc>
+                  <a:spcPts val="900"/>
+                </a:lnSpc>
+                <a:spcBef>
+                  <a:spcPts val="0"/>
+                </a:spcBef>
+                <a:spcAft>
+                  <a:spcPts val="0"/>
+                </a:spcAft>
+              </a:pPr>
+              <a:r>
+                <a:rPr sz="900">
+                  <a:solidFill>
+                    <a:srgbClr val="404040">
+                      <a:alpha val="100000"/>
+                    </a:srgbClr>
+                  </a:solidFill>
+                  <a:latin typeface="Helvetica"/>
+                  <a:cs typeface="Helvetica"/>
+                </a:rPr>
+                <a:t>subHR per 10 % decline: 1.18 (1.06-1.31), p_Bonf = 0.020 (n = 6)  |  per IQR decline (Δ = 27.5 %): 1.56 (1.16-2.10)  |  IQR: [-29.1, -1.6] %</a:t>
+              </a:r>
+            </a:p>
+          </p:txBody>
+        </p:sp>
+        <p:sp>
+          <p:nvSpPr>
+            <p:cNvPr id="95" name="tx95"/>
+            <p:cNvSpPr/>
+            <p:nvPr/>
+          </p:nvSpPr>
+          <p:spPr>
+            <a:xfrm>
+              <a:off x="887106" y="3932770"/>
               <a:ext cx="2951591" cy="120152"/>
             </a:xfrm>
             <a:prstGeom prst="rect">
